--- a/presentation/VergeLink_Vishwakarma_Stage2.pptx
+++ b/presentation/VergeLink_Vishwakarma_Stage2.pptx
@@ -10,14 +10,17 @@
   <p:sldIdLst>
     <p:sldId id="256" r:id="rId7"/>
     <p:sldId id="259" r:id="rId10"/>
+    <p:sldId id="286" r:id="rId57"/>
+    <p:sldId id="285" r:id="rId56"/>
+    <p:sldId id="284" r:id="rId55"/>
+    <p:sldId id="283" r:id="rId54"/>
+    <p:sldId id="282" r:id="rId53"/>
+    <p:sldId id="281" r:id="rId52"/>
+    <p:sldId id="280" r:id="rId51"/>
+    <p:sldId id="279" r:id="rId50"/>
+    <p:sldId id="278" r:id="rId49"/>
+    <p:sldId id="277" r:id="rId48"/>
     <p:sldId id="276" r:id="rId47"/>
-    <p:sldId id="277" r:id="rId48"/>
-    <p:sldId id="278" r:id="rId49"/>
-    <p:sldId id="279" r:id="rId50"/>
-    <p:sldId id="280" r:id="rId51"/>
-    <p:sldId id="281" r:id="rId52"/>
-    <p:sldId id="282" r:id="rId53"/>
-    <p:sldId id="283" r:id="rId54"/>
   </p:sldIdLst>
   <p:sldSz cy="6858000" cx="12192000"/>
   <p:notesSz cx="6858000" cy="9144000"/>
@@ -10953,7 +10956,7 @@
                 </a:solidFill>
                 <a:latin typeface="Poppins SemiBold"/>
               </a:rPr>
-              <a:t>References &amp; Sources</a:t>
+              <a:t>Technical Challenges &amp; Risks</a:t>
             </a:r>
           </a:p>
         </p:txBody>
@@ -11024,6 +11027,2439 @@
         <p:spPr>
           <a:xfrm>
             <a:off x="530352" y="932688"/>
+            <a:ext cx="3611880" cy="2560320"/>
+          </a:xfrm>
+          <a:prstGeom prst="roundRect">
+            <a:avLst>
+              <a:gd name="adj" fmla="val 6000"/>
+            </a:avLst>
+          </a:prstGeom>
+          <a:solidFill>
+            <a:srgbClr val="F0FDF4"/>
+          </a:solidFill>
+          <a:ln w="9525">
+            <a:solidFill>
+              <a:srgbClr val="BBF7D0"/>
+            </a:solidFill>
+          </a:ln>
+          <a:effectLst/>
+        </p:spPr>
+        <p:style>
+          <a:lnRef idx="1">
+            <a:schemeClr val="accent1"/>
+          </a:lnRef>
+          <a:fillRef idx="3">
+            <a:schemeClr val="accent1"/>
+          </a:fillRef>
+          <a:effectRef idx="2">
+            <a:schemeClr val="accent1"/>
+          </a:effectRef>
+          <a:fontRef idx="minor">
+            <a:schemeClr val="lt1"/>
+          </a:fontRef>
+        </p:style>
+        <p:txBody>
+          <a:bodyPr rtlCol="0" anchor="ctr"/>
+          <a:lstStyle/>
+          <a:p/>
+        </p:txBody>
+      </p:sp>
+      <p:pic>
+        <p:nvPicPr>
+          <p:cNvPr id="161" name="Picture 160" descr="image.png"/>
+          <p:cNvPicPr>
+            <a:picLocks noChangeAspect="1"/>
+          </p:cNvPicPr>
+          <p:nvPr/>
+        </p:nvPicPr>
+        <p:blipFill>
+          <a:blip r:embed="rId12"/>
+          <a:stretch>
+            <a:fillRect/>
+          </a:stretch>
+        </p:blipFill>
+        <p:spPr>
+          <a:xfrm>
+            <a:off x="685800" y="1069848"/>
+            <a:ext cx="155448" cy="155448"/>
+          </a:xfrm>
+          <a:prstGeom prst="rect">
+            <a:avLst/>
+          </a:prstGeom>
+        </p:spPr>
+      </p:pic>
+      <p:sp>
+        <p:nvSpPr>
+          <p:cNvPr id="162" name="TextBox 161"/>
+          <p:cNvSpPr txBox="1"/>
+          <p:nvPr/>
+        </p:nvSpPr>
+        <p:spPr>
+          <a:xfrm>
+            <a:off x="923544" y="1042415"/>
+            <a:ext cx="3099815" cy="219456"/>
+          </a:xfrm>
+          <a:prstGeom prst="rect">
+            <a:avLst/>
+          </a:prstGeom>
+          <a:noFill/>
+        </p:spPr>
+        <p:txBody>
+          <a:bodyPr wrap="square" anchor="t" lIns="0" rIns="0" tIns="0" bIns="0">
+            <a:spAutoFit/>
+          </a:bodyPr>
+          <a:lstStyle/>
+          <a:p>
+            <a:pPr algn="l"/>
+            <a:r>
+              <a:rPr sz="1060" b="1" i="0">
+                <a:solidFill>
+                  <a:srgbClr val="0F172A"/>
+                </a:solidFill>
+                <a:latin typeface="DM Sans"/>
+              </a:rPr>
+              <a:t>Bottleneck: EOG drift vs vergence</a:t>
+            </a:r>
+          </a:p>
+        </p:txBody>
+      </p:sp>
+      <p:sp>
+        <p:nvSpPr>
+          <p:cNvPr id="163" name="TextBox 162"/>
+          <p:cNvSpPr txBox="1"/>
+          <p:nvPr/>
+        </p:nvSpPr>
+        <p:spPr>
+          <a:xfrm>
+            <a:off x="685800" y="1426464"/>
+            <a:ext cx="3310128" cy="2011680"/>
+          </a:xfrm>
+          <a:prstGeom prst="rect">
+            <a:avLst/>
+          </a:prstGeom>
+          <a:noFill/>
+        </p:spPr>
+        <p:txBody>
+          <a:bodyPr wrap="square" anchor="t" lIns="0" rIns="0" tIns="0" bIns="0">
+            <a:spAutoFit/>
+          </a:bodyPr>
+          <a:lstStyle/>
+          <a:p>
+            <a:pPr marL="155448" indent="-155448">
+              <a:spcAft>
+                <a:spcPts val="1000"/>
+              </a:spcAft>
+              <a:buClr>
+                <a:srgbClr val="059669"/>
+              </a:buClr>
+              <a:buSzPct val="110000"/>
+              <a:buFont typeface="Arial"/>
+              <a:buChar char="▪"/>
+            </a:pPr>
+            <a:r>
+              <a:rPr sz="1100" b="1" i="0">
+                <a:solidFill>
+                  <a:srgbClr val="334155"/>
+                </a:solidFill>
+                <a:latin typeface="DM Sans"/>
+              </a:rPr>
+              <a:t>Constraint: </a:t>
+            </a:r>
+            <a:r>
+              <a:rPr sz="1100" b="0" i="0">
+                <a:solidFill>
+                  <a:srgbClr val="334155"/>
+                </a:solidFill>
+                <a:latin typeface="DM Sans"/>
+              </a:rPr>
+              <a:t>The near/far vergence change is small next to slow electrode drift. A strong high-pass filter would remove the drift — and the vergence signal with it.</a:t>
+            </a:r>
+          </a:p>
+          <a:p>
+            <a:pPr marL="155448" indent="-155448">
+              <a:spcAft>
+                <a:spcPts val="1000"/>
+              </a:spcAft>
+              <a:buClr>
+                <a:srgbClr val="059669"/>
+              </a:buClr>
+              <a:buSzPct val="110000"/>
+              <a:buFont typeface="Arial"/>
+              <a:buChar char="▪"/>
+            </a:pPr>
+            <a:r>
+              <a:rPr sz="1100" b="1" i="0">
+                <a:solidFill>
+                  <a:srgbClr val="334155"/>
+                </a:solidFill>
+                <a:latin typeface="DM Sans"/>
+              </a:rPr>
+              <a:t>If unmanaged: </a:t>
+            </a:r>
+            <a:r>
+              <a:rPr sz="1100" b="0" i="0">
+                <a:solidFill>
+                  <a:srgbClr val="334155"/>
+                </a:solidFill>
+                <a:latin typeface="DM Sans"/>
+              </a:rPr>
+              <a:t>Wrong depth chosen; selections that wander over a session.</a:t>
+            </a:r>
+          </a:p>
+        </p:txBody>
+      </p:sp>
+      <p:sp>
+        <p:nvSpPr>
+          <p:cNvPr id="164" name="Rounded Rectangle 163"/>
+          <p:cNvSpPr/>
+          <p:nvPr/>
+        </p:nvSpPr>
+        <p:spPr>
+          <a:xfrm>
+            <a:off x="4288536" y="932688"/>
+            <a:ext cx="3611880" cy="2560320"/>
+          </a:xfrm>
+          <a:prstGeom prst="roundRect">
+            <a:avLst>
+              <a:gd name="adj" fmla="val 6000"/>
+            </a:avLst>
+          </a:prstGeom>
+          <a:solidFill>
+            <a:srgbClr val="F8FAFC"/>
+          </a:solidFill>
+          <a:ln w="9525">
+            <a:solidFill>
+              <a:srgbClr val="E2E8F0"/>
+            </a:solidFill>
+          </a:ln>
+          <a:effectLst/>
+        </p:spPr>
+        <p:style>
+          <a:lnRef idx="1">
+            <a:schemeClr val="accent1"/>
+          </a:lnRef>
+          <a:fillRef idx="3">
+            <a:schemeClr val="accent1"/>
+          </a:fillRef>
+          <a:effectRef idx="2">
+            <a:schemeClr val="accent1"/>
+          </a:effectRef>
+          <a:fontRef idx="minor">
+            <a:schemeClr val="lt1"/>
+          </a:fontRef>
+        </p:style>
+        <p:txBody>
+          <a:bodyPr rtlCol="0" anchor="ctr"/>
+          <a:lstStyle/>
+          <a:p/>
+        </p:txBody>
+      </p:sp>
+      <p:pic>
+        <p:nvPicPr>
+          <p:cNvPr id="165" name="Picture 164" descr="image.png"/>
+          <p:cNvPicPr>
+            <a:picLocks noChangeAspect="1"/>
+          </p:cNvPicPr>
+          <p:nvPr/>
+        </p:nvPicPr>
+        <p:blipFill>
+          <a:blip r:embed="rId12"/>
+          <a:stretch>
+            <a:fillRect/>
+          </a:stretch>
+        </p:blipFill>
+        <p:spPr>
+          <a:xfrm>
+            <a:off x="4443984" y="1069848"/>
+            <a:ext cx="155448" cy="155448"/>
+          </a:xfrm>
+          <a:prstGeom prst="rect">
+            <a:avLst/>
+          </a:prstGeom>
+        </p:spPr>
+      </p:pic>
+      <p:sp>
+        <p:nvSpPr>
+          <p:cNvPr id="166" name="TextBox 165"/>
+          <p:cNvSpPr txBox="1"/>
+          <p:nvPr/>
+        </p:nvSpPr>
+        <p:spPr>
+          <a:xfrm>
+            <a:off x="4681728" y="1042415"/>
+            <a:ext cx="3099815" cy="219456"/>
+          </a:xfrm>
+          <a:prstGeom prst="rect">
+            <a:avLst/>
+          </a:prstGeom>
+          <a:noFill/>
+        </p:spPr>
+        <p:txBody>
+          <a:bodyPr wrap="square" anchor="t" lIns="0" rIns="0" tIns="0" bIns="0">
+            <a:spAutoFit/>
+          </a:bodyPr>
+          <a:lstStyle/>
+          <a:p>
+            <a:pPr algn="l"/>
+            <a:r>
+              <a:rPr sz="1060" b="1" i="0">
+                <a:solidFill>
+                  <a:srgbClr val="0F172A"/>
+                </a:solidFill>
+                <a:latin typeface="DM Sans"/>
+              </a:rPr>
+              <a:t>Bottleneck: ESP32 ADC quality</a:t>
+            </a:r>
+          </a:p>
+        </p:txBody>
+      </p:sp>
+      <p:sp>
+        <p:nvSpPr>
+          <p:cNvPr id="167" name="TextBox 166"/>
+          <p:cNvSpPr txBox="1"/>
+          <p:nvPr/>
+        </p:nvSpPr>
+        <p:spPr>
+          <a:xfrm>
+            <a:off x="4443984" y="1426464"/>
+            <a:ext cx="3310128" cy="2011680"/>
+          </a:xfrm>
+          <a:prstGeom prst="rect">
+            <a:avLst/>
+          </a:prstGeom>
+          <a:noFill/>
+        </p:spPr>
+        <p:txBody>
+          <a:bodyPr wrap="square" anchor="t" lIns="0" rIns="0" tIns="0" bIns="0">
+            <a:spAutoFit/>
+          </a:bodyPr>
+          <a:lstStyle/>
+          <a:p>
+            <a:pPr marL="155448" indent="-155448">
+              <a:spcAft>
+                <a:spcPts val="1000"/>
+              </a:spcAft>
+              <a:buClr>
+                <a:srgbClr val="059669"/>
+              </a:buClr>
+              <a:buSzPct val="110000"/>
+              <a:buFont typeface="Arial"/>
+              <a:buChar char="▪"/>
+            </a:pPr>
+            <a:r>
+              <a:rPr sz="1100" b="1" i="0">
+                <a:solidFill>
+                  <a:srgbClr val="334155"/>
+                </a:solidFill>
+                <a:latin typeface="DM Sans"/>
+              </a:rPr>
+              <a:t>Constraint: </a:t>
+            </a:r>
+            <a:r>
+              <a:rPr sz="1100" b="0" i="0">
+                <a:solidFill>
+                  <a:srgbClr val="334155"/>
+                </a:solidFill>
+                <a:latin typeface="DM Sans"/>
+              </a:rPr>
+              <a:t>The ESP32 ADC is non-linear near its range limits and noisy, and ADC2 is unavailable while Wi-Fi or Bluetooth runs.</a:t>
+            </a:r>
+          </a:p>
+          <a:p>
+            <a:pPr marL="155448" indent="-155448">
+              <a:spcAft>
+                <a:spcPts val="1000"/>
+              </a:spcAft>
+              <a:buClr>
+                <a:srgbClr val="059669"/>
+              </a:buClr>
+              <a:buSzPct val="110000"/>
+              <a:buFont typeface="Arial"/>
+              <a:buChar char="▪"/>
+            </a:pPr>
+            <a:r>
+              <a:rPr sz="1100" b="1" i="0">
+                <a:solidFill>
+                  <a:srgbClr val="334155"/>
+                </a:solidFill>
+                <a:latin typeface="DM Sans"/>
+              </a:rPr>
+              <a:t>If unmanaged: </a:t>
+            </a:r>
+            <a:r>
+              <a:rPr sz="1100" b="0" i="0">
+                <a:solidFill>
+                  <a:srgbClr val="334155"/>
+                </a:solidFill>
+                <a:latin typeface="DM Sans"/>
+              </a:rPr>
+              <a:t>Distorted EOG / EMG traces; poor repeatability between units.</a:t>
+            </a:r>
+          </a:p>
+        </p:txBody>
+      </p:sp>
+      <p:sp>
+        <p:nvSpPr>
+          <p:cNvPr id="168" name="Rounded Rectangle 167"/>
+          <p:cNvSpPr/>
+          <p:nvPr/>
+        </p:nvSpPr>
+        <p:spPr>
+          <a:xfrm>
+            <a:off x="8046720" y="932688"/>
+            <a:ext cx="3611880" cy="2560320"/>
+          </a:xfrm>
+          <a:prstGeom prst="roundRect">
+            <a:avLst>
+              <a:gd name="adj" fmla="val 6000"/>
+            </a:avLst>
+          </a:prstGeom>
+          <a:solidFill>
+            <a:srgbClr val="F0FDF4"/>
+          </a:solidFill>
+          <a:ln w="9525">
+            <a:solidFill>
+              <a:srgbClr val="BBF7D0"/>
+            </a:solidFill>
+          </a:ln>
+          <a:effectLst/>
+        </p:spPr>
+        <p:style>
+          <a:lnRef idx="1">
+            <a:schemeClr val="accent1"/>
+          </a:lnRef>
+          <a:fillRef idx="3">
+            <a:schemeClr val="accent1"/>
+          </a:fillRef>
+          <a:effectRef idx="2">
+            <a:schemeClr val="accent1"/>
+          </a:effectRef>
+          <a:fontRef idx="minor">
+            <a:schemeClr val="lt1"/>
+          </a:fontRef>
+        </p:style>
+        <p:txBody>
+          <a:bodyPr rtlCol="0" anchor="ctr"/>
+          <a:lstStyle/>
+          <a:p/>
+        </p:txBody>
+      </p:sp>
+      <p:pic>
+        <p:nvPicPr>
+          <p:cNvPr id="169" name="Picture 168" descr="image.png"/>
+          <p:cNvPicPr>
+            <a:picLocks noChangeAspect="1"/>
+          </p:cNvPicPr>
+          <p:nvPr/>
+        </p:nvPicPr>
+        <p:blipFill>
+          <a:blip r:embed="rId12"/>
+          <a:stretch>
+            <a:fillRect/>
+          </a:stretch>
+        </p:blipFill>
+        <p:spPr>
+          <a:xfrm>
+            <a:off x="8202168" y="1069848"/>
+            <a:ext cx="155448" cy="155448"/>
+          </a:xfrm>
+          <a:prstGeom prst="rect">
+            <a:avLst/>
+          </a:prstGeom>
+        </p:spPr>
+      </p:pic>
+      <p:sp>
+        <p:nvSpPr>
+          <p:cNvPr id="170" name="TextBox 169"/>
+          <p:cNvSpPr txBox="1"/>
+          <p:nvPr/>
+        </p:nvSpPr>
+        <p:spPr>
+          <a:xfrm>
+            <a:off x="8439912" y="1042415"/>
+            <a:ext cx="3099815" cy="219456"/>
+          </a:xfrm>
+          <a:prstGeom prst="rect">
+            <a:avLst/>
+          </a:prstGeom>
+          <a:noFill/>
+        </p:spPr>
+        <p:txBody>
+          <a:bodyPr wrap="square" anchor="t" lIns="0" rIns="0" tIns="0" bIns="0">
+            <a:spAutoFit/>
+          </a:bodyPr>
+          <a:lstStyle/>
+          <a:p>
+            <a:pPr algn="l"/>
+            <a:r>
+              <a:rPr sz="1060" b="1" i="0">
+                <a:solidFill>
+                  <a:srgbClr val="0F172A"/>
+                </a:solidFill>
+                <a:latin typeface="DM Sans"/>
+              </a:rPr>
+              <a:t>Bottleneck: false jaw-clench triggers</a:t>
+            </a:r>
+          </a:p>
+        </p:txBody>
+      </p:sp>
+      <p:sp>
+        <p:nvSpPr>
+          <p:cNvPr id="171" name="TextBox 170"/>
+          <p:cNvSpPr txBox="1"/>
+          <p:nvPr/>
+        </p:nvSpPr>
+        <p:spPr>
+          <a:xfrm>
+            <a:off x="8202168" y="1426464"/>
+            <a:ext cx="3310128" cy="2011680"/>
+          </a:xfrm>
+          <a:prstGeom prst="rect">
+            <a:avLst/>
+          </a:prstGeom>
+          <a:noFill/>
+        </p:spPr>
+        <p:txBody>
+          <a:bodyPr wrap="square" anchor="t" lIns="0" rIns="0" tIns="0" bIns="0">
+            <a:spAutoFit/>
+          </a:bodyPr>
+          <a:lstStyle/>
+          <a:p>
+            <a:pPr marL="155448" indent="-155448">
+              <a:spcAft>
+                <a:spcPts val="1000"/>
+              </a:spcAft>
+              <a:buClr>
+                <a:srgbClr val="059669"/>
+              </a:buClr>
+              <a:buSzPct val="110000"/>
+              <a:buFont typeface="Arial"/>
+              <a:buChar char="▪"/>
+            </a:pPr>
+            <a:r>
+              <a:rPr sz="1100" b="1" i="0">
+                <a:solidFill>
+                  <a:srgbClr val="334155"/>
+                </a:solidFill>
+                <a:latin typeface="DM Sans"/>
+              </a:rPr>
+              <a:t>Constraint: </a:t>
+            </a:r>
+            <a:r>
+              <a:rPr sz="1100" b="0" i="0">
+                <a:solidFill>
+                  <a:srgbClr val="334155"/>
+                </a:solidFill>
+                <a:latin typeface="DM Sans"/>
+              </a:rPr>
+              <a:t>Chewing, talking and swallowing all produce masseter EMG that can look like a deliberate clench.</a:t>
+            </a:r>
+          </a:p>
+          <a:p>
+            <a:pPr marL="155448" indent="-155448">
+              <a:spcAft>
+                <a:spcPts val="1000"/>
+              </a:spcAft>
+              <a:buClr>
+                <a:srgbClr val="059669"/>
+              </a:buClr>
+              <a:buSzPct val="110000"/>
+              <a:buFont typeface="Arial"/>
+              <a:buChar char="▪"/>
+            </a:pPr>
+            <a:r>
+              <a:rPr sz="1100" b="1" i="0">
+                <a:solidFill>
+                  <a:srgbClr val="334155"/>
+                </a:solidFill>
+                <a:latin typeface="DM Sans"/>
+              </a:rPr>
+              <a:t>If unmanaged: </a:t>
+            </a:r>
+            <a:r>
+              <a:rPr sz="1100" b="0" i="0">
+                <a:solidFill>
+                  <a:srgbClr val="334155"/>
+                </a:solidFill>
+                <a:latin typeface="DM Sans"/>
+              </a:rPr>
+              <a:t>Unwanted fan or light switching during meals or conversation.</a:t>
+            </a:r>
+          </a:p>
+        </p:txBody>
+      </p:sp>
+      <p:sp>
+        <p:nvSpPr>
+          <p:cNvPr id="172" name="Rounded Rectangle 171"/>
+          <p:cNvSpPr/>
+          <p:nvPr/>
+        </p:nvSpPr>
+        <p:spPr>
+          <a:xfrm>
+            <a:off x="530352" y="3657600"/>
+            <a:ext cx="11128248" cy="1901952"/>
+          </a:xfrm>
+          <a:prstGeom prst="roundRect">
+            <a:avLst>
+              <a:gd name="adj" fmla="val 6000"/>
+            </a:avLst>
+          </a:prstGeom>
+          <a:solidFill>
+            <a:srgbClr val="F8FAFC"/>
+          </a:solidFill>
+          <a:ln w="9525">
+            <a:solidFill>
+              <a:srgbClr val="E2E8F0"/>
+            </a:solidFill>
+          </a:ln>
+          <a:effectLst/>
+        </p:spPr>
+        <p:style>
+          <a:lnRef idx="1">
+            <a:schemeClr val="accent1"/>
+          </a:lnRef>
+          <a:fillRef idx="3">
+            <a:schemeClr val="accent1"/>
+          </a:fillRef>
+          <a:effectRef idx="2">
+            <a:schemeClr val="accent1"/>
+          </a:effectRef>
+          <a:fontRef idx="minor">
+            <a:schemeClr val="lt1"/>
+          </a:fontRef>
+        </p:style>
+        <p:txBody>
+          <a:bodyPr rtlCol="0" anchor="ctr"/>
+          <a:lstStyle/>
+          <a:p/>
+        </p:txBody>
+      </p:sp>
+      <p:pic>
+        <p:nvPicPr>
+          <p:cNvPr id="173" name="Picture 172" descr="image.png"/>
+          <p:cNvPicPr>
+            <a:picLocks noChangeAspect="1"/>
+          </p:cNvPicPr>
+          <p:nvPr/>
+        </p:nvPicPr>
+        <p:blipFill>
+          <a:blip r:embed="rId12"/>
+          <a:stretch>
+            <a:fillRect/>
+          </a:stretch>
+        </p:blipFill>
+        <p:spPr>
+          <a:xfrm>
+            <a:off x="694944" y="3794760"/>
+            <a:ext cx="155448" cy="155448"/>
+          </a:xfrm>
+          <a:prstGeom prst="rect">
+            <a:avLst/>
+          </a:prstGeom>
+        </p:spPr>
+      </p:pic>
+      <p:sp>
+        <p:nvSpPr>
+          <p:cNvPr id="174" name="TextBox 173"/>
+          <p:cNvSpPr txBox="1"/>
+          <p:nvPr/>
+        </p:nvSpPr>
+        <p:spPr>
+          <a:xfrm>
+            <a:off x="932688" y="3767328"/>
+            <a:ext cx="10552176" cy="219456"/>
+          </a:xfrm>
+          <a:prstGeom prst="rect">
+            <a:avLst/>
+          </a:prstGeom>
+          <a:noFill/>
+        </p:spPr>
+        <p:txBody>
+          <a:bodyPr wrap="square" anchor="t" lIns="0" rIns="0" tIns="0" bIns="0">
+            <a:spAutoFit/>
+          </a:bodyPr>
+          <a:lstStyle/>
+          <a:p>
+            <a:pPr algn="l"/>
+            <a:r>
+              <a:rPr sz="1125" b="1" i="0">
+                <a:solidFill>
+                  <a:srgbClr val="0F172A"/>
+                </a:solidFill>
+                <a:latin typeface="DM Sans"/>
+              </a:rPr>
+              <a:t>Other risks tracked</a:t>
+            </a:r>
+          </a:p>
+        </p:txBody>
+      </p:sp>
+      <p:sp>
+        <p:nvSpPr>
+          <p:cNvPr id="175" name="TextBox 174"/>
+          <p:cNvSpPr txBox="1"/>
+          <p:nvPr/>
+        </p:nvSpPr>
+        <p:spPr>
+          <a:xfrm>
+            <a:off x="694944" y="4096512"/>
+            <a:ext cx="10789920" cy="1417320"/>
+          </a:xfrm>
+          <a:prstGeom prst="rect">
+            <a:avLst/>
+          </a:prstGeom>
+          <a:noFill/>
+        </p:spPr>
+        <p:txBody>
+          <a:bodyPr wrap="square" anchor="t" lIns="0" rIns="0" tIns="0" bIns="0">
+            <a:spAutoFit/>
+          </a:bodyPr>
+          <a:lstStyle/>
+          <a:p>
+            <a:pPr marL="155448" indent="-155448">
+              <a:spcAft>
+                <a:spcPts val="800"/>
+              </a:spcAft>
+              <a:buClr>
+                <a:srgbClr val="059669"/>
+              </a:buClr>
+              <a:buSzPct val="110000"/>
+              <a:buFont typeface="Arial"/>
+              <a:buChar char="▪"/>
+            </a:pPr>
+            <a:r>
+              <a:rPr sz="1060" b="1" i="0">
+                <a:solidFill>
+                  <a:srgbClr val="334155"/>
+                </a:solidFill>
+                <a:latin typeface="DM Sans"/>
+              </a:rPr>
+              <a:t>ToF on dark / glossy targets: </a:t>
+            </a:r>
+            <a:r>
+              <a:rPr sz="1060" b="0" i="0">
+                <a:solidFill>
+                  <a:srgbClr val="334155"/>
+                </a:solidFill>
+                <a:latin typeface="DM Sans"/>
+              </a:rPr>
+              <a:t>measured surface distance may not match where the eyes converge.</a:t>
+            </a:r>
+          </a:p>
+          <a:p>
+            <a:pPr marL="155448" indent="-155448">
+              <a:spcAft>
+                <a:spcPts val="800"/>
+              </a:spcAft>
+              <a:buClr>
+                <a:srgbClr val="059669"/>
+              </a:buClr>
+              <a:buSzPct val="110000"/>
+              <a:buFont typeface="Arial"/>
+              <a:buChar char="▪"/>
+            </a:pPr>
+            <a:r>
+              <a:rPr sz="1060" b="1" i="0">
+                <a:solidFill>
+                  <a:srgbClr val="334155"/>
+                </a:solidFill>
+                <a:latin typeface="DM Sans"/>
+              </a:rPr>
+              <a:t>No magnetometer: </a:t>
+            </a:r>
+            <a:r>
+              <a:rPr sz="1060" b="0" i="0">
+                <a:solidFill>
+                  <a:srgbClr val="334155"/>
+                </a:solidFill>
+                <a:latin typeface="DM Sans"/>
+              </a:rPr>
+              <a:t>MPU6500 yaw drifts, so it cannot give a stable room heading.</a:t>
+            </a:r>
+          </a:p>
+          <a:p>
+            <a:pPr marL="155448" indent="-155448">
+              <a:spcAft>
+                <a:spcPts val="800"/>
+              </a:spcAft>
+              <a:buClr>
+                <a:srgbClr val="059669"/>
+              </a:buClr>
+              <a:buSzPct val="110000"/>
+              <a:buFont typeface="Arial"/>
+              <a:buChar char="▪"/>
+            </a:pPr>
+            <a:r>
+              <a:rPr sz="1060" b="1" i="0">
+                <a:solidFill>
+                  <a:srgbClr val="334155"/>
+                </a:solidFill>
+                <a:latin typeface="DM Sans"/>
+              </a:rPr>
+              <a:t>Relay control path: </a:t>
+            </a:r>
+            <a:r>
+              <a:rPr sz="1060" b="0" i="0">
+                <a:solidFill>
+                  <a:srgbClr val="334155"/>
+                </a:solidFill>
+                <a:latin typeface="DM Sans"/>
+              </a:rPr>
+              <a:t>the DUALR3's local (LAN) vs cloud control options must be confirmed before the app is written.</a:t>
+            </a:r>
+          </a:p>
+        </p:txBody>
+      </p:sp>
+      <p:sp>
+        <p:nvSpPr>
+          <p:cNvPr id="176" name="Rounded Rectangle 175"/>
+          <p:cNvSpPr/>
+          <p:nvPr/>
+        </p:nvSpPr>
+        <p:spPr>
+          <a:xfrm>
+            <a:off x="530352" y="5687568"/>
+            <a:ext cx="11128248" cy="402336"/>
+          </a:xfrm>
+          <a:prstGeom prst="roundRect">
+            <a:avLst>
+              <a:gd name="adj" fmla="val 12000"/>
+            </a:avLst>
+          </a:prstGeom>
+          <a:solidFill>
+            <a:srgbClr val="F0FDF4"/>
+          </a:solidFill>
+          <a:ln w="9525">
+            <a:solidFill>
+              <a:srgbClr val="BBF7D0"/>
+            </a:solidFill>
+          </a:ln>
+          <a:effectLst/>
+        </p:spPr>
+        <p:style>
+          <a:lnRef idx="1">
+            <a:schemeClr val="accent1"/>
+          </a:lnRef>
+          <a:fillRef idx="3">
+            <a:schemeClr val="accent1"/>
+          </a:fillRef>
+          <a:effectRef idx="2">
+            <a:schemeClr val="accent1"/>
+          </a:effectRef>
+          <a:fontRef idx="minor">
+            <a:schemeClr val="lt1"/>
+          </a:fontRef>
+        </p:style>
+        <p:txBody>
+          <a:bodyPr rtlCol="0" anchor="ctr"/>
+          <a:lstStyle/>
+          <a:p/>
+        </p:txBody>
+      </p:sp>
+      <p:sp>
+        <p:nvSpPr>
+          <p:cNvPr id="177" name="TextBox 176"/>
+          <p:cNvSpPr txBox="1"/>
+          <p:nvPr/>
+        </p:nvSpPr>
+        <p:spPr>
+          <a:xfrm>
+            <a:off x="694944" y="5687568"/>
+            <a:ext cx="10835640" cy="402336"/>
+          </a:xfrm>
+          <a:prstGeom prst="rect">
+            <a:avLst/>
+          </a:prstGeom>
+          <a:noFill/>
+        </p:spPr>
+        <p:txBody>
+          <a:bodyPr wrap="square" anchor="ctr" lIns="0" rIns="0" tIns="0" bIns="0">
+            <a:spAutoFit/>
+          </a:bodyPr>
+          <a:lstStyle/>
+          <a:p>
+            <a:pPr algn="l"/>
+            <a:r>
+              <a:rPr sz="936" b="1" i="0">
+                <a:solidFill>
+                  <a:srgbClr val="0F172A"/>
+                </a:solidFill>
+                <a:latin typeface="DM Sans"/>
+              </a:rPr>
+              <a:t>Why this matters: </a:t>
+            </a:r>
+            <a:r>
+              <a:rPr sz="936" b="0" i="0">
+                <a:solidFill>
+                  <a:srgbClr val="475569"/>
+                </a:solidFill>
+                <a:latin typeface="DM Sans"/>
+              </a:rPr>
+              <a:t>each of these could make the demo look like it works on the bench but fail with a real user — so each one has a planned test on the next slide.</a:t>
+            </a:r>
+          </a:p>
+        </p:txBody>
+      </p:sp>
+    </p:spTree>
+  </p:cSld>
+  <p:clrMapOvr>
+    <a:masterClrMapping/>
+  </p:clrMapOvr>
+</p:sld>
+</file>
+
+<file path=ppt/slides/slide11.xml><?xml version="1.0" encoding="utf-8"?>
+<p:sld xmlns:a="http://schemas.openxmlformats.org/drawingml/2006/main" xmlns:r="http://schemas.openxmlformats.org/officeDocument/2006/relationships" xmlns:mc="http://schemas.openxmlformats.org/markup-compatibility/2006" xmlns:mv="urn:schemas-microsoft-com:mac:vml" xmlns:p="http://schemas.openxmlformats.org/presentationml/2006/main" xmlns:c="http://schemas.openxmlformats.org/drawingml/2006/chart" xmlns:dgm="http://schemas.openxmlformats.org/drawingml/2006/diagram" xmlns:o="urn:schemas-microsoft-com:office:office" xmlns:v="urn:schemas-microsoft-com:vml" xmlns:pvml="urn:schemas-microsoft-com:office:powerpoint" xmlns:com="http://schemas.openxmlformats.org/drawingml/2006/compatibility" xmlns:p14="http://schemas.microsoft.com/office/powerpoint/2010/main" xmlns:p15="http://schemas.microsoft.com/office/powerpoint/2012/main" xmlns:ahyp="http://schemas.microsoft.com/office/drawing/2018/hyperlinkcolor">
+  <p:cSld>
+    <p:bg>
+      <p:bgPr>
+        <a:solidFill>
+          <a:srgbClr val="FFFFFF"/>
+        </a:solidFill>
+      </p:bgPr>
+    </p:bg>
+    <p:spTree>
+      <p:nvGrpSpPr>
+        <p:cNvPr id="124" name="Shape 124"/>
+        <p:cNvGrpSpPr/>
+        <p:nvPr/>
+      </p:nvGrpSpPr>
+      <p:grpSpPr>
+        <a:xfrm>
+          <a:off x="0" y="0"/>
+          <a:ext cx="0" cy="0"/>
+          <a:chOff x="0" y="0"/>
+          <a:chExt cx="0" cy="0"/>
+        </a:xfrm>
+      </p:grpSpPr>
+      <p:pic>
+        <p:nvPicPr>
+          <p:cNvPr descr="image.png" id="125" name="Google Shape;125;p16"/>
+          <p:cNvPicPr preferRelativeResize="0"/>
+          <p:nvPr/>
+        </p:nvPicPr>
+        <p:blipFill rotWithShape="1">
+          <a:blip r:embed="rId3">
+            <a:alphaModFix/>
+          </a:blip>
+          <a:srcRect b="0" l="0" r="0" t="0"/>
+          <a:stretch/>
+        </p:blipFill>
+        <p:spPr>
+          <a:xfrm>
+            <a:off x="0" y="0"/>
+            <a:ext cx="12192000" cy="6858000"/>
+          </a:xfrm>
+          <a:prstGeom prst="rect">
+            <a:avLst/>
+          </a:prstGeom>
+          <a:noFill/>
+          <a:ln>
+            <a:noFill/>
+          </a:ln>
+        </p:spPr>
+      </p:pic>
+      <p:pic>
+        <p:nvPicPr>
+          <p:cNvPr id="156" name="Google Shape;156;p16" title="MBF_Logo_2020.png"/>
+          <p:cNvPicPr preferRelativeResize="0"/>
+          <p:nvPr/>
+        </p:nvPicPr>
+        <p:blipFill>
+          <a:blip r:embed="rId13">
+            <a:alphaModFix/>
+          </a:blip>
+          <a:stretch>
+            <a:fillRect/>
+          </a:stretch>
+        </p:blipFill>
+        <p:spPr>
+          <a:xfrm>
+            <a:off x="11095194" y="6280800"/>
+            <a:ext cx="1096806" cy="577200"/>
+          </a:xfrm>
+          <a:prstGeom prst="rect">
+            <a:avLst/>
+          </a:prstGeom>
+          <a:noFill/>
+          <a:ln>
+            <a:noFill/>
+          </a:ln>
+        </p:spPr>
+      </p:pic>
+      <p:pic>
+        <p:nvPicPr>
+          <p:cNvPr id="157" name="Google Shape;157;p16" title="VK colored transparent logo.png"/>
+          <p:cNvPicPr preferRelativeResize="0"/>
+          <p:nvPr/>
+        </p:nvPicPr>
+        <p:blipFill rotWithShape="1">
+          <a:blip r:embed="rId14">
+            <a:alphaModFix/>
+          </a:blip>
+          <a:srcRect b="44466" l="14673" r="15820" t="33074"/>
+          <a:stretch/>
+        </p:blipFill>
+        <p:spPr>
+          <a:xfrm>
+            <a:off x="0" y="6280800"/>
+            <a:ext cx="1786280" cy="577200"/>
+          </a:xfrm>
+          <a:prstGeom prst="rect">
+            <a:avLst/>
+          </a:prstGeom>
+          <a:noFill/>
+          <a:ln>
+            <a:noFill/>
+          </a:ln>
+        </p:spPr>
+      </p:pic>
+      <p:sp>
+        <p:nvSpPr>
+          <p:cNvPr id="158" name="TextBox 157"/>
+          <p:cNvSpPr txBox="1"/>
+          <p:nvPr/>
+        </p:nvSpPr>
+        <p:spPr>
+          <a:xfrm>
+            <a:off x="530352" y="365760"/>
+            <a:ext cx="8778240" cy="420624"/>
+          </a:xfrm>
+          <a:prstGeom prst="rect">
+            <a:avLst/>
+          </a:prstGeom>
+          <a:noFill/>
+        </p:spPr>
+        <p:txBody>
+          <a:bodyPr wrap="square" anchor="ctr" lIns="0" rIns="0" tIns="0" bIns="0">
+            <a:spAutoFit/>
+          </a:bodyPr>
+          <a:lstStyle/>
+          <a:p>
+            <a:pPr algn="l"/>
+            <a:r>
+              <a:rPr sz="2025" b="1" i="0">
+                <a:solidFill>
+                  <a:srgbClr val="0F172A"/>
+                </a:solidFill>
+                <a:latin typeface="Poppins SemiBold"/>
+              </a:rPr>
+              <a:t>Potential Solutions &amp; Risk Mitigation</a:t>
+            </a:r>
+          </a:p>
+        </p:txBody>
+      </p:sp>
+      <p:sp>
+        <p:nvSpPr>
+          <p:cNvPr id="159" name="Rounded Rectangle 158"/>
+          <p:cNvSpPr/>
+          <p:nvPr/>
+        </p:nvSpPr>
+        <p:spPr>
+          <a:xfrm>
+            <a:off x="9454896" y="457200"/>
+            <a:ext cx="2203704" cy="246888"/>
+          </a:xfrm>
+          <a:prstGeom prst="roundRect">
+            <a:avLst>
+              <a:gd name="adj" fmla="val 50000"/>
+            </a:avLst>
+          </a:prstGeom>
+          <a:solidFill>
+            <a:srgbClr val="D1FAE5"/>
+          </a:solidFill>
+          <a:ln w="9525">
+            <a:solidFill>
+              <a:srgbClr val="D1FAE5"/>
+            </a:solidFill>
+          </a:ln>
+          <a:effectLst/>
+        </p:spPr>
+        <p:style>
+          <a:lnRef idx="1">
+            <a:schemeClr val="accent1"/>
+          </a:lnRef>
+          <a:fillRef idx="3">
+            <a:schemeClr val="accent1"/>
+          </a:fillRef>
+          <a:effectRef idx="2">
+            <a:schemeClr val="accent1"/>
+          </a:effectRef>
+          <a:fontRef idx="minor">
+            <a:schemeClr val="lt1"/>
+          </a:fontRef>
+        </p:style>
+        <p:txBody>
+          <a:bodyPr rtlCol="0" anchor="ctr" lIns="0" rIns="0" tIns="0" bIns="0"/>
+          <a:lstStyle/>
+          <a:p>
+            <a:pPr algn="ctr"/>
+            <a:r>
+              <a:rPr sz="800" b="1" i="0" spc="60">
+                <a:solidFill>
+                  <a:srgbClr val="059669"/>
+                </a:solidFill>
+                <a:latin typeface="Poppins SemiBold"/>
+              </a:rPr>
+              <a:t>VERGELINK  ·  STAGE 2</a:t>
+            </a:r>
+          </a:p>
+        </p:txBody>
+      </p:sp>
+      <p:graphicFrame>
+        <p:nvGraphicFramePr>
+          <p:cNvPr id="160" name="Table 159"/>
+          <p:cNvGraphicFramePr>
+            <a:graphicFrameLocks noGrp="1"/>
+          </p:cNvGraphicFramePr>
+          <p:nvPr/>
+        </p:nvGraphicFramePr>
+        <p:xfrm>
+          <a:off x="530352" y="960120"/>
+          <a:ext cx="11128248" cy="3712464"/>
+        </p:xfrm>
+        <a:graphic>
+          <a:graphicData uri="http://schemas.openxmlformats.org/drawingml/2006/table">
+            <a:tbl>
+              <a:tblPr firstRow="0" bandRow="0">
+                <a:tableStyleId>{2D5ABB26-0587-4C30-8999-92F81FD0307C}</a:tableStyleId>
+              </a:tblPr>
+              <a:tblGrid>
+                <a:gridCol w="2011680"/>
+                <a:gridCol w="3840480"/>
+                <a:gridCol w="2651760"/>
+                <a:gridCol w="2624328"/>
+              </a:tblGrid>
+              <a:tr h="530352">
+                <a:tc>
+                  <a:txBody>
+                    <a:bodyPr wrap="square"/>
+                    <a:lstStyle/>
+                    <a:p>
+                      <a:r>
+                        <a:rPr sz="900" b="1" i="0">
+                          <a:solidFill>
+                            <a:srgbClr val="0F172A"/>
+                          </a:solidFill>
+                          <a:latin typeface="DM Sans"/>
+                        </a:rPr>
+                        <a:t>Risk</a:t>
+                      </a:r>
+                    </a:p>
+                  </a:txBody>
+                  <a:tcPr marL="54864" marR="54864" marT="27432" marB="27432" anchor="ctr">
+                    <a:lnL w="6350">
+                      <a:noFill/>
+                    </a:lnL>
+                    <a:lnR w="6350">
+                      <a:noFill/>
+                    </a:lnR>
+                    <a:lnT w="6350">
+                      <a:noFill/>
+                    </a:lnT>
+                    <a:lnB w="6350">
+                      <a:solidFill>
+                        <a:srgbClr val="E2E8F0"/>
+                      </a:solidFill>
+                    </a:lnB>
+                    <a:solidFill>
+                      <a:srgbClr val="E2E8F0"/>
+                    </a:solidFill>
+                  </a:tcPr>
+                </a:tc>
+                <a:tc>
+                  <a:txBody>
+                    <a:bodyPr wrap="square"/>
+                    <a:lstStyle/>
+                    <a:p>
+                      <a:r>
+                        <a:rPr sz="900" b="1" i="0">
+                          <a:solidFill>
+                            <a:srgbClr val="0F172A"/>
+                          </a:solidFill>
+                          <a:latin typeface="DM Sans"/>
+                        </a:rPr>
+                        <a:t>Primary mitigation</a:t>
+                      </a:r>
+                    </a:p>
+                  </a:txBody>
+                  <a:tcPr marL="54864" marR="54864" marT="27432" marB="27432" anchor="ctr">
+                    <a:lnL w="6350">
+                      <a:noFill/>
+                    </a:lnL>
+                    <a:lnR w="6350">
+                      <a:noFill/>
+                    </a:lnR>
+                    <a:lnT w="6350">
+                      <a:noFill/>
+                    </a:lnT>
+                    <a:lnB w="6350">
+                      <a:solidFill>
+                        <a:srgbClr val="E2E8F0"/>
+                      </a:solidFill>
+                    </a:lnB>
+                    <a:solidFill>
+                      <a:srgbClr val="E2E8F0"/>
+                    </a:solidFill>
+                  </a:tcPr>
+                </a:tc>
+                <a:tc>
+                  <a:txBody>
+                    <a:bodyPr wrap="square"/>
+                    <a:lstStyle/>
+                    <a:p>
+                      <a:r>
+                        <a:rPr sz="900" b="1" i="0">
+                          <a:solidFill>
+                            <a:srgbClr val="0F172A"/>
+                          </a:solidFill>
+                          <a:latin typeface="DM Sans"/>
+                        </a:rPr>
+                        <a:t>Backup / fallback</a:t>
+                      </a:r>
+                    </a:p>
+                  </a:txBody>
+                  <a:tcPr marL="54864" marR="54864" marT="27432" marB="27432" anchor="ctr">
+                    <a:lnL w="6350">
+                      <a:noFill/>
+                    </a:lnL>
+                    <a:lnR w="6350">
+                      <a:noFill/>
+                    </a:lnR>
+                    <a:lnT w="6350">
+                      <a:noFill/>
+                    </a:lnT>
+                    <a:lnB w="6350">
+                      <a:solidFill>
+                        <a:srgbClr val="E2E8F0"/>
+                      </a:solidFill>
+                    </a:lnB>
+                    <a:solidFill>
+                      <a:srgbClr val="E2E8F0"/>
+                    </a:solidFill>
+                  </a:tcPr>
+                </a:tc>
+                <a:tc>
+                  <a:txBody>
+                    <a:bodyPr wrap="square"/>
+                    <a:lstStyle/>
+                    <a:p>
+                      <a:r>
+                        <a:rPr sz="900" b="1" i="0">
+                          <a:solidFill>
+                            <a:srgbClr val="0F172A"/>
+                          </a:solidFill>
+                          <a:latin typeface="DM Sans"/>
+                        </a:rPr>
+                        <a:t>How we will verify</a:t>
+                      </a:r>
+                    </a:p>
+                  </a:txBody>
+                  <a:tcPr marL="54864" marR="54864" marT="27432" marB="27432" anchor="ctr">
+                    <a:lnL w="6350">
+                      <a:noFill/>
+                    </a:lnL>
+                    <a:lnR w="6350">
+                      <a:noFill/>
+                    </a:lnR>
+                    <a:lnT w="6350">
+                      <a:noFill/>
+                    </a:lnT>
+                    <a:lnB w="6350">
+                      <a:solidFill>
+                        <a:srgbClr val="E2E8F0"/>
+                      </a:solidFill>
+                    </a:lnB>
+                    <a:solidFill>
+                      <a:srgbClr val="E2E8F0"/>
+                    </a:solidFill>
+                  </a:tcPr>
+                </a:tc>
+              </a:tr>
+              <a:tr h="530352">
+                <a:tc>
+                  <a:txBody>
+                    <a:bodyPr wrap="square"/>
+                    <a:lstStyle/>
+                    <a:p>
+                      <a:r>
+                        <a:rPr sz="900" b="1" i="0">
+                          <a:solidFill>
+                            <a:srgbClr val="0F172A"/>
+                          </a:solidFill>
+                          <a:latin typeface="DM Sans"/>
+                        </a:rPr>
+                        <a:t>EOG drift vs vergence</a:t>
+                      </a:r>
+                    </a:p>
+                  </a:txBody>
+                  <a:tcPr marL="54864" marR="54864" marT="27432" marB="27432" anchor="ctr">
+                    <a:lnL w="6350">
+                      <a:noFill/>
+                    </a:lnL>
+                    <a:lnR w="6350">
+                      <a:noFill/>
+                    </a:lnR>
+                    <a:lnT w="6350">
+                      <a:noFill/>
+                    </a:lnT>
+                    <a:lnB w="6350">
+                      <a:solidFill>
+                        <a:srgbClr val="E2E8F0"/>
+                      </a:solidFill>
+                    </a:lnB>
+                    <a:solidFill>
+                      <a:srgbClr val="FFFFFF"/>
+                    </a:solidFill>
+                  </a:tcPr>
+                </a:tc>
+                <a:tc>
+                  <a:txBody>
+                    <a:bodyPr wrap="square"/>
+                    <a:lstStyle/>
+                    <a:p>
+                      <a:r>
+                        <a:rPr sz="900" b="0" i="0">
+                          <a:solidFill>
+                            <a:srgbClr val="334155"/>
+                          </a:solidFill>
+                          <a:latin typeface="DM Sans"/>
+                        </a:rPr>
+                        <a:t>Keep low-frequency path; per-trial baseline removal; discrete near/far targets (as in VergeIO)</a:t>
+                      </a:r>
+                    </a:p>
+                  </a:txBody>
+                  <a:tcPr marL="54864" marR="54864" marT="27432" marB="27432" anchor="ctr">
+                    <a:lnL w="6350">
+                      <a:noFill/>
+                    </a:lnL>
+                    <a:lnR w="6350">
+                      <a:noFill/>
+                    </a:lnR>
+                    <a:lnT w="6350">
+                      <a:noFill/>
+                    </a:lnT>
+                    <a:lnB w="6350">
+                      <a:solidFill>
+                        <a:srgbClr val="E2E8F0"/>
+                      </a:solidFill>
+                    </a:lnB>
+                    <a:solidFill>
+                      <a:srgbClr val="FFFFFF"/>
+                    </a:solidFill>
+                  </a:tcPr>
+                </a:tc>
+                <a:tc>
+                  <a:txBody>
+                    <a:bodyPr wrap="square"/>
+                    <a:lstStyle/>
+                    <a:p>
+                      <a:r>
+                        <a:rPr sz="900" b="0" i="0">
+                          <a:solidFill>
+                            <a:srgbClr val="334155"/>
+                          </a:solidFill>
+                          <a:latin typeface="DM Sans"/>
+                        </a:rPr>
+                        <a:t>Require ToF depth agreement before any candidate</a:t>
+                      </a:r>
+                    </a:p>
+                  </a:txBody>
+                  <a:tcPr marL="54864" marR="54864" marT="27432" marB="27432" anchor="ctr">
+                    <a:lnL w="6350">
+                      <a:noFill/>
+                    </a:lnL>
+                    <a:lnR w="6350">
+                      <a:noFill/>
+                    </a:lnR>
+                    <a:lnT w="6350">
+                      <a:noFill/>
+                    </a:lnT>
+                    <a:lnB w="6350">
+                      <a:solidFill>
+                        <a:srgbClr val="E2E8F0"/>
+                      </a:solidFill>
+                    </a:lnB>
+                    <a:solidFill>
+                      <a:srgbClr val="FFFFFF"/>
+                    </a:solidFill>
+                  </a:tcPr>
+                </a:tc>
+                <a:tc>
+                  <a:txBody>
+                    <a:bodyPr wrap="square"/>
+                    <a:lstStyle/>
+                    <a:p>
+                      <a:r>
+                        <a:rPr sz="900" b="0" i="0">
+                          <a:solidFill>
+                            <a:srgbClr val="334155"/>
+                          </a:solidFill>
+                          <a:latin typeface="DM Sans"/>
+                        </a:rPr>
+                        <a:t>10-min fixed-gaze recordings at both depths</a:t>
+                      </a:r>
+                    </a:p>
+                  </a:txBody>
+                  <a:tcPr marL="54864" marR="54864" marT="27432" marB="27432" anchor="ctr">
+                    <a:lnL w="6350">
+                      <a:noFill/>
+                    </a:lnL>
+                    <a:lnR w="6350">
+                      <a:noFill/>
+                    </a:lnR>
+                    <a:lnT w="6350">
+                      <a:noFill/>
+                    </a:lnT>
+                    <a:lnB w="6350">
+                      <a:solidFill>
+                        <a:srgbClr val="E2E8F0"/>
+                      </a:solidFill>
+                    </a:lnB>
+                    <a:solidFill>
+                      <a:srgbClr val="FFFFFF"/>
+                    </a:solidFill>
+                  </a:tcPr>
+                </a:tc>
+              </a:tr>
+              <a:tr h="530352">
+                <a:tc>
+                  <a:txBody>
+                    <a:bodyPr wrap="square"/>
+                    <a:lstStyle/>
+                    <a:p>
+                      <a:r>
+                        <a:rPr sz="900" b="1" i="0">
+                          <a:solidFill>
+                            <a:srgbClr val="0F172A"/>
+                          </a:solidFill>
+                          <a:latin typeface="DM Sans"/>
+                        </a:rPr>
+                        <a:t>ESP32 ADC quality</a:t>
+                      </a:r>
+                    </a:p>
+                  </a:txBody>
+                  <a:tcPr marL="54864" marR="54864" marT="27432" marB="27432" anchor="ctr">
+                    <a:lnL w="6350">
+                      <a:noFill/>
+                    </a:lnL>
+                    <a:lnR w="6350">
+                      <a:noFill/>
+                    </a:lnR>
+                    <a:lnT w="6350">
+                      <a:noFill/>
+                    </a:lnT>
+                    <a:lnB w="6350">
+                      <a:solidFill>
+                        <a:srgbClr val="E2E8F0"/>
+                      </a:solidFill>
+                    </a:lnB>
+                    <a:solidFill>
+                      <a:srgbClr val="F8FAFC"/>
+                    </a:solidFill>
+                  </a:tcPr>
+                </a:tc>
+                <a:tc>
+                  <a:txBody>
+                    <a:bodyPr wrap="square"/>
+                    <a:lstStyle/>
+                    <a:p>
+                      <a:r>
+                        <a:rPr sz="900" b="0" i="0">
+                          <a:solidFill>
+                            <a:srgbClr val="334155"/>
+                          </a:solidFill>
+                          <a:latin typeface="DM Sans"/>
+                        </a:rPr>
+                        <a:t>ADC1 only, linear input band, 1.6 kHz RC, oversampling, Espressif calibration API</a:t>
+                      </a:r>
+                    </a:p>
+                  </a:txBody>
+                  <a:tcPr marL="54864" marR="54864" marT="27432" marB="27432" anchor="ctr">
+                    <a:lnL w="6350">
+                      <a:noFill/>
+                    </a:lnL>
+                    <a:lnR w="6350">
+                      <a:noFill/>
+                    </a:lnR>
+                    <a:lnT w="6350">
+                      <a:noFill/>
+                    </a:lnT>
+                    <a:lnB w="6350">
+                      <a:solidFill>
+                        <a:srgbClr val="E2E8F0"/>
+                      </a:solidFill>
+                    </a:lnB>
+                    <a:solidFill>
+                      <a:srgbClr val="F8FAFC"/>
+                    </a:solidFill>
+                  </a:tcPr>
+                </a:tc>
+                <a:tc>
+                  <a:txBody>
+                    <a:bodyPr wrap="square"/>
+                    <a:lstStyle/>
+                    <a:p>
+                      <a:r>
+                        <a:rPr sz="900" b="0" i="0">
+                          <a:solidFill>
+                            <a:srgbClr val="334155"/>
+                          </a:solidFill>
+                          <a:latin typeface="DM Sans"/>
+                        </a:rPr>
+                        <a:t>External I2C ADC from the ₹2.9k headroom</a:t>
+                      </a:r>
+                    </a:p>
+                  </a:txBody>
+                  <a:tcPr marL="54864" marR="54864" marT="27432" marB="27432" anchor="ctr">
+                    <a:lnL w="6350">
+                      <a:noFill/>
+                    </a:lnL>
+                    <a:lnR w="6350">
+                      <a:noFill/>
+                    </a:lnR>
+                    <a:lnT w="6350">
+                      <a:noFill/>
+                    </a:lnT>
+                    <a:lnB w="6350">
+                      <a:solidFill>
+                        <a:srgbClr val="E2E8F0"/>
+                      </a:solidFill>
+                    </a:lnB>
+                    <a:solidFill>
+                      <a:srgbClr val="F8FAFC"/>
+                    </a:solidFill>
+                  </a:tcPr>
+                </a:tc>
+                <a:tc>
+                  <a:txBody>
+                    <a:bodyPr wrap="square"/>
+                    <a:lstStyle/>
+                    <a:p>
+                      <a:r>
+                        <a:rPr sz="900" b="0" i="0">
+                          <a:solidFill>
+                            <a:srgbClr val="334155"/>
+                          </a:solidFill>
+                          <a:latin typeface="DM Sans"/>
+                        </a:rPr>
+                        <a:t>Signal-generator sine sweep before body contact</a:t>
+                      </a:r>
+                    </a:p>
+                  </a:txBody>
+                  <a:tcPr marL="54864" marR="54864" marT="27432" marB="27432" anchor="ctr">
+                    <a:lnL w="6350">
+                      <a:noFill/>
+                    </a:lnL>
+                    <a:lnR w="6350">
+                      <a:noFill/>
+                    </a:lnR>
+                    <a:lnT w="6350">
+                      <a:noFill/>
+                    </a:lnT>
+                    <a:lnB w="6350">
+                      <a:solidFill>
+                        <a:srgbClr val="E2E8F0"/>
+                      </a:solidFill>
+                    </a:lnB>
+                    <a:solidFill>
+                      <a:srgbClr val="F8FAFC"/>
+                    </a:solidFill>
+                  </a:tcPr>
+                </a:tc>
+              </a:tr>
+              <a:tr h="530352">
+                <a:tc>
+                  <a:txBody>
+                    <a:bodyPr wrap="square"/>
+                    <a:lstStyle/>
+                    <a:p>
+                      <a:r>
+                        <a:rPr sz="900" b="1" i="0">
+                          <a:solidFill>
+                            <a:srgbClr val="0F172A"/>
+                          </a:solidFill>
+                          <a:latin typeface="DM Sans"/>
+                        </a:rPr>
+                        <a:t>False clench triggers</a:t>
+                      </a:r>
+                    </a:p>
+                  </a:txBody>
+                  <a:tcPr marL="54864" marR="54864" marT="27432" marB="27432" anchor="ctr">
+                    <a:lnL w="6350">
+                      <a:noFill/>
+                    </a:lnL>
+                    <a:lnR w="6350">
+                      <a:noFill/>
+                    </a:lnR>
+                    <a:lnT w="6350">
+                      <a:noFill/>
+                    </a:lnT>
+                    <a:lnB w="6350">
+                      <a:solidFill>
+                        <a:srgbClr val="E2E8F0"/>
+                      </a:solidFill>
+                    </a:lnB>
+                    <a:solidFill>
+                      <a:srgbClr val="FFFFFF"/>
+                    </a:solidFill>
+                  </a:tcPr>
+                </a:tc>
+                <a:tc>
+                  <a:txBody>
+                    <a:bodyPr wrap="square"/>
+                    <a:lstStyle/>
+                    <a:p>
+                      <a:r>
+                        <a:rPr sz="900" b="0" i="0">
+                          <a:solidFill>
+                            <a:srgbClr val="334155"/>
+                          </a:solidFill>
+                          <a:latin typeface="DM Sans"/>
+                        </a:rPr>
+                        <a:t>Clench must be held inside a candidate window; per-user threshold; refractory period</a:t>
+                      </a:r>
+                    </a:p>
+                  </a:txBody>
+                  <a:tcPr marL="54864" marR="54864" marT="27432" marB="27432" anchor="ctr">
+                    <a:lnL w="6350">
+                      <a:noFill/>
+                    </a:lnL>
+                    <a:lnR w="6350">
+                      <a:noFill/>
+                    </a:lnR>
+                    <a:lnT w="6350">
+                      <a:noFill/>
+                    </a:lnT>
+                    <a:lnB w="6350">
+                      <a:solidFill>
+                        <a:srgbClr val="E2E8F0"/>
+                      </a:solidFill>
+                    </a:lnB>
+                    <a:solidFill>
+                      <a:srgbClr val="FFFFFF"/>
+                    </a:solidFill>
+                  </a:tcPr>
+                </a:tc>
+                <a:tc>
+                  <a:txBody>
+                    <a:bodyPr wrap="square"/>
+                    <a:lstStyle/>
+                    <a:p>
+                      <a:r>
+                        <a:rPr sz="900" b="0" i="0">
+                          <a:solidFill>
+                            <a:srgbClr val="334155"/>
+                          </a:solidFill>
+                          <a:latin typeface="DM Sans"/>
+                        </a:rPr>
+                        <a:t>Raise threshold / add dwell; physical disarm</a:t>
+                      </a:r>
+                    </a:p>
+                  </a:txBody>
+                  <a:tcPr marL="54864" marR="54864" marT="27432" marB="27432" anchor="ctr">
+                    <a:lnL w="6350">
+                      <a:noFill/>
+                    </a:lnL>
+                    <a:lnR w="6350">
+                      <a:noFill/>
+                    </a:lnR>
+                    <a:lnT w="6350">
+                      <a:noFill/>
+                    </a:lnT>
+                    <a:lnB w="6350">
+                      <a:solidFill>
+                        <a:srgbClr val="E2E8F0"/>
+                      </a:solidFill>
+                    </a:lnB>
+                    <a:solidFill>
+                      <a:srgbClr val="FFFFFF"/>
+                    </a:solidFill>
+                  </a:tcPr>
+                </a:tc>
+                <a:tc>
+                  <a:txBody>
+                    <a:bodyPr wrap="square"/>
+                    <a:lstStyle/>
+                    <a:p>
+                      <a:r>
+                        <a:rPr sz="900" b="0" i="0">
+                          <a:solidFill>
+                            <a:srgbClr val="334155"/>
+                          </a:solidFill>
+                          <a:latin typeface="DM Sans"/>
+                        </a:rPr>
+                        <a:t>Scripted chew / talk / rest sessions, false triggers counted</a:t>
+                      </a:r>
+                    </a:p>
+                  </a:txBody>
+                  <a:tcPr marL="54864" marR="54864" marT="27432" marB="27432" anchor="ctr">
+                    <a:lnL w="6350">
+                      <a:noFill/>
+                    </a:lnL>
+                    <a:lnR w="6350">
+                      <a:noFill/>
+                    </a:lnR>
+                    <a:lnT w="6350">
+                      <a:noFill/>
+                    </a:lnT>
+                    <a:lnB w="6350">
+                      <a:solidFill>
+                        <a:srgbClr val="E2E8F0"/>
+                      </a:solidFill>
+                    </a:lnB>
+                    <a:solidFill>
+                      <a:srgbClr val="FFFFFF"/>
+                    </a:solidFill>
+                  </a:tcPr>
+                </a:tc>
+              </a:tr>
+              <a:tr h="530352">
+                <a:tc>
+                  <a:txBody>
+                    <a:bodyPr wrap="square"/>
+                    <a:lstStyle/>
+                    <a:p>
+                      <a:r>
+                        <a:rPr sz="900" b="1" i="0">
+                          <a:solidFill>
+                            <a:srgbClr val="0F172A"/>
+                          </a:solidFill>
+                          <a:latin typeface="DM Sans"/>
+                        </a:rPr>
+                        <a:t>ToF on dark / glossy targets</a:t>
+                      </a:r>
+                    </a:p>
+                  </a:txBody>
+                  <a:tcPr marL="54864" marR="54864" marT="27432" marB="27432" anchor="ctr">
+                    <a:lnL w="6350">
+                      <a:noFill/>
+                    </a:lnL>
+                    <a:lnR w="6350">
+                      <a:noFill/>
+                    </a:lnR>
+                    <a:lnT w="6350">
+                      <a:noFill/>
+                    </a:lnT>
+                    <a:lnB w="6350">
+                      <a:solidFill>
+                        <a:srgbClr val="E2E8F0"/>
+                      </a:solidFill>
+                    </a:lnB>
+                    <a:solidFill>
+                      <a:srgbClr val="F8FAFC"/>
+                    </a:solidFill>
+                  </a:tcPr>
+                </a:tc>
+                <a:tc>
+                  <a:txBody>
+                    <a:bodyPr wrap="square"/>
+                    <a:lstStyle/>
+                    <a:p>
+                      <a:r>
+                        <a:rPr sz="900" b="0" i="0">
+                          <a:solidFill>
+                            <a:srgbClr val="334155"/>
+                          </a:solidFill>
+                          <a:latin typeface="DM Sans"/>
+                        </a:rPr>
+                        <a:t>Matte, high-contrast target cards</a:t>
+                      </a:r>
+                    </a:p>
+                  </a:txBody>
+                  <a:tcPr marL="54864" marR="54864" marT="27432" marB="27432" anchor="ctr">
+                    <a:lnL w="6350">
+                      <a:noFill/>
+                    </a:lnL>
+                    <a:lnR w="6350">
+                      <a:noFill/>
+                    </a:lnR>
+                    <a:lnT w="6350">
+                      <a:noFill/>
+                    </a:lnT>
+                    <a:lnB w="6350">
+                      <a:solidFill>
+                        <a:srgbClr val="E2E8F0"/>
+                      </a:solidFill>
+                    </a:lnB>
+                    <a:solidFill>
+                      <a:srgbClr val="F8FAFC"/>
+                    </a:solidFill>
+                  </a:tcPr>
+                </a:tc>
+                <a:tc>
+                  <a:txBody>
+                    <a:bodyPr wrap="square"/>
+                    <a:lstStyle/>
+                    <a:p>
+                      <a:r>
+                        <a:rPr sz="900" b="0" i="0">
+                          <a:solidFill>
+                            <a:srgbClr val="334155"/>
+                          </a:solidFill>
+                          <a:latin typeface="DM Sans"/>
+                        </a:rPr>
+                        <a:t>Use ToF only as a gate, not as gaze depth</a:t>
+                      </a:r>
+                    </a:p>
+                  </a:txBody>
+                  <a:tcPr marL="54864" marR="54864" marT="27432" marB="27432" anchor="ctr">
+                    <a:lnL w="6350">
+                      <a:noFill/>
+                    </a:lnL>
+                    <a:lnR w="6350">
+                      <a:noFill/>
+                    </a:lnR>
+                    <a:lnT w="6350">
+                      <a:noFill/>
+                    </a:lnT>
+                    <a:lnB w="6350">
+                      <a:solidFill>
+                        <a:srgbClr val="E2E8F0"/>
+                      </a:solidFill>
+                    </a:lnB>
+                    <a:solidFill>
+                      <a:srgbClr val="F8FAFC"/>
+                    </a:solidFill>
+                  </a:tcPr>
+                </a:tc>
+                <a:tc>
+                  <a:txBody>
+                    <a:bodyPr wrap="square"/>
+                    <a:lstStyle/>
+                    <a:p>
+                      <a:r>
+                        <a:rPr sz="900" b="0" i="0">
+                          <a:solidFill>
+                            <a:srgbClr val="334155"/>
+                          </a:solidFill>
+                          <a:latin typeface="DM Sans"/>
+                        </a:rPr>
+                        <a:t>Distance tests on matte, dark and glossy cards</a:t>
+                      </a:r>
+                    </a:p>
+                  </a:txBody>
+                  <a:tcPr marL="54864" marR="54864" marT="27432" marB="27432" anchor="ctr">
+                    <a:lnL w="6350">
+                      <a:noFill/>
+                    </a:lnL>
+                    <a:lnR w="6350">
+                      <a:noFill/>
+                    </a:lnR>
+                    <a:lnT w="6350">
+                      <a:noFill/>
+                    </a:lnT>
+                    <a:lnB w="6350">
+                      <a:solidFill>
+                        <a:srgbClr val="E2E8F0"/>
+                      </a:solidFill>
+                    </a:lnB>
+                    <a:solidFill>
+                      <a:srgbClr val="F8FAFC"/>
+                    </a:solidFill>
+                  </a:tcPr>
+                </a:tc>
+              </a:tr>
+              <a:tr h="530352">
+                <a:tc>
+                  <a:txBody>
+                    <a:bodyPr wrap="square"/>
+                    <a:lstStyle/>
+                    <a:p>
+                      <a:r>
+                        <a:rPr sz="900" b="1" i="0">
+                          <a:solidFill>
+                            <a:srgbClr val="0F172A"/>
+                          </a:solidFill>
+                          <a:latin typeface="DM Sans"/>
+                        </a:rPr>
+                        <a:t>IMU yaw drift</a:t>
+                      </a:r>
+                    </a:p>
+                  </a:txBody>
+                  <a:tcPr marL="54864" marR="54864" marT="27432" marB="27432" anchor="ctr">
+                    <a:lnL w="6350">
+                      <a:noFill/>
+                    </a:lnL>
+                    <a:lnR w="6350">
+                      <a:noFill/>
+                    </a:lnR>
+                    <a:lnT w="6350">
+                      <a:noFill/>
+                    </a:lnT>
+                    <a:lnB w="6350">
+                      <a:solidFill>
+                        <a:srgbClr val="E2E8F0"/>
+                      </a:solidFill>
+                    </a:lnB>
+                    <a:solidFill>
+                      <a:srgbClr val="FFFFFF"/>
+                    </a:solidFill>
+                  </a:tcPr>
+                </a:tc>
+                <a:tc>
+                  <a:txBody>
+                    <a:bodyPr wrap="square"/>
+                    <a:lstStyle/>
+                    <a:p>
+                      <a:r>
+                        <a:rPr sz="900" b="0" i="0">
+                          <a:solidFill>
+                            <a:srgbClr val="334155"/>
+                          </a:solidFill>
+                          <a:latin typeface="DM Sans"/>
+                        </a:rPr>
+                        <a:t>Use IMU only to reject head motion</a:t>
+                      </a:r>
+                    </a:p>
+                  </a:txBody>
+                  <a:tcPr marL="54864" marR="54864" marT="27432" marB="27432" anchor="ctr">
+                    <a:lnL w="6350">
+                      <a:noFill/>
+                    </a:lnL>
+                    <a:lnR w="6350">
+                      <a:noFill/>
+                    </a:lnR>
+                    <a:lnT w="6350">
+                      <a:noFill/>
+                    </a:lnT>
+                    <a:lnB w="6350">
+                      <a:solidFill>
+                        <a:srgbClr val="E2E8F0"/>
+                      </a:solidFill>
+                    </a:lnB>
+                    <a:solidFill>
+                      <a:srgbClr val="FFFFFF"/>
+                    </a:solidFill>
+                  </a:tcPr>
+                </a:tc>
+                <a:tc>
+                  <a:txBody>
+                    <a:bodyPr wrap="square"/>
+                    <a:lstStyle/>
+                    <a:p>
+                      <a:r>
+                        <a:rPr sz="900" b="0" i="0">
+                          <a:solidFill>
+                            <a:srgbClr val="334155"/>
+                          </a:solidFill>
+                          <a:latin typeface="DM Sans"/>
+                        </a:rPr>
+                        <a:t>Fixed-head demo posture</a:t>
+                      </a:r>
+                    </a:p>
+                  </a:txBody>
+                  <a:tcPr marL="54864" marR="54864" marT="27432" marB="27432" anchor="ctr">
+                    <a:lnL w="6350">
+                      <a:noFill/>
+                    </a:lnL>
+                    <a:lnR w="6350">
+                      <a:noFill/>
+                    </a:lnR>
+                    <a:lnT w="6350">
+                      <a:noFill/>
+                    </a:lnT>
+                    <a:lnB w="6350">
+                      <a:solidFill>
+                        <a:srgbClr val="E2E8F0"/>
+                      </a:solidFill>
+                    </a:lnB>
+                    <a:solidFill>
+                      <a:srgbClr val="FFFFFF"/>
+                    </a:solidFill>
+                  </a:tcPr>
+                </a:tc>
+                <a:tc>
+                  <a:txBody>
+                    <a:bodyPr wrap="square"/>
+                    <a:lstStyle/>
+                    <a:p>
+                      <a:r>
+                        <a:rPr sz="900" b="0" i="0">
+                          <a:solidFill>
+                            <a:srgbClr val="334155"/>
+                          </a:solidFill>
+                          <a:latin typeface="DM Sans"/>
+                        </a:rPr>
+                        <a:t>Logged yaw during 10-min sessions</a:t>
+                      </a:r>
+                    </a:p>
+                  </a:txBody>
+                  <a:tcPr marL="54864" marR="54864" marT="27432" marB="27432" anchor="ctr">
+                    <a:lnL w="6350">
+                      <a:noFill/>
+                    </a:lnL>
+                    <a:lnR w="6350">
+                      <a:noFill/>
+                    </a:lnR>
+                    <a:lnT w="6350">
+                      <a:noFill/>
+                    </a:lnT>
+                    <a:lnB w="6350">
+                      <a:solidFill>
+                        <a:srgbClr val="E2E8F0"/>
+                      </a:solidFill>
+                    </a:lnB>
+                    <a:solidFill>
+                      <a:srgbClr val="FFFFFF"/>
+                    </a:solidFill>
+                  </a:tcPr>
+                </a:tc>
+              </a:tr>
+              <a:tr h="530352">
+                <a:tc>
+                  <a:txBody>
+                    <a:bodyPr wrap="square"/>
+                    <a:lstStyle/>
+                    <a:p>
+                      <a:r>
+                        <a:rPr sz="900" b="1" i="0">
+                          <a:solidFill>
+                            <a:srgbClr val="0F172A"/>
+                          </a:solidFill>
+                          <a:latin typeface="DM Sans"/>
+                        </a:rPr>
+                        <a:t>Relay control path</a:t>
+                      </a:r>
+                    </a:p>
+                  </a:txBody>
+                  <a:tcPr marL="54864" marR="54864" marT="27432" marB="27432" anchor="ctr">
+                    <a:lnL w="6350">
+                      <a:noFill/>
+                    </a:lnL>
+                    <a:lnR w="6350">
+                      <a:noFill/>
+                    </a:lnR>
+                    <a:lnT w="6350">
+                      <a:noFill/>
+                    </a:lnT>
+                    <a:lnB w="6350">
+                      <a:solidFill>
+                        <a:srgbClr val="E2E8F0"/>
+                      </a:solidFill>
+                    </a:lnB>
+                    <a:solidFill>
+                      <a:srgbClr val="F8FAFC"/>
+                    </a:solidFill>
+                  </a:tcPr>
+                </a:tc>
+                <a:tc>
+                  <a:txBody>
+                    <a:bodyPr wrap="square"/>
+                    <a:lstStyle/>
+                    <a:p>
+                      <a:r>
+                        <a:rPr sz="900" b="0" i="0">
+                          <a:solidFill>
+                            <a:srgbClr val="334155"/>
+                          </a:solidFill>
+                          <a:latin typeface="DM Sans"/>
+                        </a:rPr>
+                        <a:t>Confirm DUALR3 local-LAN control first</a:t>
+                      </a:r>
+                    </a:p>
+                  </a:txBody>
+                  <a:tcPr marL="54864" marR="54864" marT="27432" marB="27432" anchor="ctr">
+                    <a:lnL w="6350">
+                      <a:noFill/>
+                    </a:lnL>
+                    <a:lnR w="6350">
+                      <a:noFill/>
+                    </a:lnR>
+                    <a:lnT w="6350">
+                      <a:noFill/>
+                    </a:lnT>
+                    <a:lnB w="6350">
+                      <a:solidFill>
+                        <a:srgbClr val="E2E8F0"/>
+                      </a:solidFill>
+                    </a:lnB>
+                    <a:solidFill>
+                      <a:srgbClr val="F8FAFC"/>
+                    </a:solidFill>
+                  </a:tcPr>
+                </a:tc>
+                <a:tc>
+                  <a:txBody>
+                    <a:bodyPr wrap="square"/>
+                    <a:lstStyle/>
+                    <a:p>
+                      <a:r>
+                        <a:rPr sz="900" b="0" i="0">
+                          <a:solidFill>
+                            <a:srgbClr val="334155"/>
+                          </a:solidFill>
+                          <a:latin typeface="DM Sans"/>
+                        </a:rPr>
+                        <a:t>Vendor app / Home Assistant bridge</a:t>
+                      </a:r>
+                    </a:p>
+                  </a:txBody>
+                  <a:tcPr marL="54864" marR="54864" marT="27432" marB="27432" anchor="ctr">
+                    <a:lnL w="6350">
+                      <a:noFill/>
+                    </a:lnL>
+                    <a:lnR w="6350">
+                      <a:noFill/>
+                    </a:lnR>
+                    <a:lnT w="6350">
+                      <a:noFill/>
+                    </a:lnT>
+                    <a:lnB w="6350">
+                      <a:solidFill>
+                        <a:srgbClr val="E2E8F0"/>
+                      </a:solidFill>
+                    </a:lnB>
+                    <a:solidFill>
+                      <a:srgbClr val="F8FAFC"/>
+                    </a:solidFill>
+                  </a:tcPr>
+                </a:tc>
+                <a:tc>
+                  <a:txBody>
+                    <a:bodyPr wrap="square"/>
+                    <a:lstStyle/>
+                    <a:p>
+                      <a:r>
+                        <a:rPr sz="900" b="0" i="0">
+                          <a:solidFill>
+                            <a:srgbClr val="334155"/>
+                          </a:solidFill>
+                          <a:latin typeface="DM Sans"/>
+                        </a:rPr>
+                        <a:t>Explicit ON/OFF + state readback test</a:t>
+                      </a:r>
+                    </a:p>
+                  </a:txBody>
+                  <a:tcPr marL="54864" marR="54864" marT="27432" marB="27432" anchor="ctr">
+                    <a:lnL w="6350">
+                      <a:noFill/>
+                    </a:lnL>
+                    <a:lnR w="6350">
+                      <a:noFill/>
+                    </a:lnR>
+                    <a:lnT w="6350">
+                      <a:noFill/>
+                    </a:lnT>
+                    <a:lnB w="6350">
+                      <a:solidFill>
+                        <a:srgbClr val="E2E8F0"/>
+                      </a:solidFill>
+                    </a:lnB>
+                    <a:solidFill>
+                      <a:srgbClr val="F8FAFC"/>
+                    </a:solidFill>
+                  </a:tcPr>
+                </a:tc>
+              </a:tr>
+            </a:tbl>
+          </a:graphicData>
+        </a:graphic>
+      </p:graphicFrame>
+      <p:sp>
+        <p:nvSpPr>
+          <p:cNvPr id="161" name="Rounded Rectangle 160"/>
+          <p:cNvSpPr/>
+          <p:nvPr/>
+        </p:nvSpPr>
+        <p:spPr>
+          <a:xfrm>
+            <a:off x="530352" y="5687568"/>
+            <a:ext cx="11128248" cy="402336"/>
+          </a:xfrm>
+          <a:prstGeom prst="roundRect">
+            <a:avLst>
+              <a:gd name="adj" fmla="val 12000"/>
+            </a:avLst>
+          </a:prstGeom>
+          <a:solidFill>
+            <a:srgbClr val="F0FDF4"/>
+          </a:solidFill>
+          <a:ln w="9525">
+            <a:solidFill>
+              <a:srgbClr val="BBF7D0"/>
+            </a:solidFill>
+          </a:ln>
+          <a:effectLst/>
+        </p:spPr>
+        <p:style>
+          <a:lnRef idx="1">
+            <a:schemeClr val="accent1"/>
+          </a:lnRef>
+          <a:fillRef idx="3">
+            <a:schemeClr val="accent1"/>
+          </a:fillRef>
+          <a:effectRef idx="2">
+            <a:schemeClr val="accent1"/>
+          </a:effectRef>
+          <a:fontRef idx="minor">
+            <a:schemeClr val="lt1"/>
+          </a:fontRef>
+        </p:style>
+        <p:txBody>
+          <a:bodyPr rtlCol="0" anchor="ctr"/>
+          <a:lstStyle/>
+          <a:p/>
+        </p:txBody>
+      </p:sp>
+      <p:sp>
+        <p:nvSpPr>
+          <p:cNvPr id="162" name="TextBox 161"/>
+          <p:cNvSpPr txBox="1"/>
+          <p:nvPr/>
+        </p:nvSpPr>
+        <p:spPr>
+          <a:xfrm>
+            <a:off x="694944" y="5687568"/>
+            <a:ext cx="10835640" cy="402336"/>
+          </a:xfrm>
+          <a:prstGeom prst="rect">
+            <a:avLst/>
+          </a:prstGeom>
+          <a:noFill/>
+        </p:spPr>
+        <p:txBody>
+          <a:bodyPr wrap="square" anchor="ctr" lIns="0" rIns="0" tIns="0" bIns="0">
+            <a:spAutoFit/>
+          </a:bodyPr>
+          <a:lstStyle/>
+          <a:p>
+            <a:pPr algn="l"/>
+            <a:r>
+              <a:rPr sz="936" b="1" i="0">
+                <a:solidFill>
+                  <a:srgbClr val="0F172A"/>
+                </a:solidFill>
+                <a:latin typeface="DM Sans"/>
+              </a:rPr>
+              <a:t>Verification plan: </a:t>
+            </a:r>
+            <a:r>
+              <a:rPr sz="936" b="0" i="0">
+                <a:solidFill>
+                  <a:srgbClr val="475569"/>
+                </a:solidFill>
+                <a:latin typeface="DM Sans"/>
+              </a:rPr>
+              <a:t>every risk above has a bench test; results — including failures — will be reported with the Stage 3 submission.</a:t>
+            </a:r>
+          </a:p>
+        </p:txBody>
+      </p:sp>
+    </p:spTree>
+  </p:cSld>
+  <p:clrMapOvr>
+    <a:masterClrMapping/>
+  </p:clrMapOvr>
+</p:sld>
+</file>
+
+<file path=ppt/slides/slide12.xml><?xml version="1.0" encoding="utf-8"?>
+<p:sld xmlns:a="http://schemas.openxmlformats.org/drawingml/2006/main" xmlns:r="http://schemas.openxmlformats.org/officeDocument/2006/relationships" xmlns:mc="http://schemas.openxmlformats.org/markup-compatibility/2006" xmlns:mv="urn:schemas-microsoft-com:mac:vml" xmlns:p="http://schemas.openxmlformats.org/presentationml/2006/main" xmlns:c="http://schemas.openxmlformats.org/drawingml/2006/chart" xmlns:dgm="http://schemas.openxmlformats.org/drawingml/2006/diagram" xmlns:o="urn:schemas-microsoft-com:office:office" xmlns:v="urn:schemas-microsoft-com:vml" xmlns:pvml="urn:schemas-microsoft-com:office:powerpoint" xmlns:com="http://schemas.openxmlformats.org/drawingml/2006/compatibility" xmlns:p14="http://schemas.microsoft.com/office/powerpoint/2010/main" xmlns:p15="http://schemas.microsoft.com/office/powerpoint/2012/main" xmlns:ahyp="http://schemas.microsoft.com/office/drawing/2018/hyperlinkcolor">
+  <p:cSld>
+    <p:bg>
+      <p:bgPr>
+        <a:solidFill>
+          <a:srgbClr val="FFFFFF"/>
+        </a:solidFill>
+      </p:bgPr>
+    </p:bg>
+    <p:spTree>
+      <p:nvGrpSpPr>
+        <p:cNvPr id="124" name="Shape 124"/>
+        <p:cNvGrpSpPr/>
+        <p:nvPr/>
+      </p:nvGrpSpPr>
+      <p:grpSpPr>
+        <a:xfrm>
+          <a:off x="0" y="0"/>
+          <a:ext cx="0" cy="0"/>
+          <a:chOff x="0" y="0"/>
+          <a:chExt cx="0" cy="0"/>
+        </a:xfrm>
+      </p:grpSpPr>
+      <p:pic>
+        <p:nvPicPr>
+          <p:cNvPr descr="image.png" id="125" name="Google Shape;125;p16"/>
+          <p:cNvPicPr preferRelativeResize="0"/>
+          <p:nvPr/>
+        </p:nvPicPr>
+        <p:blipFill rotWithShape="1">
+          <a:blip r:embed="rId3">
+            <a:alphaModFix/>
+          </a:blip>
+          <a:srcRect b="0" l="0" r="0" t="0"/>
+          <a:stretch/>
+        </p:blipFill>
+        <p:spPr>
+          <a:xfrm>
+            <a:off x="0" y="0"/>
+            <a:ext cx="12192000" cy="6858000"/>
+          </a:xfrm>
+          <a:prstGeom prst="rect">
+            <a:avLst/>
+          </a:prstGeom>
+          <a:noFill/>
+          <a:ln>
+            <a:noFill/>
+          </a:ln>
+        </p:spPr>
+      </p:pic>
+      <p:pic>
+        <p:nvPicPr>
+          <p:cNvPr id="156" name="Google Shape;156;p16" title="MBF_Logo_2020.png"/>
+          <p:cNvPicPr preferRelativeResize="0"/>
+          <p:nvPr/>
+        </p:nvPicPr>
+        <p:blipFill>
+          <a:blip r:embed="rId13">
+            <a:alphaModFix/>
+          </a:blip>
+          <a:stretch>
+            <a:fillRect/>
+          </a:stretch>
+        </p:blipFill>
+        <p:spPr>
+          <a:xfrm>
+            <a:off x="11095194" y="6280800"/>
+            <a:ext cx="1096806" cy="577200"/>
+          </a:xfrm>
+          <a:prstGeom prst="rect">
+            <a:avLst/>
+          </a:prstGeom>
+          <a:noFill/>
+          <a:ln>
+            <a:noFill/>
+          </a:ln>
+        </p:spPr>
+      </p:pic>
+      <p:pic>
+        <p:nvPicPr>
+          <p:cNvPr id="157" name="Google Shape;157;p16" title="VK colored transparent logo.png"/>
+          <p:cNvPicPr preferRelativeResize="0"/>
+          <p:nvPr/>
+        </p:nvPicPr>
+        <p:blipFill rotWithShape="1">
+          <a:blip r:embed="rId14">
+            <a:alphaModFix/>
+          </a:blip>
+          <a:srcRect b="44466" l="14673" r="15820" t="33074"/>
+          <a:stretch/>
+        </p:blipFill>
+        <p:spPr>
+          <a:xfrm>
+            <a:off x="0" y="6280800"/>
+            <a:ext cx="1786280" cy="577200"/>
+          </a:xfrm>
+          <a:prstGeom prst="rect">
+            <a:avLst/>
+          </a:prstGeom>
+          <a:noFill/>
+          <a:ln>
+            <a:noFill/>
+          </a:ln>
+        </p:spPr>
+      </p:pic>
+      <p:sp>
+        <p:nvSpPr>
+          <p:cNvPr id="158" name="TextBox 157"/>
+          <p:cNvSpPr txBox="1"/>
+          <p:nvPr/>
+        </p:nvSpPr>
+        <p:spPr>
+          <a:xfrm>
+            <a:off x="530352" y="365760"/>
+            <a:ext cx="8778240" cy="420624"/>
+          </a:xfrm>
+          <a:prstGeom prst="rect">
+            <a:avLst/>
+          </a:prstGeom>
+          <a:noFill/>
+        </p:spPr>
+        <p:txBody>
+          <a:bodyPr wrap="square" anchor="ctr" lIns="0" rIns="0" tIns="0" bIns="0">
+            <a:spAutoFit/>
+          </a:bodyPr>
+          <a:lstStyle/>
+          <a:p>
+            <a:pPr algn="l"/>
+            <a:r>
+              <a:rPr sz="2025" b="1" i="0">
+                <a:solidFill>
+                  <a:srgbClr val="0F172A"/>
+                </a:solidFill>
+                <a:latin typeface="Poppins SemiBold"/>
+              </a:rPr>
+              <a:t>References &amp; Sources</a:t>
+            </a:r>
+          </a:p>
+        </p:txBody>
+      </p:sp>
+      <p:sp>
+        <p:nvSpPr>
+          <p:cNvPr id="159" name="Rounded Rectangle 158"/>
+          <p:cNvSpPr/>
+          <p:nvPr/>
+        </p:nvSpPr>
+        <p:spPr>
+          <a:xfrm>
+            <a:off x="9454896" y="457200"/>
+            <a:ext cx="2203704" cy="246888"/>
+          </a:xfrm>
+          <a:prstGeom prst="roundRect">
+            <a:avLst>
+              <a:gd name="adj" fmla="val 50000"/>
+            </a:avLst>
+          </a:prstGeom>
+          <a:solidFill>
+            <a:srgbClr val="D1FAE5"/>
+          </a:solidFill>
+          <a:ln w="9525">
+            <a:solidFill>
+              <a:srgbClr val="D1FAE5"/>
+            </a:solidFill>
+          </a:ln>
+          <a:effectLst/>
+        </p:spPr>
+        <p:style>
+          <a:lnRef idx="1">
+            <a:schemeClr val="accent1"/>
+          </a:lnRef>
+          <a:fillRef idx="3">
+            <a:schemeClr val="accent1"/>
+          </a:fillRef>
+          <a:effectRef idx="2">
+            <a:schemeClr val="accent1"/>
+          </a:effectRef>
+          <a:fontRef idx="minor">
+            <a:schemeClr val="lt1"/>
+          </a:fontRef>
+        </p:style>
+        <p:txBody>
+          <a:bodyPr rtlCol="0" anchor="ctr" lIns="0" rIns="0" tIns="0" bIns="0"/>
+          <a:lstStyle/>
+          <a:p>
+            <a:pPr algn="ctr"/>
+            <a:r>
+              <a:rPr sz="800" b="1" i="0" spc="60">
+                <a:solidFill>
+                  <a:srgbClr val="059669"/>
+                </a:solidFill>
+                <a:latin typeface="Poppins SemiBold"/>
+              </a:rPr>
+              <a:t>VERGELINK  ·  STAGE 2</a:t>
+            </a:r>
+          </a:p>
+        </p:txBody>
+      </p:sp>
+      <p:sp>
+        <p:nvSpPr>
+          <p:cNvPr id="160" name="Rounded Rectangle 159"/>
+          <p:cNvSpPr/>
+          <p:nvPr/>
+        </p:nvSpPr>
+        <p:spPr>
+          <a:xfrm>
+            <a:off x="530352" y="932688"/>
             <a:ext cx="11128248" cy="4224528"/>
           </a:xfrm>
           <a:prstGeom prst="roundRect">
@@ -11435,7 +13871,7 @@
                 </a:solidFill>
                 <a:latin typeface="DM Sans"/>
               </a:rPr>
-              <a:t>Image sources: </a:t>
+              <a:t>Data sources: </a:t>
             </a:r>
             <a:r>
               <a:rPr sz="936" b="0" i="0">
@@ -11444,7 +13880,1210 @@
                 </a:solidFill>
                 <a:latin typeface="DM Sans"/>
               </a:rPr>
-              <a:t>all figures were produced for this project — FreeCAD 1.1 models and CalculiX FEA, KiCad 10 schematic, and project flow / block diagrams. No third-party images are used.</a:t>
+              <a:t>statistics on slide 2 and the Netravaad price on slides 2–3 come from references [8]–[11]; component specifications from [2]–[7].</a:t>
+            </a:r>
+          </a:p>
+        </p:txBody>
+      </p:sp>
+    </p:spTree>
+  </p:cSld>
+  <p:clrMapOvr>
+    <a:masterClrMapping/>
+  </p:clrMapOvr>
+</p:sld>
+</file>
+
+<file path=ppt/slides/slide13.xml><?xml version="1.0" encoding="utf-8"?>
+<p:sld xmlns:a="http://schemas.openxmlformats.org/drawingml/2006/main" xmlns:r="http://schemas.openxmlformats.org/officeDocument/2006/relationships" xmlns:mc="http://schemas.openxmlformats.org/markup-compatibility/2006" xmlns:mv="urn:schemas-microsoft-com:mac:vml" xmlns:p="http://schemas.openxmlformats.org/presentationml/2006/main" xmlns:c="http://schemas.openxmlformats.org/drawingml/2006/chart" xmlns:dgm="http://schemas.openxmlformats.org/drawingml/2006/diagram" xmlns:o="urn:schemas-microsoft-com:office:office" xmlns:v="urn:schemas-microsoft-com:vml" xmlns:pvml="urn:schemas-microsoft-com:office:powerpoint" xmlns:com="http://schemas.openxmlformats.org/drawingml/2006/compatibility" xmlns:p14="http://schemas.microsoft.com/office/powerpoint/2010/main" xmlns:p15="http://schemas.microsoft.com/office/powerpoint/2012/main" xmlns:ahyp="http://schemas.microsoft.com/office/drawing/2018/hyperlinkcolor">
+  <p:cSld>
+    <p:bg>
+      <p:bgPr>
+        <a:solidFill>
+          <a:srgbClr val="FFFFFF"/>
+        </a:solidFill>
+      </p:bgPr>
+    </p:bg>
+    <p:spTree>
+      <p:nvGrpSpPr>
+        <p:cNvPr id="124" name="Shape 124"/>
+        <p:cNvGrpSpPr/>
+        <p:nvPr/>
+      </p:nvGrpSpPr>
+      <p:grpSpPr>
+        <a:xfrm>
+          <a:off x="0" y="0"/>
+          <a:ext cx="0" cy="0"/>
+          <a:chOff x="0" y="0"/>
+          <a:chExt cx="0" cy="0"/>
+        </a:xfrm>
+      </p:grpSpPr>
+      <p:pic>
+        <p:nvPicPr>
+          <p:cNvPr descr="image.png" id="125" name="Google Shape;125;p16"/>
+          <p:cNvPicPr preferRelativeResize="0"/>
+          <p:nvPr/>
+        </p:nvPicPr>
+        <p:blipFill rotWithShape="1">
+          <a:blip r:embed="rId3">
+            <a:alphaModFix/>
+          </a:blip>
+          <a:srcRect b="0" l="0" r="0" t="0"/>
+          <a:stretch/>
+        </p:blipFill>
+        <p:spPr>
+          <a:xfrm>
+            <a:off x="0" y="0"/>
+            <a:ext cx="12192000" cy="6858000"/>
+          </a:xfrm>
+          <a:prstGeom prst="rect">
+            <a:avLst/>
+          </a:prstGeom>
+          <a:noFill/>
+          <a:ln>
+            <a:noFill/>
+          </a:ln>
+        </p:spPr>
+      </p:pic>
+      <p:pic>
+        <p:nvPicPr>
+          <p:cNvPr id="156" name="Google Shape;156;p16" title="MBF_Logo_2020.png"/>
+          <p:cNvPicPr preferRelativeResize="0"/>
+          <p:nvPr/>
+        </p:nvPicPr>
+        <p:blipFill>
+          <a:blip r:embed="rId13">
+            <a:alphaModFix/>
+          </a:blip>
+          <a:stretch>
+            <a:fillRect/>
+          </a:stretch>
+        </p:blipFill>
+        <p:spPr>
+          <a:xfrm>
+            <a:off x="11095194" y="6280800"/>
+            <a:ext cx="1096806" cy="577200"/>
+          </a:xfrm>
+          <a:prstGeom prst="rect">
+            <a:avLst/>
+          </a:prstGeom>
+          <a:noFill/>
+          <a:ln>
+            <a:noFill/>
+          </a:ln>
+        </p:spPr>
+      </p:pic>
+      <p:pic>
+        <p:nvPicPr>
+          <p:cNvPr id="157" name="Google Shape;157;p16" title="VK colored transparent logo.png"/>
+          <p:cNvPicPr preferRelativeResize="0"/>
+          <p:nvPr/>
+        </p:nvPicPr>
+        <p:blipFill rotWithShape="1">
+          <a:blip r:embed="rId14">
+            <a:alphaModFix/>
+          </a:blip>
+          <a:srcRect b="44466" l="14673" r="15820" t="33074"/>
+          <a:stretch/>
+        </p:blipFill>
+        <p:spPr>
+          <a:xfrm>
+            <a:off x="0" y="6280800"/>
+            <a:ext cx="1786280" cy="577200"/>
+          </a:xfrm>
+          <a:prstGeom prst="rect">
+            <a:avLst/>
+          </a:prstGeom>
+          <a:noFill/>
+          <a:ln>
+            <a:noFill/>
+          </a:ln>
+        </p:spPr>
+      </p:pic>
+      <p:sp>
+        <p:nvSpPr>
+          <p:cNvPr id="158" name="TextBox 157"/>
+          <p:cNvSpPr txBox="1"/>
+          <p:nvPr/>
+        </p:nvSpPr>
+        <p:spPr>
+          <a:xfrm>
+            <a:off x="530352" y="365760"/>
+            <a:ext cx="8778240" cy="420624"/>
+          </a:xfrm>
+          <a:prstGeom prst="rect">
+            <a:avLst/>
+          </a:prstGeom>
+          <a:noFill/>
+        </p:spPr>
+        <p:txBody>
+          <a:bodyPr wrap="square" anchor="ctr" lIns="0" rIns="0" tIns="0" bIns="0">
+            <a:spAutoFit/>
+          </a:bodyPr>
+          <a:lstStyle/>
+          <a:p>
+            <a:pPr algn="l"/>
+            <a:r>
+              <a:rPr sz="2025" b="1" i="0">
+                <a:solidFill>
+                  <a:srgbClr val="0F172A"/>
+                </a:solidFill>
+                <a:latin typeface="Poppins SemiBold"/>
+              </a:rPr>
+              <a:t>Image Sources</a:t>
+            </a:r>
+          </a:p>
+        </p:txBody>
+      </p:sp>
+      <p:sp>
+        <p:nvSpPr>
+          <p:cNvPr id="159" name="Rounded Rectangle 158"/>
+          <p:cNvSpPr/>
+          <p:nvPr/>
+        </p:nvSpPr>
+        <p:spPr>
+          <a:xfrm>
+            <a:off x="9454896" y="457200"/>
+            <a:ext cx="2203704" cy="246888"/>
+          </a:xfrm>
+          <a:prstGeom prst="roundRect">
+            <a:avLst>
+              <a:gd name="adj" fmla="val 50000"/>
+            </a:avLst>
+          </a:prstGeom>
+          <a:solidFill>
+            <a:srgbClr val="D1FAE5"/>
+          </a:solidFill>
+          <a:ln w="9525">
+            <a:solidFill>
+              <a:srgbClr val="D1FAE5"/>
+            </a:solidFill>
+          </a:ln>
+          <a:effectLst/>
+        </p:spPr>
+        <p:style>
+          <a:lnRef idx="1">
+            <a:schemeClr val="accent1"/>
+          </a:lnRef>
+          <a:fillRef idx="3">
+            <a:schemeClr val="accent1"/>
+          </a:fillRef>
+          <a:effectRef idx="2">
+            <a:schemeClr val="accent1"/>
+          </a:effectRef>
+          <a:fontRef idx="minor">
+            <a:schemeClr val="lt1"/>
+          </a:fontRef>
+        </p:style>
+        <p:txBody>
+          <a:bodyPr rtlCol="0" anchor="ctr" lIns="0" rIns="0" tIns="0" bIns="0"/>
+          <a:lstStyle/>
+          <a:p>
+            <a:pPr algn="ctr"/>
+            <a:r>
+              <a:rPr sz="800" b="1" i="0" spc="60">
+                <a:solidFill>
+                  <a:srgbClr val="059669"/>
+                </a:solidFill>
+                <a:latin typeface="Poppins SemiBold"/>
+              </a:rPr>
+              <a:t>VERGELINK  ·  STAGE 2</a:t>
+            </a:r>
+          </a:p>
+        </p:txBody>
+      </p:sp>
+      <p:graphicFrame>
+        <p:nvGraphicFramePr>
+          <p:cNvPr id="160" name="Table 159"/>
+          <p:cNvGraphicFramePr>
+            <a:graphicFrameLocks noGrp="1"/>
+          </p:cNvGraphicFramePr>
+          <p:nvPr/>
+        </p:nvGraphicFramePr>
+        <p:xfrm>
+          <a:off x="530352" y="960120"/>
+          <a:ext cx="11128248" cy="3364992"/>
+        </p:xfrm>
+        <a:graphic>
+          <a:graphicData uri="http://schemas.openxmlformats.org/drawingml/2006/table">
+            <a:tbl>
+              <a:tblPr firstRow="0" bandRow="0">
+                <a:tableStyleId>{2D5ABB26-0587-4C30-8999-92F81FD0307C}</a:tableStyleId>
+              </a:tblPr>
+              <a:tblGrid>
+                <a:gridCol w="822960"/>
+                <a:gridCol w="4206240"/>
+                <a:gridCol w="6099048"/>
+              </a:tblGrid>
+              <a:tr h="420624">
+                <a:tc>
+                  <a:txBody>
+                    <a:bodyPr wrap="square"/>
+                    <a:lstStyle/>
+                    <a:p>
+                      <a:r>
+                        <a:rPr sz="960" b="1" i="0">
+                          <a:solidFill>
+                            <a:srgbClr val="0F172A"/>
+                          </a:solidFill>
+                          <a:latin typeface="DM Sans"/>
+                        </a:rPr>
+                        <a:t>Slide</a:t>
+                      </a:r>
+                    </a:p>
+                  </a:txBody>
+                  <a:tcPr marL="54864" marR="54864" marT="27432" marB="27432" anchor="ctr">
+                    <a:lnL w="6350">
+                      <a:noFill/>
+                    </a:lnL>
+                    <a:lnR w="6350">
+                      <a:noFill/>
+                    </a:lnR>
+                    <a:lnT w="6350">
+                      <a:noFill/>
+                    </a:lnT>
+                    <a:lnB w="6350">
+                      <a:solidFill>
+                        <a:srgbClr val="E2E8F0"/>
+                      </a:solidFill>
+                    </a:lnB>
+                    <a:solidFill>
+                      <a:srgbClr val="E2E8F0"/>
+                    </a:solidFill>
+                  </a:tcPr>
+                </a:tc>
+                <a:tc>
+                  <a:txBody>
+                    <a:bodyPr wrap="square"/>
+                    <a:lstStyle/>
+                    <a:p>
+                      <a:r>
+                        <a:rPr sz="960" b="1" i="0">
+                          <a:solidFill>
+                            <a:srgbClr val="0F172A"/>
+                          </a:solidFill>
+                          <a:latin typeface="DM Sans"/>
+                        </a:rPr>
+                        <a:t>Figure</a:t>
+                      </a:r>
+                    </a:p>
+                  </a:txBody>
+                  <a:tcPr marL="54864" marR="54864" marT="27432" marB="27432" anchor="ctr">
+                    <a:lnL w="6350">
+                      <a:noFill/>
+                    </a:lnL>
+                    <a:lnR w="6350">
+                      <a:noFill/>
+                    </a:lnR>
+                    <a:lnT w="6350">
+                      <a:noFill/>
+                    </a:lnT>
+                    <a:lnB w="6350">
+                      <a:solidFill>
+                        <a:srgbClr val="E2E8F0"/>
+                      </a:solidFill>
+                    </a:lnB>
+                    <a:solidFill>
+                      <a:srgbClr val="E2E8F0"/>
+                    </a:solidFill>
+                  </a:tcPr>
+                </a:tc>
+                <a:tc>
+                  <a:txBody>
+                    <a:bodyPr wrap="square"/>
+                    <a:lstStyle/>
+                    <a:p>
+                      <a:r>
+                        <a:rPr sz="960" b="1" i="0">
+                          <a:solidFill>
+                            <a:srgbClr val="0F172A"/>
+                          </a:solidFill>
+                          <a:latin typeface="DM Sans"/>
+                        </a:rPr>
+                        <a:t>Source / tool</a:t>
+                      </a:r>
+                    </a:p>
+                  </a:txBody>
+                  <a:tcPr marL="54864" marR="54864" marT="27432" marB="27432" anchor="ctr">
+                    <a:lnL w="6350">
+                      <a:noFill/>
+                    </a:lnL>
+                    <a:lnR w="6350">
+                      <a:noFill/>
+                    </a:lnR>
+                    <a:lnT w="6350">
+                      <a:noFill/>
+                    </a:lnT>
+                    <a:lnB w="6350">
+                      <a:solidFill>
+                        <a:srgbClr val="E2E8F0"/>
+                      </a:solidFill>
+                    </a:lnB>
+                    <a:solidFill>
+                      <a:srgbClr val="E2E8F0"/>
+                    </a:solidFill>
+                  </a:tcPr>
+                </a:tc>
+              </a:tr>
+              <a:tr h="420624">
+                <a:tc>
+                  <a:txBody>
+                    <a:bodyPr wrap="square"/>
+                    <a:lstStyle/>
+                    <a:p>
+                      <a:r>
+                        <a:rPr sz="960" b="1" i="0">
+                          <a:solidFill>
+                            <a:srgbClr val="0F172A"/>
+                          </a:solidFill>
+                          <a:latin typeface="DM Sans"/>
+                        </a:rPr>
+                        <a:t>2</a:t>
+                      </a:r>
+                    </a:p>
+                  </a:txBody>
+                  <a:tcPr marL="54864" marR="54864" marT="27432" marB="27432" anchor="ctr">
+                    <a:lnL w="6350">
+                      <a:noFill/>
+                    </a:lnL>
+                    <a:lnR w="6350">
+                      <a:noFill/>
+                    </a:lnR>
+                    <a:lnT w="6350">
+                      <a:noFill/>
+                    </a:lnT>
+                    <a:lnB w="6350">
+                      <a:solidFill>
+                        <a:srgbClr val="E2E8F0"/>
+                      </a:solidFill>
+                    </a:lnB>
+                    <a:solidFill>
+                      <a:srgbClr val="FFFFFF"/>
+                    </a:solidFill>
+                  </a:tcPr>
+                </a:tc>
+                <a:tc>
+                  <a:txBody>
+                    <a:bodyPr wrap="square"/>
+                    <a:lstStyle/>
+                    <a:p>
+                      <a:r>
+                        <a:rPr sz="960" b="0" i="0">
+                          <a:solidFill>
+                            <a:srgbClr val="334155"/>
+                          </a:solidFill>
+                          <a:latin typeface="DM Sans"/>
+                        </a:rPr>
+                        <a:t>Before-state user flow</a:t>
+                      </a:r>
+                    </a:p>
+                  </a:txBody>
+                  <a:tcPr marL="54864" marR="54864" marT="27432" marB="27432" anchor="ctr">
+                    <a:lnL w="6350">
+                      <a:noFill/>
+                    </a:lnL>
+                    <a:lnR w="6350">
+                      <a:noFill/>
+                    </a:lnR>
+                    <a:lnT w="6350">
+                      <a:noFill/>
+                    </a:lnT>
+                    <a:lnB w="6350">
+                      <a:solidFill>
+                        <a:srgbClr val="E2E8F0"/>
+                      </a:solidFill>
+                    </a:lnB>
+                    <a:solidFill>
+                      <a:srgbClr val="FFFFFF"/>
+                    </a:solidFill>
+                  </a:tcPr>
+                </a:tc>
+                <a:tc>
+                  <a:txBody>
+                    <a:bodyPr wrap="square"/>
+                    <a:lstStyle/>
+                    <a:p>
+                      <a:r>
+                        <a:rPr sz="960" b="0" i="0">
+                          <a:solidFill>
+                            <a:srgbClr val="334155"/>
+                          </a:solidFill>
+                          <a:latin typeface="DM Sans"/>
+                        </a:rPr>
+                        <a:t>Project diagram (drawn for this submission)</a:t>
+                      </a:r>
+                    </a:p>
+                  </a:txBody>
+                  <a:tcPr marL="54864" marR="54864" marT="27432" marB="27432" anchor="ctr">
+                    <a:lnL w="6350">
+                      <a:noFill/>
+                    </a:lnL>
+                    <a:lnR w="6350">
+                      <a:noFill/>
+                    </a:lnR>
+                    <a:lnT w="6350">
+                      <a:noFill/>
+                    </a:lnT>
+                    <a:lnB w="6350">
+                      <a:solidFill>
+                        <a:srgbClr val="E2E8F0"/>
+                      </a:solidFill>
+                    </a:lnB>
+                    <a:solidFill>
+                      <a:srgbClr val="FFFFFF"/>
+                    </a:solidFill>
+                  </a:tcPr>
+                </a:tc>
+              </a:tr>
+              <a:tr h="420624">
+                <a:tc>
+                  <a:txBody>
+                    <a:bodyPr wrap="square"/>
+                    <a:lstStyle/>
+                    <a:p>
+                      <a:r>
+                        <a:rPr sz="960" b="1" i="0">
+                          <a:solidFill>
+                            <a:srgbClr val="0F172A"/>
+                          </a:solidFill>
+                          <a:latin typeface="DM Sans"/>
+                        </a:rPr>
+                        <a:t>3</a:t>
+                      </a:r>
+                    </a:p>
+                  </a:txBody>
+                  <a:tcPr marL="54864" marR="54864" marT="27432" marB="27432" anchor="ctr">
+                    <a:lnL w="6350">
+                      <a:noFill/>
+                    </a:lnL>
+                    <a:lnR w="6350">
+                      <a:noFill/>
+                    </a:lnR>
+                    <a:lnT w="6350">
+                      <a:noFill/>
+                    </a:lnT>
+                    <a:lnB w="6350">
+                      <a:solidFill>
+                        <a:srgbClr val="E2E8F0"/>
+                      </a:solidFill>
+                    </a:lnB>
+                    <a:solidFill>
+                      <a:srgbClr val="F8FAFC"/>
+                    </a:solidFill>
+                  </a:tcPr>
+                </a:tc>
+                <a:tc>
+                  <a:txBody>
+                    <a:bodyPr wrap="square"/>
+                    <a:lstStyle/>
+                    <a:p>
+                      <a:r>
+                        <a:rPr sz="960" b="0" i="0">
+                          <a:solidFill>
+                            <a:srgbClr val="334155"/>
+                          </a:solidFill>
+                          <a:latin typeface="DM Sans"/>
+                        </a:rPr>
+                        <a:t>After-state user flow</a:t>
+                      </a:r>
+                    </a:p>
+                  </a:txBody>
+                  <a:tcPr marL="54864" marR="54864" marT="27432" marB="27432" anchor="ctr">
+                    <a:lnL w="6350">
+                      <a:noFill/>
+                    </a:lnL>
+                    <a:lnR w="6350">
+                      <a:noFill/>
+                    </a:lnR>
+                    <a:lnT w="6350">
+                      <a:noFill/>
+                    </a:lnT>
+                    <a:lnB w="6350">
+                      <a:solidFill>
+                        <a:srgbClr val="E2E8F0"/>
+                      </a:solidFill>
+                    </a:lnB>
+                    <a:solidFill>
+                      <a:srgbClr val="F8FAFC"/>
+                    </a:solidFill>
+                  </a:tcPr>
+                </a:tc>
+                <a:tc>
+                  <a:txBody>
+                    <a:bodyPr wrap="square"/>
+                    <a:lstStyle/>
+                    <a:p>
+                      <a:r>
+                        <a:rPr sz="960" b="0" i="0">
+                          <a:solidFill>
+                            <a:srgbClr val="334155"/>
+                          </a:solidFill>
+                          <a:latin typeface="DM Sans"/>
+                        </a:rPr>
+                        <a:t>Project diagram (drawn for this submission)</a:t>
+                      </a:r>
+                    </a:p>
+                  </a:txBody>
+                  <a:tcPr marL="54864" marR="54864" marT="27432" marB="27432" anchor="ctr">
+                    <a:lnL w="6350">
+                      <a:noFill/>
+                    </a:lnL>
+                    <a:lnR w="6350">
+                      <a:noFill/>
+                    </a:lnR>
+                    <a:lnT w="6350">
+                      <a:noFill/>
+                    </a:lnT>
+                    <a:lnB w="6350">
+                      <a:solidFill>
+                        <a:srgbClr val="E2E8F0"/>
+                      </a:solidFill>
+                    </a:lnB>
+                    <a:solidFill>
+                      <a:srgbClr val="F8FAFC"/>
+                    </a:solidFill>
+                  </a:tcPr>
+                </a:tc>
+              </a:tr>
+              <a:tr h="420624">
+                <a:tc>
+                  <a:txBody>
+                    <a:bodyPr wrap="square"/>
+                    <a:lstStyle/>
+                    <a:p>
+                      <a:r>
+                        <a:rPr sz="960" b="1" i="0">
+                          <a:solidFill>
+                            <a:srgbClr val="0F172A"/>
+                          </a:solidFill>
+                          <a:latin typeface="DM Sans"/>
+                        </a:rPr>
+                        <a:t>4</a:t>
+                      </a:r>
+                    </a:p>
+                  </a:txBody>
+                  <a:tcPr marL="54864" marR="54864" marT="27432" marB="27432" anchor="ctr">
+                    <a:lnL w="6350">
+                      <a:noFill/>
+                    </a:lnL>
+                    <a:lnR w="6350">
+                      <a:noFill/>
+                    </a:lnR>
+                    <a:lnT w="6350">
+                      <a:noFill/>
+                    </a:lnT>
+                    <a:lnB w="6350">
+                      <a:solidFill>
+                        <a:srgbClr val="E2E8F0"/>
+                      </a:solidFill>
+                    </a:lnB>
+                    <a:solidFill>
+                      <a:srgbClr val="FFFFFF"/>
+                    </a:solidFill>
+                  </a:tcPr>
+                </a:tc>
+                <a:tc>
+                  <a:txBody>
+                    <a:bodyPr wrap="square"/>
+                    <a:lstStyle/>
+                    <a:p>
+                      <a:r>
+                        <a:rPr sz="960" b="0" i="0">
+                          <a:solidFill>
+                            <a:srgbClr val="334155"/>
+                          </a:solidFill>
+                          <a:latin typeface="DM Sans"/>
+                        </a:rPr>
+                        <a:t>System block diagram</a:t>
+                      </a:r>
+                    </a:p>
+                  </a:txBody>
+                  <a:tcPr marL="54864" marR="54864" marT="27432" marB="27432" anchor="ctr">
+                    <a:lnL w="6350">
+                      <a:noFill/>
+                    </a:lnL>
+                    <a:lnR w="6350">
+                      <a:noFill/>
+                    </a:lnR>
+                    <a:lnT w="6350">
+                      <a:noFill/>
+                    </a:lnT>
+                    <a:lnB w="6350">
+                      <a:solidFill>
+                        <a:srgbClr val="E2E8F0"/>
+                      </a:solidFill>
+                    </a:lnB>
+                    <a:solidFill>
+                      <a:srgbClr val="FFFFFF"/>
+                    </a:solidFill>
+                  </a:tcPr>
+                </a:tc>
+                <a:tc>
+                  <a:txBody>
+                    <a:bodyPr wrap="square"/>
+                    <a:lstStyle/>
+                    <a:p>
+                      <a:r>
+                        <a:rPr sz="960" b="0" i="0">
+                          <a:solidFill>
+                            <a:srgbClr val="334155"/>
+                          </a:solidFill>
+                          <a:latin typeface="DM Sans"/>
+                        </a:rPr>
+                        <a:t>Project diagram (drawn for this submission)</a:t>
+                      </a:r>
+                    </a:p>
+                  </a:txBody>
+                  <a:tcPr marL="54864" marR="54864" marT="27432" marB="27432" anchor="ctr">
+                    <a:lnL w="6350">
+                      <a:noFill/>
+                    </a:lnL>
+                    <a:lnR w="6350">
+                      <a:noFill/>
+                    </a:lnR>
+                    <a:lnT w="6350">
+                      <a:noFill/>
+                    </a:lnT>
+                    <a:lnB w="6350">
+                      <a:solidFill>
+                        <a:srgbClr val="E2E8F0"/>
+                      </a:solidFill>
+                    </a:lnB>
+                    <a:solidFill>
+                      <a:srgbClr val="FFFFFF"/>
+                    </a:solidFill>
+                  </a:tcPr>
+                </a:tc>
+              </a:tr>
+              <a:tr h="420624">
+                <a:tc>
+                  <a:txBody>
+                    <a:bodyPr wrap="square"/>
+                    <a:lstStyle/>
+                    <a:p>
+                      <a:r>
+                        <a:rPr sz="960" b="1" i="0">
+                          <a:solidFill>
+                            <a:srgbClr val="0F172A"/>
+                          </a:solidFill>
+                          <a:latin typeface="DM Sans"/>
+                        </a:rPr>
+                        <a:t>5</a:t>
+                      </a:r>
+                    </a:p>
+                  </a:txBody>
+                  <a:tcPr marL="54864" marR="54864" marT="27432" marB="27432" anchor="ctr">
+                    <a:lnL w="6350">
+                      <a:noFill/>
+                    </a:lnL>
+                    <a:lnR w="6350">
+                      <a:noFill/>
+                    </a:lnR>
+                    <a:lnT w="6350">
+                      <a:noFill/>
+                    </a:lnT>
+                    <a:lnB w="6350">
+                      <a:solidFill>
+                        <a:srgbClr val="E2E8F0"/>
+                      </a:solidFill>
+                    </a:lnB>
+                    <a:solidFill>
+                      <a:srgbClr val="F8FAFC"/>
+                    </a:solidFill>
+                  </a:tcPr>
+                </a:tc>
+                <a:tc>
+                  <a:txBody>
+                    <a:bodyPr wrap="square"/>
+                    <a:lstStyle/>
+                    <a:p>
+                      <a:r>
+                        <a:rPr sz="960" b="0" i="0">
+                          <a:solidFill>
+                            <a:srgbClr val="334155"/>
+                          </a:solidFill>
+                          <a:latin typeface="DM Sans"/>
+                        </a:rPr>
+                        <a:t>Exploded and assembled enclosure views</a:t>
+                      </a:r>
+                    </a:p>
+                  </a:txBody>
+                  <a:tcPr marL="54864" marR="54864" marT="27432" marB="27432" anchor="ctr">
+                    <a:lnL w="6350">
+                      <a:noFill/>
+                    </a:lnL>
+                    <a:lnR w="6350">
+                      <a:noFill/>
+                    </a:lnR>
+                    <a:lnT w="6350">
+                      <a:noFill/>
+                    </a:lnT>
+                    <a:lnB w="6350">
+                      <a:solidFill>
+                        <a:srgbClr val="E2E8F0"/>
+                      </a:solidFill>
+                    </a:lnB>
+                    <a:solidFill>
+                      <a:srgbClr val="F8FAFC"/>
+                    </a:solidFill>
+                  </a:tcPr>
+                </a:tc>
+                <a:tc>
+                  <a:txBody>
+                    <a:bodyPr wrap="square"/>
+                    <a:lstStyle/>
+                    <a:p>
+                      <a:r>
+                        <a:rPr sz="960" b="0" i="0">
+                          <a:solidFill>
+                            <a:srgbClr val="334155"/>
+                          </a:solidFill>
+                          <a:latin typeface="DM Sans"/>
+                        </a:rPr>
+                        <a:t>FreeCAD 1.1 — cad/VergeLink_Enclosure.FCStd</a:t>
+                      </a:r>
+                    </a:p>
+                  </a:txBody>
+                  <a:tcPr marL="54864" marR="54864" marT="27432" marB="27432" anchor="ctr">
+                    <a:lnL w="6350">
+                      <a:noFill/>
+                    </a:lnL>
+                    <a:lnR w="6350">
+                      <a:noFill/>
+                    </a:lnR>
+                    <a:lnT w="6350">
+                      <a:noFill/>
+                    </a:lnT>
+                    <a:lnB w="6350">
+                      <a:solidFill>
+                        <a:srgbClr val="E2E8F0"/>
+                      </a:solidFill>
+                    </a:lnB>
+                    <a:solidFill>
+                      <a:srgbClr val="F8FAFC"/>
+                    </a:solidFill>
+                  </a:tcPr>
+                </a:tc>
+              </a:tr>
+              <a:tr h="420624">
+                <a:tc>
+                  <a:txBody>
+                    <a:bodyPr wrap="square"/>
+                    <a:lstStyle/>
+                    <a:p>
+                      <a:r>
+                        <a:rPr sz="960" b="1" i="0">
+                          <a:solidFill>
+                            <a:srgbClr val="0F172A"/>
+                          </a:solidFill>
+                          <a:latin typeface="DM Sans"/>
+                        </a:rPr>
+                        <a:t>5</a:t>
+                      </a:r>
+                    </a:p>
+                  </a:txBody>
+                  <a:tcPr marL="54864" marR="54864" marT="27432" marB="27432" anchor="ctr">
+                    <a:lnL w="6350">
+                      <a:noFill/>
+                    </a:lnL>
+                    <a:lnR w="6350">
+                      <a:noFill/>
+                    </a:lnR>
+                    <a:lnT w="6350">
+                      <a:noFill/>
+                    </a:lnT>
+                    <a:lnB w="6350">
+                      <a:solidFill>
+                        <a:srgbClr val="E2E8F0"/>
+                      </a:solidFill>
+                    </a:lnB>
+                    <a:solidFill>
+                      <a:srgbClr val="FFFFFF"/>
+                    </a:solidFill>
+                  </a:tcPr>
+                </a:tc>
+                <a:tc>
+                  <a:txBody>
+                    <a:bodyPr wrap="square"/>
+                    <a:lstStyle/>
+                    <a:p>
+                      <a:r>
+                        <a:rPr sz="960" b="0" i="0">
+                          <a:solidFill>
+                            <a:srgbClr val="334155"/>
+                          </a:solidFill>
+                          <a:latin typeface="DM Sans"/>
+                        </a:rPr>
+                        <a:t>Strap-loop von Mises stress plot</a:t>
+                      </a:r>
+                    </a:p>
+                  </a:txBody>
+                  <a:tcPr marL="54864" marR="54864" marT="27432" marB="27432" anchor="ctr">
+                    <a:lnL w="6350">
+                      <a:noFill/>
+                    </a:lnL>
+                    <a:lnR w="6350">
+                      <a:noFill/>
+                    </a:lnR>
+                    <a:lnT w="6350">
+                      <a:noFill/>
+                    </a:lnT>
+                    <a:lnB w="6350">
+                      <a:solidFill>
+                        <a:srgbClr val="E2E8F0"/>
+                      </a:solidFill>
+                    </a:lnB>
+                    <a:solidFill>
+                      <a:srgbClr val="FFFFFF"/>
+                    </a:solidFill>
+                  </a:tcPr>
+                </a:tc>
+                <a:tc>
+                  <a:txBody>
+                    <a:bodyPr wrap="square"/>
+                    <a:lstStyle/>
+                    <a:p>
+                      <a:r>
+                        <a:rPr sz="960" b="0" i="0">
+                          <a:solidFill>
+                            <a:srgbClr val="334155"/>
+                          </a:solidFill>
+                          <a:latin typeface="DM Sans"/>
+                        </a:rPr>
+                        <a:t>FreeCAD FEM + CalculiX — cad/VergeLink_StrapLoop_FEA.FCStd</a:t>
+                      </a:r>
+                    </a:p>
+                  </a:txBody>
+                  <a:tcPr marL="54864" marR="54864" marT="27432" marB="27432" anchor="ctr">
+                    <a:lnL w="6350">
+                      <a:noFill/>
+                    </a:lnL>
+                    <a:lnR w="6350">
+                      <a:noFill/>
+                    </a:lnR>
+                    <a:lnT w="6350">
+                      <a:noFill/>
+                    </a:lnT>
+                    <a:lnB w="6350">
+                      <a:solidFill>
+                        <a:srgbClr val="E2E8F0"/>
+                      </a:solidFill>
+                    </a:lnB>
+                    <a:solidFill>
+                      <a:srgbClr val="FFFFFF"/>
+                    </a:solidFill>
+                  </a:tcPr>
+                </a:tc>
+              </a:tr>
+              <a:tr h="420624">
+                <a:tc>
+                  <a:txBody>
+                    <a:bodyPr wrap="square"/>
+                    <a:lstStyle/>
+                    <a:p>
+                      <a:r>
+                        <a:rPr sz="960" b="1" i="0">
+                          <a:solidFill>
+                            <a:srgbClr val="0F172A"/>
+                          </a:solidFill>
+                          <a:latin typeface="DM Sans"/>
+                        </a:rPr>
+                        <a:t>6</a:t>
+                      </a:r>
+                    </a:p>
+                  </a:txBody>
+                  <a:tcPr marL="54864" marR="54864" marT="27432" marB="27432" anchor="ctr">
+                    <a:lnL w="6350">
+                      <a:noFill/>
+                    </a:lnL>
+                    <a:lnR w="6350">
+                      <a:noFill/>
+                    </a:lnR>
+                    <a:lnT w="6350">
+                      <a:noFill/>
+                    </a:lnT>
+                    <a:lnB w="6350">
+                      <a:solidFill>
+                        <a:srgbClr val="E2E8F0"/>
+                      </a:solidFill>
+                    </a:lnB>
+                    <a:solidFill>
+                      <a:srgbClr val="F8FAFC"/>
+                    </a:solidFill>
+                  </a:tcPr>
+                </a:tc>
+                <a:tc>
+                  <a:txBody>
+                    <a:bodyPr wrap="square"/>
+                    <a:lstStyle/>
+                    <a:p>
+                      <a:r>
+                        <a:rPr sz="960" b="0" i="0">
+                          <a:solidFill>
+                            <a:srgbClr val="334155"/>
+                          </a:solidFill>
+                          <a:latin typeface="DM Sans"/>
+                        </a:rPr>
+                        <a:t>Mainboard schematic</a:t>
+                      </a:r>
+                    </a:p>
+                  </a:txBody>
+                  <a:tcPr marL="54864" marR="54864" marT="27432" marB="27432" anchor="ctr">
+                    <a:lnL w="6350">
+                      <a:noFill/>
+                    </a:lnL>
+                    <a:lnR w="6350">
+                      <a:noFill/>
+                    </a:lnR>
+                    <a:lnT w="6350">
+                      <a:noFill/>
+                    </a:lnT>
+                    <a:lnB w="6350">
+                      <a:solidFill>
+                        <a:srgbClr val="E2E8F0"/>
+                      </a:solidFill>
+                    </a:lnB>
+                    <a:solidFill>
+                      <a:srgbClr val="F8FAFC"/>
+                    </a:solidFill>
+                  </a:tcPr>
+                </a:tc>
+                <a:tc>
+                  <a:txBody>
+                    <a:bodyPr wrap="square"/>
+                    <a:lstStyle/>
+                    <a:p>
+                      <a:r>
+                        <a:rPr sz="960" b="0" i="0">
+                          <a:solidFill>
+                            <a:srgbClr val="334155"/>
+                          </a:solidFill>
+                          <a:latin typeface="DM Sans"/>
+                        </a:rPr>
+                        <a:t>KiCad 10 — kicad/VergeLink_Mainboard.kicad_sch</a:t>
+                      </a:r>
+                    </a:p>
+                  </a:txBody>
+                  <a:tcPr marL="54864" marR="54864" marT="27432" marB="27432" anchor="ctr">
+                    <a:lnL w="6350">
+                      <a:noFill/>
+                    </a:lnL>
+                    <a:lnR w="6350">
+                      <a:noFill/>
+                    </a:lnR>
+                    <a:lnT w="6350">
+                      <a:noFill/>
+                    </a:lnT>
+                    <a:lnB w="6350">
+                      <a:solidFill>
+                        <a:srgbClr val="E2E8F0"/>
+                      </a:solidFill>
+                    </a:lnB>
+                    <a:solidFill>
+                      <a:srgbClr val="F8FAFC"/>
+                    </a:solidFill>
+                  </a:tcPr>
+                </a:tc>
+              </a:tr>
+              <a:tr h="420624">
+                <a:tc>
+                  <a:txBody>
+                    <a:bodyPr wrap="square"/>
+                    <a:lstStyle/>
+                    <a:p>
+                      <a:r>
+                        <a:rPr sz="960" b="1" i="0">
+                          <a:solidFill>
+                            <a:srgbClr val="0F172A"/>
+                          </a:solidFill>
+                          <a:latin typeface="DM Sans"/>
+                        </a:rPr>
+                        <a:t>7</a:t>
+                      </a:r>
+                    </a:p>
+                  </a:txBody>
+                  <a:tcPr marL="54864" marR="54864" marT="27432" marB="27432" anchor="ctr">
+                    <a:lnL w="6350">
+                      <a:noFill/>
+                    </a:lnL>
+                    <a:lnR w="6350">
+                      <a:noFill/>
+                    </a:lnR>
+                    <a:lnT w="6350">
+                      <a:noFill/>
+                    </a:lnT>
+                    <a:lnB w="6350">
+                      <a:solidFill>
+                        <a:srgbClr val="E2E8F0"/>
+                      </a:solidFill>
+                    </a:lnB>
+                    <a:solidFill>
+                      <a:srgbClr val="FFFFFF"/>
+                    </a:solidFill>
+                  </a:tcPr>
+                </a:tc>
+                <a:tc>
+                  <a:txBody>
+                    <a:bodyPr wrap="square"/>
+                    <a:lstStyle/>
+                    <a:p>
+                      <a:r>
+                        <a:rPr sz="960" b="0" i="0">
+                          <a:solidFill>
+                            <a:srgbClr val="334155"/>
+                          </a:solidFill>
+                          <a:latin typeface="DM Sans"/>
+                        </a:rPr>
+                        <a:t>FreeCAD session screenshot</a:t>
+                      </a:r>
+                    </a:p>
+                  </a:txBody>
+                  <a:tcPr marL="54864" marR="54864" marT="27432" marB="27432" anchor="ctr">
+                    <a:lnL w="6350">
+                      <a:noFill/>
+                    </a:lnL>
+                    <a:lnR w="6350">
+                      <a:noFill/>
+                    </a:lnR>
+                    <a:lnT w="6350">
+                      <a:noFill/>
+                    </a:lnT>
+                    <a:lnB w="6350">
+                      <a:solidFill>
+                        <a:srgbClr val="E2E8F0"/>
+                      </a:solidFill>
+                    </a:lnB>
+                    <a:solidFill>
+                      <a:srgbClr val="FFFFFF"/>
+                    </a:solidFill>
+                  </a:tcPr>
+                </a:tc>
+                <a:tc>
+                  <a:txBody>
+                    <a:bodyPr wrap="square"/>
+                    <a:lstStyle/>
+                    <a:p>
+                      <a:r>
+                        <a:rPr sz="960" b="0" i="0">
+                          <a:solidFill>
+                            <a:srgbClr val="334155"/>
+                          </a:solidFill>
+                          <a:latin typeface="DM Sans"/>
+                        </a:rPr>
+                        <a:t>Screen capture of the project model</a:t>
+                      </a:r>
+                    </a:p>
+                  </a:txBody>
+                  <a:tcPr marL="54864" marR="54864" marT="27432" marB="27432" anchor="ctr">
+                    <a:lnL w="6350">
+                      <a:noFill/>
+                    </a:lnL>
+                    <a:lnR w="6350">
+                      <a:noFill/>
+                    </a:lnR>
+                    <a:lnT w="6350">
+                      <a:noFill/>
+                    </a:lnT>
+                    <a:lnB w="6350">
+                      <a:solidFill>
+                        <a:srgbClr val="E2E8F0"/>
+                      </a:solidFill>
+                    </a:lnB>
+                    <a:solidFill>
+                      <a:srgbClr val="FFFFFF"/>
+                    </a:solidFill>
+                  </a:tcPr>
+                </a:tc>
+              </a:tr>
+            </a:tbl>
+          </a:graphicData>
+        </a:graphic>
+      </p:graphicFrame>
+      <p:sp>
+        <p:nvSpPr>
+          <p:cNvPr id="161" name="Rounded Rectangle 160"/>
+          <p:cNvSpPr/>
+          <p:nvPr/>
+        </p:nvSpPr>
+        <p:spPr>
+          <a:xfrm>
+            <a:off x="530352" y="4754880"/>
+            <a:ext cx="11128248" cy="402336"/>
+          </a:xfrm>
+          <a:prstGeom prst="roundRect">
+            <a:avLst>
+              <a:gd name="adj" fmla="val 12000"/>
+            </a:avLst>
+          </a:prstGeom>
+          <a:solidFill>
+            <a:srgbClr val="F0FDF4"/>
+          </a:solidFill>
+          <a:ln w="9525">
+            <a:solidFill>
+              <a:srgbClr val="BBF7D0"/>
+            </a:solidFill>
+          </a:ln>
+          <a:effectLst/>
+        </p:spPr>
+        <p:style>
+          <a:lnRef idx="1">
+            <a:schemeClr val="accent1"/>
+          </a:lnRef>
+          <a:fillRef idx="3">
+            <a:schemeClr val="accent1"/>
+          </a:fillRef>
+          <a:effectRef idx="2">
+            <a:schemeClr val="accent1"/>
+          </a:effectRef>
+          <a:fontRef idx="minor">
+            <a:schemeClr val="lt1"/>
+          </a:fontRef>
+        </p:style>
+        <p:txBody>
+          <a:bodyPr rtlCol="0" anchor="ctr"/>
+          <a:lstStyle/>
+          <a:p/>
+        </p:txBody>
+      </p:sp>
+      <p:sp>
+        <p:nvSpPr>
+          <p:cNvPr id="162" name="TextBox 161"/>
+          <p:cNvSpPr txBox="1"/>
+          <p:nvPr/>
+        </p:nvSpPr>
+        <p:spPr>
+          <a:xfrm>
+            <a:off x="694944" y="4754880"/>
+            <a:ext cx="10835640" cy="402336"/>
+          </a:xfrm>
+          <a:prstGeom prst="rect">
+            <a:avLst/>
+          </a:prstGeom>
+          <a:noFill/>
+        </p:spPr>
+        <p:txBody>
+          <a:bodyPr wrap="square" anchor="ctr" lIns="0" rIns="0" tIns="0" bIns="0">
+            <a:spAutoFit/>
+          </a:bodyPr>
+          <a:lstStyle/>
+          <a:p>
+            <a:pPr algn="l"/>
+            <a:r>
+              <a:rPr sz="936" b="1" i="0">
+                <a:solidFill>
+                  <a:srgbClr val="0F172A"/>
+                </a:solidFill>
+                <a:latin typeface="DM Sans"/>
+              </a:rPr>
+              <a:t>Third-party images: </a:t>
+            </a:r>
+            <a:r>
+              <a:rPr sz="936" b="0" i="0">
+                <a:solidFill>
+                  <a:srgbClr val="475569"/>
+                </a:solidFill>
+                <a:latin typeface="DM Sans"/>
+              </a:rPr>
+              <a:t>none. All files are in the project repository: github.com/amalnathkp13-boop/vergelink</a:t>
             </a:r>
           </a:p>
         </p:txBody>
@@ -20733,7 +24372,7 @@
                 </a:solidFill>
                 <a:latin typeface="Poppins SemiBold"/>
               </a:rPr>
-              <a:t>Safety by Design &amp; Roadmap</a:t>
+              <a:t>Safety &amp; Hazard Mitigation</a:t>
             </a:r>
           </a:p>
         </p:txBody>
@@ -20804,7 +24443,7 @@
         <p:spPr>
           <a:xfrm>
             <a:off x="530352" y="932688"/>
-            <a:ext cx="11128248" cy="2395728"/>
+            <a:ext cx="11128248" cy="2761488"/>
           </a:xfrm>
           <a:prstGeom prst="roundRect">
             <a:avLst>
@@ -20895,7 +24534,7 @@
                 </a:solidFill>
                 <a:latin typeface="DM Sans"/>
               </a:rPr>
-              <a:t>Design FMEA (Failure Mode and Effects Analysis)</a:t>
+              <a:t>FMEA Matrix — failure modes and embedded protections</a:t>
             </a:r>
           </a:p>
         </p:txBody>
@@ -20910,7 +24549,7 @@
         </p:nvGraphicFramePr>
         <p:xfrm>
           <a:off x="694944" y="1298448"/>
-          <a:ext cx="10799064" cy="1975104"/>
+          <a:ext cx="10799064" cy="2432304"/>
         </p:xfrm>
         <a:graphic>
           <a:graphicData uri="http://schemas.openxmlformats.org/drawingml/2006/table">
@@ -20923,14 +24562,14 @@
                 <a:gridCol w="2194560"/>
                 <a:gridCol w="5861304"/>
               </a:tblGrid>
-              <a:tr h="329184">
+              <a:tr h="347472">
                 <a:tc>
                   <a:txBody>
                     <a:bodyPr wrap="square"/>
                     <a:lstStyle/>
                     <a:p>
                       <a:r>
-                        <a:rPr sz="860" b="1" i="0">
+                        <a:rPr sz="880" b="1" i="0">
                           <a:solidFill>
                             <a:srgbClr val="0F172A"/>
                           </a:solidFill>
@@ -20966,7 +24605,7 @@
                     <a:lstStyle/>
                     <a:p>
                       <a:r>
-                        <a:rPr sz="860" b="1" i="0">
+                        <a:rPr sz="880" b="1" i="0">
                           <a:solidFill>
                             <a:srgbClr val="0F172A"/>
                           </a:solidFill>
@@ -21002,7 +24641,7 @@
                     <a:lstStyle/>
                     <a:p>
                       <a:r>
-                        <a:rPr sz="860" b="1" i="0">
+                        <a:rPr sz="880" b="1" i="0">
                           <a:solidFill>
                             <a:srgbClr val="0F172A"/>
                           </a:solidFill>
@@ -21033,14 +24672,14 @@
                   </a:tcPr>
                 </a:tc>
               </a:tr>
-              <a:tr h="329184">
+              <a:tr h="347472">
                 <a:tc>
                   <a:txBody>
                     <a:bodyPr wrap="square"/>
                     <a:lstStyle/>
                     <a:p>
                       <a:r>
-                        <a:rPr sz="860" b="1" i="0">
+                        <a:rPr sz="880" b="1" i="0">
                           <a:solidFill>
                             <a:srgbClr val="0F172A"/>
                           </a:solidFill>
@@ -21076,7 +24715,7 @@
                     <a:lstStyle/>
                     <a:p>
                       <a:r>
-                        <a:rPr sz="860" b="0" i="0">
+                        <a:rPr sz="880" b="0" i="0">
                           <a:solidFill>
                             <a:srgbClr val="334155"/>
                           </a:solidFill>
@@ -21112,7 +24751,7 @@
                     <a:lstStyle/>
                     <a:p>
                       <a:r>
-                        <a:rPr sz="860" b="0" i="0">
+                        <a:rPr sz="880" b="0" i="0">
                           <a:solidFill>
                             <a:srgbClr val="334155"/>
                           </a:solidFill>
@@ -21143,14 +24782,14 @@
                   </a:tcPr>
                 </a:tc>
               </a:tr>
-              <a:tr h="329184">
+              <a:tr h="347472">
                 <a:tc>
                   <a:txBody>
                     <a:bodyPr wrap="square"/>
                     <a:lstStyle/>
                     <a:p>
                       <a:r>
-                        <a:rPr sz="860" b="1" i="0">
+                        <a:rPr sz="880" b="1" i="0">
                           <a:solidFill>
                             <a:srgbClr val="0F172A"/>
                           </a:solidFill>
@@ -21186,7 +24825,7 @@
                     <a:lstStyle/>
                     <a:p>
                       <a:r>
-                        <a:rPr sz="860" b="0" i="0">
+                        <a:rPr sz="880" b="0" i="0">
                           <a:solidFill>
                             <a:srgbClr val="334155"/>
                           </a:solidFill>
@@ -21222,7 +24861,7 @@
                     <a:lstStyle/>
                     <a:p>
                       <a:r>
-                        <a:rPr sz="860" b="0" i="0">
+                        <a:rPr sz="880" b="0" i="0">
                           <a:solidFill>
                             <a:srgbClr val="334155"/>
                           </a:solidFill>
@@ -21253,14 +24892,14 @@
                   </a:tcPr>
                 </a:tc>
               </a:tr>
-              <a:tr h="329184">
+              <a:tr h="347472">
                 <a:tc>
                   <a:txBody>
                     <a:bodyPr wrap="square"/>
                     <a:lstStyle/>
                     <a:p>
                       <a:r>
-                        <a:rPr sz="860" b="1" i="0">
+                        <a:rPr sz="880" b="1" i="0">
                           <a:solidFill>
                             <a:srgbClr val="0F172A"/>
                           </a:solidFill>
@@ -21296,7 +24935,7 @@
                     <a:lstStyle/>
                     <a:p>
                       <a:r>
-                        <a:rPr sz="860" b="0" i="0">
+                        <a:rPr sz="880" b="0" i="0">
                           <a:solidFill>
                             <a:srgbClr val="334155"/>
                           </a:solidFill>
@@ -21332,7 +24971,7 @@
                     <a:lstStyle/>
                     <a:p>
                       <a:r>
-                        <a:rPr sz="860" b="0" i="0">
+                        <a:rPr sz="880" b="0" i="0">
                           <a:solidFill>
                             <a:srgbClr val="334155"/>
                           </a:solidFill>
@@ -21363,14 +25002,14 @@
                   </a:tcPr>
                 </a:tc>
               </a:tr>
-              <a:tr h="329184">
+              <a:tr h="347472">
                 <a:tc>
                   <a:txBody>
                     <a:bodyPr wrap="square"/>
                     <a:lstStyle/>
                     <a:p>
                       <a:r>
-                        <a:rPr sz="860" b="1" i="0">
+                        <a:rPr sz="880" b="1" i="0">
                           <a:solidFill>
                             <a:srgbClr val="0F172A"/>
                           </a:solidFill>
@@ -21406,7 +25045,7 @@
                     <a:lstStyle/>
                     <a:p>
                       <a:r>
-                        <a:rPr sz="860" b="0" i="0">
+                        <a:rPr sz="880" b="0" i="0">
                           <a:solidFill>
                             <a:srgbClr val="334155"/>
                           </a:solidFill>
@@ -21442,7 +25081,7 @@
                     <a:lstStyle/>
                     <a:p>
                       <a:r>
-                        <a:rPr sz="860" b="0" i="0">
+                        <a:rPr sz="880" b="0" i="0">
                           <a:solidFill>
                             <a:srgbClr val="334155"/>
                           </a:solidFill>
@@ -21473,20 +25112,20 @@
                   </a:tcPr>
                 </a:tc>
               </a:tr>
-              <a:tr h="329184">
+              <a:tr h="347472">
                 <a:tc>
                   <a:txBody>
                     <a:bodyPr wrap="square"/>
                     <a:lstStyle/>
                     <a:p>
                       <a:r>
-                        <a:rPr sz="860" b="1" i="0">
+                        <a:rPr sz="880" b="1" i="0">
                           <a:solidFill>
                             <a:srgbClr val="0F172A"/>
                           </a:solidFill>
                           <a:latin typeface="DM Sans"/>
                         </a:rPr>
-                        <a:t>Mains wiring of the DUALR3</a:t>
+                        <a:t>Supply sag / LDO overload</a:t>
                       </a:r>
                     </a:p>
                   </a:txBody>
@@ -21516,13 +25155,13 @@
                     <a:lstStyle/>
                     <a:p>
                       <a:r>
-                        <a:rPr sz="860" b="0" i="0">
+                        <a:rPr sz="880" b="0" i="0">
                           <a:solidFill>
                             <a:srgbClr val="334155"/>
                           </a:solidFill>
                           <a:latin typeface="DM Sans"/>
                         </a:rPr>
-                        <a:t>Shock or fire</a:t>
+                        <a:t>Noisy or clipped bio-signals</a:t>
                       </a:r>
                     </a:p>
                   </a:txBody>
@@ -21552,7 +25191,117 @@
                     <a:lstStyle/>
                     <a:p>
                       <a:r>
-                        <a:rPr sz="860" b="0" i="0">
+                        <a:rPr sz="880" b="0" i="0">
+                          <a:solidFill>
+                            <a:srgbClr val="334155"/>
+                          </a:solidFill>
+                          <a:latin typeface="DM Sans"/>
+                        </a:rPr>
+                        <a:t>Bio-amps on a separate MCP1700 rail; ESP32 and radio on the DevKit regulator; rail currents measured at bring-up.</a:t>
+                      </a:r>
+                    </a:p>
+                  </a:txBody>
+                  <a:tcPr marL="54864" marR="54864" marT="27432" marB="27432" anchor="ctr">
+                    <a:lnL w="6350">
+                      <a:noFill/>
+                    </a:lnL>
+                    <a:lnR w="6350">
+                      <a:noFill/>
+                    </a:lnR>
+                    <a:lnT w="6350">
+                      <a:noFill/>
+                    </a:lnT>
+                    <a:lnB w="6350">
+                      <a:solidFill>
+                        <a:srgbClr val="E2E8F0"/>
+                      </a:solidFill>
+                    </a:lnB>
+                    <a:solidFill>
+                      <a:srgbClr val="FFFFFF"/>
+                    </a:solidFill>
+                  </a:tcPr>
+                </a:tc>
+              </a:tr>
+              <a:tr h="347472">
+                <a:tc>
+                  <a:txBody>
+                    <a:bodyPr wrap="square"/>
+                    <a:lstStyle/>
+                    <a:p>
+                      <a:r>
+                        <a:rPr sz="880" b="1" i="0">
+                          <a:solidFill>
+                            <a:srgbClr val="0F172A"/>
+                          </a:solidFill>
+                          <a:latin typeface="DM Sans"/>
+                        </a:rPr>
+                        <a:t>Mains wiring of the DUALR3</a:t>
+                      </a:r>
+                    </a:p>
+                  </a:txBody>
+                  <a:tcPr marL="54864" marR="54864" marT="27432" marB="27432" anchor="ctr">
+                    <a:lnL w="6350">
+                      <a:noFill/>
+                    </a:lnL>
+                    <a:lnR w="6350">
+                      <a:noFill/>
+                    </a:lnR>
+                    <a:lnT w="6350">
+                      <a:noFill/>
+                    </a:lnT>
+                    <a:lnB w="6350">
+                      <a:solidFill>
+                        <a:srgbClr val="E2E8F0"/>
+                      </a:solidFill>
+                    </a:lnB>
+                    <a:solidFill>
+                      <a:srgbClr val="F8FAFC"/>
+                    </a:solidFill>
+                  </a:tcPr>
+                </a:tc>
+                <a:tc>
+                  <a:txBody>
+                    <a:bodyPr wrap="square"/>
+                    <a:lstStyle/>
+                    <a:p>
+                      <a:r>
+                        <a:rPr sz="880" b="0" i="0">
+                          <a:solidFill>
+                            <a:srgbClr val="334155"/>
+                          </a:solidFill>
+                          <a:latin typeface="DM Sans"/>
+                        </a:rPr>
+                        <a:t>Shock or fire</a:t>
+                      </a:r>
+                    </a:p>
+                  </a:txBody>
+                  <a:tcPr marL="54864" marR="54864" marT="27432" marB="27432" anchor="ctr">
+                    <a:lnL w="6350">
+                      <a:noFill/>
+                    </a:lnL>
+                    <a:lnR w="6350">
+                      <a:noFill/>
+                    </a:lnR>
+                    <a:lnT w="6350">
+                      <a:noFill/>
+                    </a:lnT>
+                    <a:lnB w="6350">
+                      <a:solidFill>
+                        <a:srgbClr val="E2E8F0"/>
+                      </a:solidFill>
+                    </a:lnB>
+                    <a:solidFill>
+                      <a:srgbClr val="F8FAFC"/>
+                    </a:solidFill>
+                  </a:tcPr>
+                </a:tc>
+                <a:tc>
+                  <a:txBody>
+                    <a:bodyPr wrap="square"/>
+                    <a:lstStyle/>
+                    <a:p>
+                      <a:r>
+                        <a:rPr sz="880" b="0" i="0">
                           <a:solidFill>
                             <a:srgbClr val="334155"/>
                           </a:solidFill>
@@ -21578,7 +25327,7 @@
                       </a:solidFill>
                     </a:lnB>
                     <a:solidFill>
-                      <a:srgbClr val="FFFFFF"/>
+                      <a:srgbClr val="F8FAFC"/>
                     </a:solidFill>
                   </a:tcPr>
                 </a:tc>
@@ -21595,8 +25344,8 @@
         </p:nvSpPr>
         <p:spPr>
           <a:xfrm>
-            <a:off x="530352" y="3493008"/>
-            <a:ext cx="2679192" cy="2066543"/>
+            <a:off x="530352" y="3858768"/>
+            <a:ext cx="5477256" cy="1700784"/>
           </a:xfrm>
           <a:prstGeom prst="roundRect">
             <a:avLst>
@@ -21649,7 +25398,7 @@
         </p:blipFill>
         <p:spPr>
           <a:xfrm>
-            <a:off x="658368" y="3611879"/>
+            <a:off x="694944" y="3977640"/>
             <a:ext cx="155448" cy="155448"/>
           </a:xfrm>
           <a:prstGeom prst="rect">
@@ -21665,8 +25414,8 @@
         </p:nvSpPr>
         <p:spPr>
           <a:xfrm>
-            <a:off x="896112" y="3584448"/>
-            <a:ext cx="2231136" cy="219456"/>
+            <a:off x="932688" y="3950208"/>
+            <a:ext cx="4882896" cy="219456"/>
           </a:xfrm>
           <a:prstGeom prst="rect">
             <a:avLst/>
@@ -21681,13 +25430,13 @@
           <a:p>
             <a:pPr algn="l"/>
             <a:r>
-              <a:rPr sz="1040" b="1" i="0">
+              <a:rPr sz="1125" b="1" i="0">
                 <a:solidFill>
                   <a:srgbClr val="0F172A"/>
                 </a:solidFill>
                 <a:latin typeface="DM Sans"/>
               </a:rPr>
-              <a:t>Oct 2026 · Fabrication</a:t>
+              <a:t>Physical fail-safes</a:t>
             </a:r>
           </a:p>
         </p:txBody>
@@ -21700,8 +25449,8 @@
         </p:nvSpPr>
         <p:spPr>
           <a:xfrm>
-            <a:off x="658368" y="3913632"/>
-            <a:ext cx="2432304" cy="1645920"/>
+            <a:off x="694944" y="4242816"/>
+            <a:ext cx="5166360" cy="1280160"/>
           </a:xfrm>
           <a:prstGeom prst="rect">
             <a:avLst/>
@@ -21716,7 +25465,7 @@
           <a:p>
             <a:pPr marL="155448" indent="-155448">
               <a:spcAft>
-                <a:spcPts val="700"/>
+                <a:spcPts val="500"/>
               </a:spcAft>
               <a:buClr>
                 <a:srgbClr val="059669"/>
@@ -21726,19 +25475,28 @@
               <a:buChar char="▪"/>
             </a:pPr>
             <a:r>
-              <a:rPr sz="1000" b="0" i="0">
+              <a:rPr sz="980" b="1" i="0">
                 <a:solidFill>
                   <a:srgbClr val="334155"/>
                 </a:solidFill>
                 <a:latin typeface="DM Sans"/>
               </a:rPr>
-              <a:t>Delivery inventory, module revision checks</a:t>
+              <a:t>Disarm button: </a:t>
+            </a:r>
+            <a:r>
+              <a:rPr sz="980" b="0" i="0">
+                <a:solidFill>
+                  <a:srgbClr val="334155"/>
+                </a:solidFill>
+                <a:latin typeface="DM Sans"/>
+              </a:rPr>
+              <a:t>momentary PSB-110 on GPIO32 drops the system to DISARMED at once.</a:t>
             </a:r>
           </a:p>
           <a:p>
             <a:pPr marL="155448" indent="-155448">
               <a:spcAft>
-                <a:spcPts val="700"/>
+                <a:spcPts val="500"/>
               </a:spcAft>
               <a:buClr>
                 <a:srgbClr val="059669"/>
@@ -21748,19 +25506,28 @@
               <a:buChar char="▪"/>
             </a:pPr>
             <a:r>
-              <a:rPr sz="1000" b="0" i="0">
+              <a:rPr sz="980" b="1" i="0">
                 <a:solidFill>
                   <a:srgbClr val="334155"/>
                 </a:solidFill>
                 <a:latin typeface="DM Sans"/>
               </a:rPr>
-              <a:t>Perfboard soldering per Rev A schematic</a:t>
+              <a:t>Enclosures: </a:t>
+            </a:r>
+            <a:r>
+              <a:rPr sz="980" b="0" i="0">
+                <a:solidFill>
+                  <a:srgbClr val="334155"/>
+                </a:solidFill>
+                <a:latin typeface="DM Sans"/>
+              </a:rPr>
+              <a:t>PETG case and pod cover all boards; no exposed conductors near the skin.</a:t>
             </a:r>
           </a:p>
           <a:p>
             <a:pPr marL="155448" indent="-155448">
               <a:spcAft>
-                <a:spcPts val="700"/>
+                <a:spcPts val="500"/>
               </a:spcAft>
               <a:buClr>
                 <a:srgbClr val="059669"/>
@@ -21770,13 +25537,22 @@
               <a:buChar char="▪"/>
             </a:pPr>
             <a:r>
-              <a:rPr sz="1000" b="0" i="0">
+              <a:rPr sz="980" b="1" i="0">
                 <a:solidFill>
                   <a:srgbClr val="334155"/>
                 </a:solidFill>
                 <a:latin typeface="DM Sans"/>
               </a:rPr>
-              <a:t>ADC bring-up with signal generator, no body contact</a:t>
+              <a:t>Isolation: </a:t>
+            </a:r>
+            <a:r>
+              <a:rPr sz="980" b="0" i="0">
+                <a:solidFill>
+                  <a:srgbClr val="334155"/>
+                </a:solidFill>
+                <a:latin typeface="DM Sans"/>
+              </a:rPr>
+              <a:t>body-worn unit and mains relay share no wire — only Wi-Fi.</a:t>
             </a:r>
           </a:p>
         </p:txBody>
@@ -21789,8 +25565,8 @@
         </p:nvSpPr>
         <p:spPr>
           <a:xfrm>
-            <a:off x="3346704" y="3493008"/>
-            <a:ext cx="2679192" cy="2066543"/>
+            <a:off x="6181344" y="3858768"/>
+            <a:ext cx="5477256" cy="1700784"/>
           </a:xfrm>
           <a:prstGeom prst="roundRect">
             <a:avLst>
@@ -21843,7 +25619,7 @@
         </p:blipFill>
         <p:spPr>
           <a:xfrm>
-            <a:off x="3474720" y="3611879"/>
+            <a:off x="6345936" y="3977640"/>
             <a:ext cx="155448" cy="155448"/>
           </a:xfrm>
           <a:prstGeom prst="rect">
@@ -21859,8 +25635,8 @@
         </p:nvSpPr>
         <p:spPr>
           <a:xfrm>
-            <a:off x="3712464" y="3584448"/>
-            <a:ext cx="2231136" cy="219456"/>
+            <a:off x="6583680" y="3950208"/>
+            <a:ext cx="4882896" cy="219456"/>
           </a:xfrm>
           <a:prstGeom prst="rect">
             <a:avLst/>
@@ -21875,13 +25651,13 @@
           <a:p>
             <a:pPr algn="l"/>
             <a:r>
-              <a:rPr sz="1040" b="1" i="0">
+              <a:rPr sz="1125" b="1" i="0">
                 <a:solidFill>
                   <a:srgbClr val="0F172A"/>
                 </a:solidFill>
                 <a:latin typeface="DM Sans"/>
               </a:rPr>
-              <a:t>Nov 2026 · Fabrication</a:t>
+              <a:t>Standards Compliance (considered, not certified)</a:t>
             </a:r>
           </a:p>
         </p:txBody>
@@ -21894,8 +25670,8 @@
         </p:nvSpPr>
         <p:spPr>
           <a:xfrm>
-            <a:off x="3474720" y="3913632"/>
-            <a:ext cx="2432304" cy="1645920"/>
+            <a:off x="6345936" y="4242816"/>
+            <a:ext cx="5166360" cy="1280160"/>
           </a:xfrm>
           <a:prstGeom prst="rect">
             <a:avLst/>
@@ -21910,7 +25686,7 @@
           <a:p>
             <a:pPr marL="155448" indent="-155448">
               <a:spcAft>
-                <a:spcPts val="700"/>
+                <a:spcPts val="500"/>
               </a:spcAft>
               <a:buClr>
                 <a:srgbClr val="059669"/>
@@ -21920,19 +25696,28 @@
               <a:buChar char="▪"/>
             </a:pPr>
             <a:r>
-              <a:rPr sz="1000" b="0" i="0">
+              <a:rPr sz="980" b="1" i="0">
                 <a:solidFill>
                   <a:srgbClr val="334155"/>
                 </a:solidFill>
                 <a:latin typeface="DM Sans"/>
               </a:rPr>
-              <a:t>PETG print of enclosure + pod (college printer)</a:t>
+              <a:t>ISO 14971: </a:t>
+            </a:r>
+            <a:r>
+              <a:rPr sz="980" b="0" i="0">
+                <a:solidFill>
+                  <a:srgbClr val="334155"/>
+                </a:solidFill>
+                <a:latin typeface="DM Sans"/>
+              </a:rPr>
+              <a:t>risk-management file started from this FMEA.</a:t>
             </a:r>
           </a:p>
           <a:p>
             <a:pPr marL="155448" indent="-155448">
               <a:spcAft>
-                <a:spcPts val="700"/>
+                <a:spcPts val="500"/>
               </a:spcAft>
               <a:buClr>
                 <a:srgbClr val="059669"/>
@@ -21942,19 +25727,28 @@
               <a:buChar char="▪"/>
             </a:pPr>
             <a:r>
-              <a:rPr sz="1000" b="0" i="0">
+              <a:rPr sz="980" b="1" i="0">
                 <a:solidFill>
                   <a:srgbClr val="334155"/>
                 </a:solidFill>
                 <a:latin typeface="DM Sans"/>
               </a:rPr>
-              <a:t>Firmware: timed acquisition + health flags</a:t>
+              <a:t>IEC 60601-1: </a:t>
+            </a:r>
+            <a:r>
+              <a:rPr sz="980" b="0" i="0">
+                <a:solidFill>
+                  <a:srgbClr val="334155"/>
+                </a:solidFill>
+                <a:latin typeface="DM Sans"/>
+              </a:rPr>
+              <a:t>leakage-current principles for body-worn electrodes.</a:t>
             </a:r>
           </a:p>
           <a:p>
             <a:pPr marL="155448" indent="-155448">
               <a:spcAft>
-                <a:spcPts val="700"/>
+                <a:spcPts val="500"/>
               </a:spcAft>
               <a:buClr>
                 <a:srgbClr val="059669"/>
@@ -21964,13 +25758,22 @@
               <a:buChar char="▪"/>
             </a:pPr>
             <a:r>
-              <a:rPr sz="1000" b="0" i="0">
+              <a:rPr sz="980" b="1" i="0">
                 <a:solidFill>
                   <a:srgbClr val="334155"/>
                 </a:solidFill>
                 <a:latin typeface="DM Sans"/>
               </a:rPr>
-              <a:t>Laptop app v0; electrode trials on team</a:t>
+              <a:t>IEC 60825-1: </a:t>
+            </a:r>
+            <a:r>
+              <a:rPr sz="980" b="0" i="0">
+                <a:solidFill>
+                  <a:srgbClr val="334155"/>
+                </a:solidFill>
+                <a:latin typeface="DM Sans"/>
+              </a:rPr>
+              <a:t>VL53L5CX emitter is Class 1 (per ST).</a:t>
             </a:r>
           </a:p>
         </p:txBody>
@@ -21978,394 +25781,6 @@
       <p:sp>
         <p:nvSpPr>
           <p:cNvPr id="172" name="Rounded Rectangle 171"/>
-          <p:cNvSpPr/>
-          <p:nvPr/>
-        </p:nvSpPr>
-        <p:spPr>
-          <a:xfrm>
-            <a:off x="6163056" y="3493008"/>
-            <a:ext cx="2679192" cy="2066543"/>
-          </a:xfrm>
-          <a:prstGeom prst="roundRect">
-            <a:avLst>
-              <a:gd name="adj" fmla="val 6000"/>
-            </a:avLst>
-          </a:prstGeom>
-          <a:solidFill>
-            <a:srgbClr val="F0FDF4"/>
-          </a:solidFill>
-          <a:ln w="9525">
-            <a:solidFill>
-              <a:srgbClr val="BBF7D0"/>
-            </a:solidFill>
-          </a:ln>
-          <a:effectLst/>
-        </p:spPr>
-        <p:style>
-          <a:lnRef idx="1">
-            <a:schemeClr val="accent1"/>
-          </a:lnRef>
-          <a:fillRef idx="3">
-            <a:schemeClr val="accent1"/>
-          </a:fillRef>
-          <a:effectRef idx="2">
-            <a:schemeClr val="accent1"/>
-          </a:effectRef>
-          <a:fontRef idx="minor">
-            <a:schemeClr val="lt1"/>
-          </a:fontRef>
-        </p:style>
-        <p:txBody>
-          <a:bodyPr rtlCol="0" anchor="ctr"/>
-          <a:lstStyle/>
-          <a:p/>
-        </p:txBody>
-      </p:sp>
-      <p:pic>
-        <p:nvPicPr>
-          <p:cNvPr id="173" name="Picture 172" descr="image.png"/>
-          <p:cNvPicPr>
-            <a:picLocks noChangeAspect="1"/>
-          </p:cNvPicPr>
-          <p:nvPr/>
-        </p:nvPicPr>
-        <p:blipFill>
-          <a:blip r:embed="rId12"/>
-          <a:stretch>
-            <a:fillRect/>
-          </a:stretch>
-        </p:blipFill>
-        <p:spPr>
-          <a:xfrm>
-            <a:off x="6291072" y="3611879"/>
-            <a:ext cx="155448" cy="155448"/>
-          </a:xfrm>
-          <a:prstGeom prst="rect">
-            <a:avLst/>
-          </a:prstGeom>
-        </p:spPr>
-      </p:pic>
-      <p:sp>
-        <p:nvSpPr>
-          <p:cNvPr id="174" name="TextBox 173"/>
-          <p:cNvSpPr txBox="1"/>
-          <p:nvPr/>
-        </p:nvSpPr>
-        <p:spPr>
-          <a:xfrm>
-            <a:off x="6528816" y="3584448"/>
-            <a:ext cx="2231136" cy="219456"/>
-          </a:xfrm>
-          <a:prstGeom prst="rect">
-            <a:avLst/>
-          </a:prstGeom>
-          <a:noFill/>
-        </p:spPr>
-        <p:txBody>
-          <a:bodyPr wrap="square" anchor="t" lIns="0" rIns="0" tIns="0" bIns="0">
-            <a:spAutoFit/>
-          </a:bodyPr>
-          <a:lstStyle/>
-          <a:p>
-            <a:pPr algn="l"/>
-            <a:r>
-              <a:rPr sz="1040" b="1" i="0">
-                <a:solidFill>
-                  <a:srgbClr val="0F172A"/>
-                </a:solidFill>
-                <a:latin typeface="DM Sans"/>
-              </a:rPr>
-              <a:t>Dec 2026 · Integration</a:t>
-            </a:r>
-          </a:p>
-        </p:txBody>
-      </p:sp>
-      <p:sp>
-        <p:nvSpPr>
-          <p:cNvPr id="175" name="TextBox 174"/>
-          <p:cNvSpPr txBox="1"/>
-          <p:nvPr/>
-        </p:nvSpPr>
-        <p:spPr>
-          <a:xfrm>
-            <a:off x="6291072" y="3913632"/>
-            <a:ext cx="2432304" cy="1645920"/>
-          </a:xfrm>
-          <a:prstGeom prst="rect">
-            <a:avLst/>
-          </a:prstGeom>
-          <a:noFill/>
-        </p:spPr>
-        <p:txBody>
-          <a:bodyPr wrap="square" anchor="t" lIns="0" rIns="0" tIns="0" bIns="0">
-            <a:spAutoFit/>
-          </a:bodyPr>
-          <a:lstStyle/>
-          <a:p>
-            <a:pPr marL="155448" indent="-155448">
-              <a:spcAft>
-                <a:spcPts val="700"/>
-              </a:spcAft>
-              <a:buClr>
-                <a:srgbClr val="059669"/>
-              </a:buClr>
-              <a:buSzPct val="110000"/>
-              <a:buFont typeface="Arial"/>
-              <a:buChar char="▪"/>
-            </a:pPr>
-            <a:r>
-              <a:rPr sz="1000" b="0" i="0">
-                <a:solidFill>
-                  <a:srgbClr val="334155"/>
-                </a:solidFill>
-                <a:latin typeface="DM Sans"/>
-              </a:rPr>
-              <a:t>Calibration routine, two-factor state machine</a:t>
-            </a:r>
-          </a:p>
-          <a:p>
-            <a:pPr marL="155448" indent="-155448">
-              <a:spcAft>
-                <a:spcPts val="700"/>
-              </a:spcAft>
-              <a:buClr>
-                <a:srgbClr val="059669"/>
-              </a:buClr>
-              <a:buSzPct val="110000"/>
-              <a:buFont typeface="Arial"/>
-              <a:buChar char="▪"/>
-            </a:pPr>
-            <a:r>
-              <a:rPr sz="1000" b="0" i="0">
-                <a:solidFill>
-                  <a:srgbClr val="334155"/>
-                </a:solidFill>
-                <a:latin typeface="DM Sans"/>
-              </a:rPr>
-              <a:t>ToF depth gating, IMU motion rejection</a:t>
-            </a:r>
-          </a:p>
-          <a:p>
-            <a:pPr marL="155448" indent="-155448">
-              <a:spcAft>
-                <a:spcPts val="700"/>
-              </a:spcAft>
-              <a:buClr>
-                <a:srgbClr val="059669"/>
-              </a:buClr>
-              <a:buSzPct val="110000"/>
-              <a:buFont typeface="Arial"/>
-              <a:buChar char="▪"/>
-            </a:pPr>
-            <a:r>
-              <a:rPr sz="1000" b="0" i="0">
-                <a:solidFill>
-                  <a:srgbClr val="334155"/>
-                </a:solidFill>
-                <a:latin typeface="DM Sans"/>
-              </a:rPr>
-              <a:t>DUALR3 fitted by electrician, integrated</a:t>
-            </a:r>
-          </a:p>
-        </p:txBody>
-      </p:sp>
-      <p:sp>
-        <p:nvSpPr>
-          <p:cNvPr id="176" name="Rounded Rectangle 175"/>
-          <p:cNvSpPr/>
-          <p:nvPr/>
-        </p:nvSpPr>
-        <p:spPr>
-          <a:xfrm>
-            <a:off x="8979408" y="3493008"/>
-            <a:ext cx="2679192" cy="2066543"/>
-          </a:xfrm>
-          <a:prstGeom prst="roundRect">
-            <a:avLst>
-              <a:gd name="adj" fmla="val 6000"/>
-            </a:avLst>
-          </a:prstGeom>
-          <a:solidFill>
-            <a:srgbClr val="F8FAFC"/>
-          </a:solidFill>
-          <a:ln w="9525">
-            <a:solidFill>
-              <a:srgbClr val="E2E8F0"/>
-            </a:solidFill>
-          </a:ln>
-          <a:effectLst/>
-        </p:spPr>
-        <p:style>
-          <a:lnRef idx="1">
-            <a:schemeClr val="accent1"/>
-          </a:lnRef>
-          <a:fillRef idx="3">
-            <a:schemeClr val="accent1"/>
-          </a:fillRef>
-          <a:effectRef idx="2">
-            <a:schemeClr val="accent1"/>
-          </a:effectRef>
-          <a:fontRef idx="minor">
-            <a:schemeClr val="lt1"/>
-          </a:fontRef>
-        </p:style>
-        <p:txBody>
-          <a:bodyPr rtlCol="0" anchor="ctr"/>
-          <a:lstStyle/>
-          <a:p/>
-        </p:txBody>
-      </p:sp>
-      <p:pic>
-        <p:nvPicPr>
-          <p:cNvPr id="177" name="Picture 176" descr="image.png"/>
-          <p:cNvPicPr>
-            <a:picLocks noChangeAspect="1"/>
-          </p:cNvPicPr>
-          <p:nvPr/>
-        </p:nvPicPr>
-        <p:blipFill>
-          <a:blip r:embed="rId12"/>
-          <a:stretch>
-            <a:fillRect/>
-          </a:stretch>
-        </p:blipFill>
-        <p:spPr>
-          <a:xfrm>
-            <a:off x="9107424" y="3611879"/>
-            <a:ext cx="155448" cy="155448"/>
-          </a:xfrm>
-          <a:prstGeom prst="rect">
-            <a:avLst/>
-          </a:prstGeom>
-        </p:spPr>
-      </p:pic>
-      <p:sp>
-        <p:nvSpPr>
-          <p:cNvPr id="178" name="TextBox 177"/>
-          <p:cNvSpPr txBox="1"/>
-          <p:nvPr/>
-        </p:nvSpPr>
-        <p:spPr>
-          <a:xfrm>
-            <a:off x="9345168" y="3584448"/>
-            <a:ext cx="2231136" cy="219456"/>
-          </a:xfrm>
-          <a:prstGeom prst="rect">
-            <a:avLst/>
-          </a:prstGeom>
-          <a:noFill/>
-        </p:spPr>
-        <p:txBody>
-          <a:bodyPr wrap="square" anchor="t" lIns="0" rIns="0" tIns="0" bIns="0">
-            <a:spAutoFit/>
-          </a:bodyPr>
-          <a:lstStyle/>
-          <a:p>
-            <a:pPr algn="l"/>
-            <a:r>
-              <a:rPr sz="1040" b="1" i="0">
-                <a:solidFill>
-                  <a:srgbClr val="0F172A"/>
-                </a:solidFill>
-                <a:latin typeface="DM Sans"/>
-              </a:rPr>
-              <a:t>Jan 2027 · Field demo</a:t>
-            </a:r>
-          </a:p>
-        </p:txBody>
-      </p:sp>
-      <p:sp>
-        <p:nvSpPr>
-          <p:cNvPr id="179" name="TextBox 178"/>
-          <p:cNvSpPr txBox="1"/>
-          <p:nvPr/>
-        </p:nvSpPr>
-        <p:spPr>
-          <a:xfrm>
-            <a:off x="9107424" y="3913632"/>
-            <a:ext cx="2432304" cy="1645920"/>
-          </a:xfrm>
-          <a:prstGeom prst="rect">
-            <a:avLst/>
-          </a:prstGeom>
-          <a:noFill/>
-        </p:spPr>
-        <p:txBody>
-          <a:bodyPr wrap="square" anchor="t" lIns="0" rIns="0" tIns="0" bIns="0">
-            <a:spAutoFit/>
-          </a:bodyPr>
-          <a:lstStyle/>
-          <a:p>
-            <a:pPr marL="155448" indent="-155448">
-              <a:spcAft>
-                <a:spcPts val="700"/>
-              </a:spcAft>
-              <a:buClr>
-                <a:srgbClr val="059669"/>
-              </a:buClr>
-              <a:buSzPct val="110000"/>
-              <a:buFont typeface="Arial"/>
-              <a:buChar char="▪"/>
-            </a:pPr>
-            <a:r>
-              <a:rPr sz="1000" b="0" i="0">
-                <a:solidFill>
-                  <a:srgbClr val="334155"/>
-                </a:solidFill>
-                <a:latin typeface="DM Sans"/>
-              </a:rPr>
-              <a:t>Timed trials: accuracy, false triggers, latency</a:t>
-            </a:r>
-          </a:p>
-          <a:p>
-            <a:pPr marL="155448" indent="-155448">
-              <a:spcAft>
-                <a:spcPts val="700"/>
-              </a:spcAft>
-              <a:buClr>
-                <a:srgbClr val="059669"/>
-              </a:buClr>
-              <a:buSzPct val="110000"/>
-              <a:buFont typeface="Arial"/>
-              <a:buChar char="▪"/>
-            </a:pPr>
-            <a:r>
-              <a:rPr sz="1000" b="0" i="0">
-                <a:solidFill>
-                  <a:srgbClr val="334155"/>
-                </a:solidFill>
-                <a:latin typeface="DM Sans"/>
-              </a:rPr>
-              <a:t>Stage 2 → 3 report with measured data</a:t>
-            </a:r>
-          </a:p>
-          <a:p>
-            <a:pPr marL="155448" indent="-155448">
-              <a:spcAft>
-                <a:spcPts val="700"/>
-              </a:spcAft>
-              <a:buClr>
-                <a:srgbClr val="059669"/>
-              </a:buClr>
-              <a:buSzPct val="110000"/>
-              <a:buFont typeface="Arial"/>
-              <a:buChar char="▪"/>
-            </a:pPr>
-            <a:r>
-              <a:rPr sz="1000" b="0" i="0">
-                <a:solidFill>
-                  <a:srgbClr val="334155"/>
-                </a:solidFill>
-                <a:latin typeface="DM Sans"/>
-              </a:rPr>
-              <a:t>Commitment: demo-ready prototype for Stage 3</a:t>
-            </a:r>
-          </a:p>
-        </p:txBody>
-      </p:sp>
-      <p:sp>
-        <p:nvSpPr>
-          <p:cNvPr id="180" name="Rounded Rectangle 179"/>
           <p:cNvSpPr/>
           <p:nvPr/>
         </p:nvSpPr>
@@ -22411,7 +25826,7 @@
       </p:sp>
       <p:sp>
         <p:nvSpPr>
-          <p:cNvPr id="181" name="TextBox 180"/>
+          <p:cNvPr id="173" name="TextBox 172"/>
           <p:cNvSpPr txBox="1"/>
           <p:nvPr/>
         </p:nvSpPr>
@@ -22439,7 +25854,7 @@
                 </a:solidFill>
                 <a:latin typeface="DM Sans"/>
               </a:rPr>
-              <a:t>Standards considered (no certification claimed): </a:t>
+              <a:t>Human testing: </a:t>
             </a:r>
             <a:r>
               <a:rPr sz="936" b="0" i="0">
@@ -22448,7 +25863,7 @@
                 </a:solidFill>
                 <a:latin typeface="DM Sans"/>
               </a:rPr>
-              <a:t>ISO 14971 risk management; IEC 60601-1 leakage-current principles for body-worn electrodes; IEC 60825-1 Class 1 laser (VL53L5CX, per ST); ethics approval before volunteer testing.</a:t>
+              <a:t>electrode trials only on team members first, and volunteer sessions only after institutional ethics approval. No conformity or medical-device claim is made.</a:t>
             </a:r>
           </a:p>
         </p:txBody>
@@ -22597,7 +26012,7 @@
                 </a:solidFill>
                 <a:latin typeface="Poppins SemiBold"/>
               </a:rPr>
-              <a:t>Technical Challenges &amp; Risk Mitigation</a:t>
+              <a:t>Roadmap: 4-Month Fabrication Plan</a:t>
             </a:r>
           </a:p>
         </p:txBody>
@@ -22668,7 +26083,7 @@
         <p:spPr>
           <a:xfrm>
             <a:off x="530352" y="932688"/>
-            <a:ext cx="3611880" cy="3310128"/>
+            <a:ext cx="2679192" cy="3017520"/>
           </a:xfrm>
           <a:prstGeom prst="roundRect">
             <a:avLst>
@@ -22681,6 +26096,922 @@
           <a:ln w="9525">
             <a:solidFill>
               <a:srgbClr val="BBF7D0"/>
+            </a:solidFill>
+          </a:ln>
+          <a:effectLst/>
+        </p:spPr>
+        <p:style>
+          <a:lnRef idx="1">
+            <a:schemeClr val="accent1"/>
+          </a:lnRef>
+          <a:fillRef idx="3">
+            <a:schemeClr val="accent1"/>
+          </a:fillRef>
+          <a:effectRef idx="2">
+            <a:schemeClr val="accent1"/>
+          </a:effectRef>
+          <a:fontRef idx="minor">
+            <a:schemeClr val="lt1"/>
+          </a:fontRef>
+        </p:style>
+        <p:txBody>
+          <a:bodyPr rtlCol="0" anchor="ctr"/>
+          <a:lstStyle/>
+          <a:p/>
+        </p:txBody>
+      </p:sp>
+      <p:sp>
+        <p:nvSpPr>
+          <p:cNvPr id="161" name="TextBox 160"/>
+          <p:cNvSpPr txBox="1"/>
+          <p:nvPr/>
+        </p:nvSpPr>
+        <p:spPr>
+          <a:xfrm>
+            <a:off x="676656" y="1024128"/>
+            <a:ext cx="2377440" cy="457200"/>
+          </a:xfrm>
+          <a:prstGeom prst="rect">
+            <a:avLst/>
+          </a:prstGeom>
+          <a:noFill/>
+        </p:spPr>
+        <p:txBody>
+          <a:bodyPr wrap="square" anchor="t" lIns="0" rIns="0" tIns="0" bIns="0">
+            <a:spAutoFit/>
+          </a:bodyPr>
+          <a:lstStyle/>
+          <a:p>
+            <a:pPr algn="l"/>
+            <a:r>
+              <a:rPr sz="2200" b="1" i="0">
+                <a:solidFill>
+                  <a:srgbClr val="0369A1"/>
+                </a:solidFill>
+                <a:latin typeface="Poppins"/>
+              </a:rPr>
+              <a:t>M1</a:t>
+            </a:r>
+          </a:p>
+        </p:txBody>
+      </p:sp>
+      <p:pic>
+        <p:nvPicPr>
+          <p:cNvPr id="162" name="Picture 161" descr="image.png"/>
+          <p:cNvPicPr>
+            <a:picLocks noChangeAspect="1"/>
+          </p:cNvPicPr>
+          <p:nvPr/>
+        </p:nvPicPr>
+        <p:blipFill>
+          <a:blip r:embed="rId12"/>
+          <a:stretch>
+            <a:fillRect/>
+          </a:stretch>
+        </p:blipFill>
+        <p:spPr>
+          <a:xfrm>
+            <a:off x="658368" y="1581912"/>
+            <a:ext cx="155448" cy="155448"/>
+          </a:xfrm>
+          <a:prstGeom prst="rect">
+            <a:avLst/>
+          </a:prstGeom>
+        </p:spPr>
+      </p:pic>
+      <p:sp>
+        <p:nvSpPr>
+          <p:cNvPr id="163" name="TextBox 162"/>
+          <p:cNvSpPr txBox="1"/>
+          <p:nvPr/>
+        </p:nvSpPr>
+        <p:spPr>
+          <a:xfrm>
+            <a:off x="896112" y="1554480"/>
+            <a:ext cx="2231136" cy="219456"/>
+          </a:xfrm>
+          <a:prstGeom prst="rect">
+            <a:avLst/>
+          </a:prstGeom>
+          <a:noFill/>
+        </p:spPr>
+        <p:txBody>
+          <a:bodyPr wrap="square" anchor="t" lIns="0" rIns="0" tIns="0" bIns="0">
+            <a:spAutoFit/>
+          </a:bodyPr>
+          <a:lstStyle/>
+          <a:p>
+            <a:pPr algn="l"/>
+            <a:r>
+              <a:rPr sz="1060" b="1" i="0">
+                <a:solidFill>
+                  <a:srgbClr val="0F172A"/>
+                </a:solidFill>
+                <a:latin typeface="DM Sans"/>
+              </a:rPr>
+              <a:t>Oct 2026 · Fabrication</a:t>
+            </a:r>
+          </a:p>
+        </p:txBody>
+      </p:sp>
+      <p:sp>
+        <p:nvSpPr>
+          <p:cNvPr id="164" name="TextBox 163"/>
+          <p:cNvSpPr txBox="1"/>
+          <p:nvPr/>
+        </p:nvSpPr>
+        <p:spPr>
+          <a:xfrm>
+            <a:off x="658368" y="1883664"/>
+            <a:ext cx="2432304" cy="2011680"/>
+          </a:xfrm>
+          <a:prstGeom prst="rect">
+            <a:avLst/>
+          </a:prstGeom>
+          <a:noFill/>
+        </p:spPr>
+        <p:txBody>
+          <a:bodyPr wrap="square" anchor="t" lIns="0" rIns="0" tIns="0" bIns="0">
+            <a:spAutoFit/>
+          </a:bodyPr>
+          <a:lstStyle/>
+          <a:p>
+            <a:pPr marL="155448" indent="-155448">
+              <a:spcAft>
+                <a:spcPts val="800"/>
+              </a:spcAft>
+              <a:buClr>
+                <a:srgbClr val="059669"/>
+              </a:buClr>
+              <a:buSzPct val="110000"/>
+              <a:buFont typeface="Arial"/>
+              <a:buChar char="▪"/>
+            </a:pPr>
+            <a:r>
+              <a:rPr sz="1000" b="0" i="0">
+                <a:solidFill>
+                  <a:srgbClr val="334155"/>
+                </a:solidFill>
+                <a:latin typeface="DM Sans"/>
+              </a:rPr>
+              <a:t>Delivery inventory and module revision checks</a:t>
+            </a:r>
+          </a:p>
+          <a:p>
+            <a:pPr marL="155448" indent="-155448">
+              <a:spcAft>
+                <a:spcPts val="800"/>
+              </a:spcAft>
+              <a:buClr>
+                <a:srgbClr val="059669"/>
+              </a:buClr>
+              <a:buSzPct val="110000"/>
+              <a:buFont typeface="Arial"/>
+              <a:buChar char="▪"/>
+            </a:pPr>
+            <a:r>
+              <a:rPr sz="1000" b="0" i="0">
+                <a:solidFill>
+                  <a:srgbClr val="334155"/>
+                </a:solidFill>
+                <a:latin typeface="DM Sans"/>
+              </a:rPr>
+              <a:t>Perfboard soldering per Rev A schematic</a:t>
+            </a:r>
+          </a:p>
+          <a:p>
+            <a:pPr marL="155448" indent="-155448">
+              <a:spcAft>
+                <a:spcPts val="800"/>
+              </a:spcAft>
+              <a:buClr>
+                <a:srgbClr val="059669"/>
+              </a:buClr>
+              <a:buSzPct val="110000"/>
+              <a:buFont typeface="Arial"/>
+              <a:buChar char="▪"/>
+            </a:pPr>
+            <a:r>
+              <a:rPr sz="1000" b="0" i="0">
+                <a:solidFill>
+                  <a:srgbClr val="334155"/>
+                </a:solidFill>
+                <a:latin typeface="DM Sans"/>
+              </a:rPr>
+              <a:t>ADC bring-up with a signal generator — no body contact yet</a:t>
+            </a:r>
+          </a:p>
+        </p:txBody>
+      </p:sp>
+      <p:sp>
+        <p:nvSpPr>
+          <p:cNvPr id="165" name="Rounded Rectangle 164"/>
+          <p:cNvSpPr/>
+          <p:nvPr/>
+        </p:nvSpPr>
+        <p:spPr>
+          <a:xfrm>
+            <a:off x="3346704" y="932688"/>
+            <a:ext cx="2679192" cy="3017520"/>
+          </a:xfrm>
+          <a:prstGeom prst="roundRect">
+            <a:avLst>
+              <a:gd name="adj" fmla="val 6000"/>
+            </a:avLst>
+          </a:prstGeom>
+          <a:solidFill>
+            <a:srgbClr val="F8FAFC"/>
+          </a:solidFill>
+          <a:ln w="9525">
+            <a:solidFill>
+              <a:srgbClr val="E2E8F0"/>
+            </a:solidFill>
+          </a:ln>
+          <a:effectLst/>
+        </p:spPr>
+        <p:style>
+          <a:lnRef idx="1">
+            <a:schemeClr val="accent1"/>
+          </a:lnRef>
+          <a:fillRef idx="3">
+            <a:schemeClr val="accent1"/>
+          </a:fillRef>
+          <a:effectRef idx="2">
+            <a:schemeClr val="accent1"/>
+          </a:effectRef>
+          <a:fontRef idx="minor">
+            <a:schemeClr val="lt1"/>
+          </a:fontRef>
+        </p:style>
+        <p:txBody>
+          <a:bodyPr rtlCol="0" anchor="ctr"/>
+          <a:lstStyle/>
+          <a:p/>
+        </p:txBody>
+      </p:sp>
+      <p:sp>
+        <p:nvSpPr>
+          <p:cNvPr id="166" name="TextBox 165"/>
+          <p:cNvSpPr txBox="1"/>
+          <p:nvPr/>
+        </p:nvSpPr>
+        <p:spPr>
+          <a:xfrm>
+            <a:off x="3493008" y="1024128"/>
+            <a:ext cx="2377440" cy="457200"/>
+          </a:xfrm>
+          <a:prstGeom prst="rect">
+            <a:avLst/>
+          </a:prstGeom>
+          <a:noFill/>
+        </p:spPr>
+        <p:txBody>
+          <a:bodyPr wrap="square" anchor="t" lIns="0" rIns="0" tIns="0" bIns="0">
+            <a:spAutoFit/>
+          </a:bodyPr>
+          <a:lstStyle/>
+          <a:p>
+            <a:pPr algn="l"/>
+            <a:r>
+              <a:rPr sz="2200" b="1" i="0">
+                <a:solidFill>
+                  <a:srgbClr val="0369A1"/>
+                </a:solidFill>
+                <a:latin typeface="Poppins"/>
+              </a:rPr>
+              <a:t>M2</a:t>
+            </a:r>
+          </a:p>
+        </p:txBody>
+      </p:sp>
+      <p:pic>
+        <p:nvPicPr>
+          <p:cNvPr id="167" name="Picture 166" descr="image.png"/>
+          <p:cNvPicPr>
+            <a:picLocks noChangeAspect="1"/>
+          </p:cNvPicPr>
+          <p:nvPr/>
+        </p:nvPicPr>
+        <p:blipFill>
+          <a:blip r:embed="rId12"/>
+          <a:stretch>
+            <a:fillRect/>
+          </a:stretch>
+        </p:blipFill>
+        <p:spPr>
+          <a:xfrm>
+            <a:off x="3474720" y="1581912"/>
+            <a:ext cx="155448" cy="155448"/>
+          </a:xfrm>
+          <a:prstGeom prst="rect">
+            <a:avLst/>
+          </a:prstGeom>
+        </p:spPr>
+      </p:pic>
+      <p:sp>
+        <p:nvSpPr>
+          <p:cNvPr id="168" name="TextBox 167"/>
+          <p:cNvSpPr txBox="1"/>
+          <p:nvPr/>
+        </p:nvSpPr>
+        <p:spPr>
+          <a:xfrm>
+            <a:off x="3712464" y="1554480"/>
+            <a:ext cx="2231136" cy="219456"/>
+          </a:xfrm>
+          <a:prstGeom prst="rect">
+            <a:avLst/>
+          </a:prstGeom>
+          <a:noFill/>
+        </p:spPr>
+        <p:txBody>
+          <a:bodyPr wrap="square" anchor="t" lIns="0" rIns="0" tIns="0" bIns="0">
+            <a:spAutoFit/>
+          </a:bodyPr>
+          <a:lstStyle/>
+          <a:p>
+            <a:pPr algn="l"/>
+            <a:r>
+              <a:rPr sz="1060" b="1" i="0">
+                <a:solidFill>
+                  <a:srgbClr val="0F172A"/>
+                </a:solidFill>
+                <a:latin typeface="DM Sans"/>
+              </a:rPr>
+              <a:t>Nov 2026 · Fabrication</a:t>
+            </a:r>
+          </a:p>
+        </p:txBody>
+      </p:sp>
+      <p:sp>
+        <p:nvSpPr>
+          <p:cNvPr id="169" name="TextBox 168"/>
+          <p:cNvSpPr txBox="1"/>
+          <p:nvPr/>
+        </p:nvSpPr>
+        <p:spPr>
+          <a:xfrm>
+            <a:off x="3474720" y="1883664"/>
+            <a:ext cx="2432304" cy="2011680"/>
+          </a:xfrm>
+          <a:prstGeom prst="rect">
+            <a:avLst/>
+          </a:prstGeom>
+          <a:noFill/>
+        </p:spPr>
+        <p:txBody>
+          <a:bodyPr wrap="square" anchor="t" lIns="0" rIns="0" tIns="0" bIns="0">
+            <a:spAutoFit/>
+          </a:bodyPr>
+          <a:lstStyle/>
+          <a:p>
+            <a:pPr marL="155448" indent="-155448">
+              <a:spcAft>
+                <a:spcPts val="800"/>
+              </a:spcAft>
+              <a:buClr>
+                <a:srgbClr val="059669"/>
+              </a:buClr>
+              <a:buSzPct val="110000"/>
+              <a:buFont typeface="Arial"/>
+              <a:buChar char="▪"/>
+            </a:pPr>
+            <a:r>
+              <a:rPr sz="1000" b="0" i="0">
+                <a:solidFill>
+                  <a:srgbClr val="334155"/>
+                </a:solidFill>
+                <a:latin typeface="DM Sans"/>
+              </a:rPr>
+              <a:t>PETG print of enclosure + pod on the college printer</a:t>
+            </a:r>
+          </a:p>
+          <a:p>
+            <a:pPr marL="155448" indent="-155448">
+              <a:spcAft>
+                <a:spcPts val="800"/>
+              </a:spcAft>
+              <a:buClr>
+                <a:srgbClr val="059669"/>
+              </a:buClr>
+              <a:buSzPct val="110000"/>
+              <a:buFont typeface="Arial"/>
+              <a:buChar char="▪"/>
+            </a:pPr>
+            <a:r>
+              <a:rPr sz="1000" b="0" i="0">
+                <a:solidFill>
+                  <a:srgbClr val="334155"/>
+                </a:solidFill>
+                <a:latin typeface="DM Sans"/>
+              </a:rPr>
+              <a:t>Firmware: timed acquisition + health flags</a:t>
+            </a:r>
+          </a:p>
+          <a:p>
+            <a:pPr marL="155448" indent="-155448">
+              <a:spcAft>
+                <a:spcPts val="800"/>
+              </a:spcAft>
+              <a:buClr>
+                <a:srgbClr val="059669"/>
+              </a:buClr>
+              <a:buSzPct val="110000"/>
+              <a:buFont typeface="Arial"/>
+              <a:buChar char="▪"/>
+            </a:pPr>
+            <a:r>
+              <a:rPr sz="1000" b="0" i="0">
+                <a:solidFill>
+                  <a:srgbClr val="334155"/>
+                </a:solidFill>
+                <a:latin typeface="DM Sans"/>
+              </a:rPr>
+              <a:t>Laptop app v0; electrode trials on team members</a:t>
+            </a:r>
+          </a:p>
+        </p:txBody>
+      </p:sp>
+      <p:sp>
+        <p:nvSpPr>
+          <p:cNvPr id="170" name="Rounded Rectangle 169"/>
+          <p:cNvSpPr/>
+          <p:nvPr/>
+        </p:nvSpPr>
+        <p:spPr>
+          <a:xfrm>
+            <a:off x="6163056" y="932688"/>
+            <a:ext cx="2679192" cy="3017520"/>
+          </a:xfrm>
+          <a:prstGeom prst="roundRect">
+            <a:avLst>
+              <a:gd name="adj" fmla="val 6000"/>
+            </a:avLst>
+          </a:prstGeom>
+          <a:solidFill>
+            <a:srgbClr val="F0FDF4"/>
+          </a:solidFill>
+          <a:ln w="9525">
+            <a:solidFill>
+              <a:srgbClr val="BBF7D0"/>
+            </a:solidFill>
+          </a:ln>
+          <a:effectLst/>
+        </p:spPr>
+        <p:style>
+          <a:lnRef idx="1">
+            <a:schemeClr val="accent1"/>
+          </a:lnRef>
+          <a:fillRef idx="3">
+            <a:schemeClr val="accent1"/>
+          </a:fillRef>
+          <a:effectRef idx="2">
+            <a:schemeClr val="accent1"/>
+          </a:effectRef>
+          <a:fontRef idx="minor">
+            <a:schemeClr val="lt1"/>
+          </a:fontRef>
+        </p:style>
+        <p:txBody>
+          <a:bodyPr rtlCol="0" anchor="ctr"/>
+          <a:lstStyle/>
+          <a:p/>
+        </p:txBody>
+      </p:sp>
+      <p:sp>
+        <p:nvSpPr>
+          <p:cNvPr id="171" name="TextBox 170"/>
+          <p:cNvSpPr txBox="1"/>
+          <p:nvPr/>
+        </p:nvSpPr>
+        <p:spPr>
+          <a:xfrm>
+            <a:off x="6309360" y="1024128"/>
+            <a:ext cx="2377440" cy="457200"/>
+          </a:xfrm>
+          <a:prstGeom prst="rect">
+            <a:avLst/>
+          </a:prstGeom>
+          <a:noFill/>
+        </p:spPr>
+        <p:txBody>
+          <a:bodyPr wrap="square" anchor="t" lIns="0" rIns="0" tIns="0" bIns="0">
+            <a:spAutoFit/>
+          </a:bodyPr>
+          <a:lstStyle/>
+          <a:p>
+            <a:pPr algn="l"/>
+            <a:r>
+              <a:rPr sz="2200" b="1" i="0">
+                <a:solidFill>
+                  <a:srgbClr val="0369A1"/>
+                </a:solidFill>
+                <a:latin typeface="Poppins"/>
+              </a:rPr>
+              <a:t>M3</a:t>
+            </a:r>
+          </a:p>
+        </p:txBody>
+      </p:sp>
+      <p:pic>
+        <p:nvPicPr>
+          <p:cNvPr id="172" name="Picture 171" descr="image.png"/>
+          <p:cNvPicPr>
+            <a:picLocks noChangeAspect="1"/>
+          </p:cNvPicPr>
+          <p:nvPr/>
+        </p:nvPicPr>
+        <p:blipFill>
+          <a:blip r:embed="rId12"/>
+          <a:stretch>
+            <a:fillRect/>
+          </a:stretch>
+        </p:blipFill>
+        <p:spPr>
+          <a:xfrm>
+            <a:off x="6291072" y="1581912"/>
+            <a:ext cx="155448" cy="155448"/>
+          </a:xfrm>
+          <a:prstGeom prst="rect">
+            <a:avLst/>
+          </a:prstGeom>
+        </p:spPr>
+      </p:pic>
+      <p:sp>
+        <p:nvSpPr>
+          <p:cNvPr id="173" name="TextBox 172"/>
+          <p:cNvSpPr txBox="1"/>
+          <p:nvPr/>
+        </p:nvSpPr>
+        <p:spPr>
+          <a:xfrm>
+            <a:off x="6528816" y="1554480"/>
+            <a:ext cx="2231136" cy="219456"/>
+          </a:xfrm>
+          <a:prstGeom prst="rect">
+            <a:avLst/>
+          </a:prstGeom>
+          <a:noFill/>
+        </p:spPr>
+        <p:txBody>
+          <a:bodyPr wrap="square" anchor="t" lIns="0" rIns="0" tIns="0" bIns="0">
+            <a:spAutoFit/>
+          </a:bodyPr>
+          <a:lstStyle/>
+          <a:p>
+            <a:pPr algn="l"/>
+            <a:r>
+              <a:rPr sz="1060" b="1" i="0">
+                <a:solidFill>
+                  <a:srgbClr val="0F172A"/>
+                </a:solidFill>
+                <a:latin typeface="DM Sans"/>
+              </a:rPr>
+              <a:t>Dec 2026 · Integration</a:t>
+            </a:r>
+          </a:p>
+        </p:txBody>
+      </p:sp>
+      <p:sp>
+        <p:nvSpPr>
+          <p:cNvPr id="174" name="TextBox 173"/>
+          <p:cNvSpPr txBox="1"/>
+          <p:nvPr/>
+        </p:nvSpPr>
+        <p:spPr>
+          <a:xfrm>
+            <a:off x="6291072" y="1883664"/>
+            <a:ext cx="2432304" cy="2011680"/>
+          </a:xfrm>
+          <a:prstGeom prst="rect">
+            <a:avLst/>
+          </a:prstGeom>
+          <a:noFill/>
+        </p:spPr>
+        <p:txBody>
+          <a:bodyPr wrap="square" anchor="t" lIns="0" rIns="0" tIns="0" bIns="0">
+            <a:spAutoFit/>
+          </a:bodyPr>
+          <a:lstStyle/>
+          <a:p>
+            <a:pPr marL="155448" indent="-155448">
+              <a:spcAft>
+                <a:spcPts val="800"/>
+              </a:spcAft>
+              <a:buClr>
+                <a:srgbClr val="059669"/>
+              </a:buClr>
+              <a:buSzPct val="110000"/>
+              <a:buFont typeface="Arial"/>
+              <a:buChar char="▪"/>
+            </a:pPr>
+            <a:r>
+              <a:rPr sz="1000" b="0" i="0">
+                <a:solidFill>
+                  <a:srgbClr val="334155"/>
+                </a:solidFill>
+                <a:latin typeface="DM Sans"/>
+              </a:rPr>
+              <a:t>Calibration routine and two-factor state machine</a:t>
+            </a:r>
+          </a:p>
+          <a:p>
+            <a:pPr marL="155448" indent="-155448">
+              <a:spcAft>
+                <a:spcPts val="800"/>
+              </a:spcAft>
+              <a:buClr>
+                <a:srgbClr val="059669"/>
+              </a:buClr>
+              <a:buSzPct val="110000"/>
+              <a:buFont typeface="Arial"/>
+              <a:buChar char="▪"/>
+            </a:pPr>
+            <a:r>
+              <a:rPr sz="1000" b="0" i="0">
+                <a:solidFill>
+                  <a:srgbClr val="334155"/>
+                </a:solidFill>
+                <a:latin typeface="DM Sans"/>
+              </a:rPr>
+              <a:t>ToF depth gating, IMU motion rejection</a:t>
+            </a:r>
+          </a:p>
+          <a:p>
+            <a:pPr marL="155448" indent="-155448">
+              <a:spcAft>
+                <a:spcPts val="800"/>
+              </a:spcAft>
+              <a:buClr>
+                <a:srgbClr val="059669"/>
+              </a:buClr>
+              <a:buSzPct val="110000"/>
+              <a:buFont typeface="Arial"/>
+              <a:buChar char="▪"/>
+            </a:pPr>
+            <a:r>
+              <a:rPr sz="1000" b="0" i="0">
+                <a:solidFill>
+                  <a:srgbClr val="334155"/>
+                </a:solidFill>
+                <a:latin typeface="DM Sans"/>
+              </a:rPr>
+              <a:t>DUALR3 fitted by an electrician and integrated</a:t>
+            </a:r>
+          </a:p>
+        </p:txBody>
+      </p:sp>
+      <p:sp>
+        <p:nvSpPr>
+          <p:cNvPr id="175" name="Rounded Rectangle 174"/>
+          <p:cNvSpPr/>
+          <p:nvPr/>
+        </p:nvSpPr>
+        <p:spPr>
+          <a:xfrm>
+            <a:off x="8979408" y="932688"/>
+            <a:ext cx="2679192" cy="3017520"/>
+          </a:xfrm>
+          <a:prstGeom prst="roundRect">
+            <a:avLst>
+              <a:gd name="adj" fmla="val 6000"/>
+            </a:avLst>
+          </a:prstGeom>
+          <a:solidFill>
+            <a:srgbClr val="F8FAFC"/>
+          </a:solidFill>
+          <a:ln w="9525">
+            <a:solidFill>
+              <a:srgbClr val="E2E8F0"/>
+            </a:solidFill>
+          </a:ln>
+          <a:effectLst/>
+        </p:spPr>
+        <p:style>
+          <a:lnRef idx="1">
+            <a:schemeClr val="accent1"/>
+          </a:lnRef>
+          <a:fillRef idx="3">
+            <a:schemeClr val="accent1"/>
+          </a:fillRef>
+          <a:effectRef idx="2">
+            <a:schemeClr val="accent1"/>
+          </a:effectRef>
+          <a:fontRef idx="minor">
+            <a:schemeClr val="lt1"/>
+          </a:fontRef>
+        </p:style>
+        <p:txBody>
+          <a:bodyPr rtlCol="0" anchor="ctr"/>
+          <a:lstStyle/>
+          <a:p/>
+        </p:txBody>
+      </p:sp>
+      <p:sp>
+        <p:nvSpPr>
+          <p:cNvPr id="176" name="TextBox 175"/>
+          <p:cNvSpPr txBox="1"/>
+          <p:nvPr/>
+        </p:nvSpPr>
+        <p:spPr>
+          <a:xfrm>
+            <a:off x="9125712" y="1024128"/>
+            <a:ext cx="2377440" cy="457200"/>
+          </a:xfrm>
+          <a:prstGeom prst="rect">
+            <a:avLst/>
+          </a:prstGeom>
+          <a:noFill/>
+        </p:spPr>
+        <p:txBody>
+          <a:bodyPr wrap="square" anchor="t" lIns="0" rIns="0" tIns="0" bIns="0">
+            <a:spAutoFit/>
+          </a:bodyPr>
+          <a:lstStyle/>
+          <a:p>
+            <a:pPr algn="l"/>
+            <a:r>
+              <a:rPr sz="2200" b="1" i="0">
+                <a:solidFill>
+                  <a:srgbClr val="0369A1"/>
+                </a:solidFill>
+                <a:latin typeface="Poppins"/>
+              </a:rPr>
+              <a:t>M4</a:t>
+            </a:r>
+          </a:p>
+        </p:txBody>
+      </p:sp>
+      <p:pic>
+        <p:nvPicPr>
+          <p:cNvPr id="177" name="Picture 176" descr="image.png"/>
+          <p:cNvPicPr>
+            <a:picLocks noChangeAspect="1"/>
+          </p:cNvPicPr>
+          <p:nvPr/>
+        </p:nvPicPr>
+        <p:blipFill>
+          <a:blip r:embed="rId12"/>
+          <a:stretch>
+            <a:fillRect/>
+          </a:stretch>
+        </p:blipFill>
+        <p:spPr>
+          <a:xfrm>
+            <a:off x="9107424" y="1581912"/>
+            <a:ext cx="155448" cy="155448"/>
+          </a:xfrm>
+          <a:prstGeom prst="rect">
+            <a:avLst/>
+          </a:prstGeom>
+        </p:spPr>
+      </p:pic>
+      <p:sp>
+        <p:nvSpPr>
+          <p:cNvPr id="178" name="TextBox 177"/>
+          <p:cNvSpPr txBox="1"/>
+          <p:nvPr/>
+        </p:nvSpPr>
+        <p:spPr>
+          <a:xfrm>
+            <a:off x="9345168" y="1554480"/>
+            <a:ext cx="2231136" cy="219456"/>
+          </a:xfrm>
+          <a:prstGeom prst="rect">
+            <a:avLst/>
+          </a:prstGeom>
+          <a:noFill/>
+        </p:spPr>
+        <p:txBody>
+          <a:bodyPr wrap="square" anchor="t" lIns="0" rIns="0" tIns="0" bIns="0">
+            <a:spAutoFit/>
+          </a:bodyPr>
+          <a:lstStyle/>
+          <a:p>
+            <a:pPr algn="l"/>
+            <a:r>
+              <a:rPr sz="1060" b="1" i="0">
+                <a:solidFill>
+                  <a:srgbClr val="0F172A"/>
+                </a:solidFill>
+                <a:latin typeface="DM Sans"/>
+              </a:rPr>
+              <a:t>Jan 2027 · Field demo</a:t>
+            </a:r>
+          </a:p>
+        </p:txBody>
+      </p:sp>
+      <p:sp>
+        <p:nvSpPr>
+          <p:cNvPr id="179" name="TextBox 178"/>
+          <p:cNvSpPr txBox="1"/>
+          <p:nvPr/>
+        </p:nvSpPr>
+        <p:spPr>
+          <a:xfrm>
+            <a:off x="9107424" y="1883664"/>
+            <a:ext cx="2432304" cy="2011680"/>
+          </a:xfrm>
+          <a:prstGeom prst="rect">
+            <a:avLst/>
+          </a:prstGeom>
+          <a:noFill/>
+        </p:spPr>
+        <p:txBody>
+          <a:bodyPr wrap="square" anchor="t" lIns="0" rIns="0" tIns="0" bIns="0">
+            <a:spAutoFit/>
+          </a:bodyPr>
+          <a:lstStyle/>
+          <a:p>
+            <a:pPr marL="155448" indent="-155448">
+              <a:spcAft>
+                <a:spcPts val="800"/>
+              </a:spcAft>
+              <a:buClr>
+                <a:srgbClr val="059669"/>
+              </a:buClr>
+              <a:buSzPct val="110000"/>
+              <a:buFont typeface="Arial"/>
+              <a:buChar char="▪"/>
+            </a:pPr>
+            <a:r>
+              <a:rPr sz="1000" b="0" i="0">
+                <a:solidFill>
+                  <a:srgbClr val="334155"/>
+                </a:solidFill>
+                <a:latin typeface="DM Sans"/>
+              </a:rPr>
+              <a:t>Timed trials: accuracy, false triggers, latency</a:t>
+            </a:r>
+          </a:p>
+          <a:p>
+            <a:pPr marL="155448" indent="-155448">
+              <a:spcAft>
+                <a:spcPts val="800"/>
+              </a:spcAft>
+              <a:buClr>
+                <a:srgbClr val="059669"/>
+              </a:buClr>
+              <a:buSzPct val="110000"/>
+              <a:buFont typeface="Arial"/>
+              <a:buChar char="▪"/>
+            </a:pPr>
+            <a:r>
+              <a:rPr sz="1000" b="0" i="0">
+                <a:solidFill>
+                  <a:srgbClr val="334155"/>
+                </a:solidFill>
+                <a:latin typeface="DM Sans"/>
+              </a:rPr>
+              <a:t>Stage 2 → 3 report with measured data</a:t>
+            </a:r>
+          </a:p>
+          <a:p>
+            <a:pPr marL="155448" indent="-155448">
+              <a:spcAft>
+                <a:spcPts val="800"/>
+              </a:spcAft>
+              <a:buClr>
+                <a:srgbClr val="059669"/>
+              </a:buClr>
+              <a:buSzPct val="110000"/>
+              <a:buFont typeface="Arial"/>
+              <a:buChar char="▪"/>
+            </a:pPr>
+            <a:r>
+              <a:rPr sz="1000" b="0" i="0">
+                <a:solidFill>
+                  <a:srgbClr val="334155"/>
+                </a:solidFill>
+                <a:latin typeface="DM Sans"/>
+              </a:rPr>
+              <a:t>Demo rehearsal with the faculty guide</a:t>
+            </a:r>
+          </a:p>
+        </p:txBody>
+      </p:sp>
+      <p:sp>
+        <p:nvSpPr>
+          <p:cNvPr id="180" name="Rounded Rectangle 179"/>
+          <p:cNvSpPr/>
+          <p:nvPr/>
+        </p:nvSpPr>
+        <p:spPr>
+          <a:xfrm>
+            <a:off x="530352" y="4114800"/>
+            <a:ext cx="11128248" cy="1444752"/>
+          </a:xfrm>
+          <a:prstGeom prst="roundRect">
+            <a:avLst>
+              <a:gd name="adj" fmla="val 6000"/>
+            </a:avLst>
+          </a:prstGeom>
+          <a:solidFill>
+            <a:srgbClr val="F8FAFC"/>
+          </a:solidFill>
+          <a:ln w="9525">
+            <a:solidFill>
+              <a:srgbClr val="E2E8F0"/>
             </a:solidFill>
           </a:ln>
           <a:effectLst/>
@@ -22707,7 +27038,7 @@
       </p:sp>
       <p:pic>
         <p:nvPicPr>
-          <p:cNvPr id="161" name="Picture 160" descr="image.png"/>
+          <p:cNvPr id="181" name="Picture 180" descr="image.png"/>
           <p:cNvPicPr>
             <a:picLocks noChangeAspect="1"/>
           </p:cNvPicPr>
@@ -22721,7 +27052,7 @@
         </p:blipFill>
         <p:spPr>
           <a:xfrm>
-            <a:off x="685800" y="1069848"/>
+            <a:off x="694944" y="4233672"/>
             <a:ext cx="155448" cy="155448"/>
           </a:xfrm>
           <a:prstGeom prst="rect">
@@ -22731,676 +27062,13 @@
       </p:pic>
       <p:sp>
         <p:nvSpPr>
-          <p:cNvPr id="162" name="TextBox 161"/>
+          <p:cNvPr id="182" name="TextBox 181"/>
           <p:cNvSpPr txBox="1"/>
           <p:nvPr/>
         </p:nvSpPr>
         <p:spPr>
           <a:xfrm>
-            <a:off x="923544" y="1042415"/>
-            <a:ext cx="3099815" cy="219456"/>
-          </a:xfrm>
-          <a:prstGeom prst="rect">
-            <a:avLst/>
-          </a:prstGeom>
-          <a:noFill/>
-        </p:spPr>
-        <p:txBody>
-          <a:bodyPr wrap="square" anchor="t" lIns="0" rIns="0" tIns="0" bIns="0">
-            <a:spAutoFit/>
-          </a:bodyPr>
-          <a:lstStyle/>
-          <a:p>
-            <a:pPr algn="l"/>
-            <a:r>
-              <a:rPr sz="1060" b="1" i="0">
-                <a:solidFill>
-                  <a:srgbClr val="0F172A"/>
-                </a:solidFill>
-                <a:latin typeface="DM Sans"/>
-              </a:rPr>
-              <a:t>Bottleneck: EOG drift vs vergence</a:t>
-            </a:r>
-          </a:p>
-        </p:txBody>
-      </p:sp>
-      <p:sp>
-        <p:nvSpPr>
-          <p:cNvPr id="163" name="TextBox 162"/>
-          <p:cNvSpPr txBox="1"/>
-          <p:nvPr/>
-        </p:nvSpPr>
-        <p:spPr>
-          <a:xfrm>
-            <a:off x="685800" y="1389888"/>
-            <a:ext cx="3310128" cy="2788920"/>
-          </a:xfrm>
-          <a:prstGeom prst="rect">
-            <a:avLst/>
-          </a:prstGeom>
-          <a:noFill/>
-        </p:spPr>
-        <p:txBody>
-          <a:bodyPr wrap="square" anchor="t" lIns="0" rIns="0" tIns="0" bIns="0">
-            <a:spAutoFit/>
-          </a:bodyPr>
-          <a:lstStyle/>
-          <a:p>
-            <a:pPr marL="155448" indent="-155448">
-              <a:spcAft>
-                <a:spcPts val="900"/>
-              </a:spcAft>
-              <a:buClr>
-                <a:srgbClr val="059669"/>
-              </a:buClr>
-              <a:buSzPct val="110000"/>
-              <a:buFont typeface="Arial"/>
-              <a:buChar char="▪"/>
-            </a:pPr>
-            <a:r>
-              <a:rPr sz="1040" b="1" i="0">
-                <a:solidFill>
-                  <a:srgbClr val="334155"/>
-                </a:solidFill>
-                <a:latin typeface="DM Sans"/>
-              </a:rPr>
-              <a:t>Risk: </a:t>
-            </a:r>
-            <a:r>
-              <a:rPr sz="1040" b="0" i="0">
-                <a:solidFill>
-                  <a:srgbClr val="334155"/>
-                </a:solidFill>
-                <a:latin typeface="DM Sans"/>
-              </a:rPr>
-              <a:t>the near/far vergence change is small next to slow electrode drift; an aggressive high-pass filter would erase it along with the drift.</a:t>
-            </a:r>
-          </a:p>
-          <a:p>
-            <a:pPr marL="155448" indent="-155448">
-              <a:spcAft>
-                <a:spcPts val="900"/>
-              </a:spcAft>
-              <a:buClr>
-                <a:srgbClr val="059669"/>
-              </a:buClr>
-              <a:buSzPct val="110000"/>
-              <a:buFont typeface="Arial"/>
-              <a:buChar char="▪"/>
-            </a:pPr>
-            <a:r>
-              <a:rPr sz="1040" b="1" i="0">
-                <a:solidFill>
-                  <a:srgbClr val="334155"/>
-                </a:solidFill>
-                <a:latin typeface="DM Sans"/>
-              </a:rPr>
-              <a:t>Mitigation: </a:t>
-            </a:r>
-            <a:r>
-              <a:rPr sz="1040" b="0" i="0">
-                <a:solidFill>
-                  <a:srgbClr val="334155"/>
-                </a:solidFill>
-                <a:latin typeface="DM Sans"/>
-              </a:rPr>
-              <a:t>keep the low-frequency path, remove drift in software with a per-trial baseline, use discrete near/far targets (as VergeIO did) and require ToF depth as second evidence.</a:t>
-            </a:r>
-          </a:p>
-          <a:p>
-            <a:pPr marL="155448" indent="-155448">
-              <a:spcAft>
-                <a:spcPts val="900"/>
-              </a:spcAft>
-              <a:buClr>
-                <a:srgbClr val="059669"/>
-              </a:buClr>
-              <a:buSzPct val="110000"/>
-              <a:buFont typeface="Arial"/>
-              <a:buChar char="▪"/>
-            </a:pPr>
-            <a:r>
-              <a:rPr sz="1040" b="1" i="0">
-                <a:solidFill>
-                  <a:srgbClr val="334155"/>
-                </a:solidFill>
-                <a:latin typeface="DM Sans"/>
-              </a:rPr>
-              <a:t>Bench test: </a:t>
-            </a:r>
-            <a:r>
-              <a:rPr sz="1040" b="0" i="0">
-                <a:solidFill>
-                  <a:srgbClr val="334155"/>
-                </a:solidFill>
-                <a:latin typeface="DM Sans"/>
-              </a:rPr>
-              <a:t>10-minute fixed-gaze recordings at both depths.</a:t>
-            </a:r>
-          </a:p>
-        </p:txBody>
-      </p:sp>
-      <p:sp>
-        <p:nvSpPr>
-          <p:cNvPr id="164" name="Rounded Rectangle 163"/>
-          <p:cNvSpPr/>
-          <p:nvPr/>
-        </p:nvSpPr>
-        <p:spPr>
-          <a:xfrm>
-            <a:off x="4288536" y="932688"/>
-            <a:ext cx="3611880" cy="3310128"/>
-          </a:xfrm>
-          <a:prstGeom prst="roundRect">
-            <a:avLst>
-              <a:gd name="adj" fmla="val 6000"/>
-            </a:avLst>
-          </a:prstGeom>
-          <a:solidFill>
-            <a:srgbClr val="F8FAFC"/>
-          </a:solidFill>
-          <a:ln w="9525">
-            <a:solidFill>
-              <a:srgbClr val="E2E8F0"/>
-            </a:solidFill>
-          </a:ln>
-          <a:effectLst/>
-        </p:spPr>
-        <p:style>
-          <a:lnRef idx="1">
-            <a:schemeClr val="accent1"/>
-          </a:lnRef>
-          <a:fillRef idx="3">
-            <a:schemeClr val="accent1"/>
-          </a:fillRef>
-          <a:effectRef idx="2">
-            <a:schemeClr val="accent1"/>
-          </a:effectRef>
-          <a:fontRef idx="minor">
-            <a:schemeClr val="lt1"/>
-          </a:fontRef>
-        </p:style>
-        <p:txBody>
-          <a:bodyPr rtlCol="0" anchor="ctr"/>
-          <a:lstStyle/>
-          <a:p/>
-        </p:txBody>
-      </p:sp>
-      <p:pic>
-        <p:nvPicPr>
-          <p:cNvPr id="165" name="Picture 164" descr="image.png"/>
-          <p:cNvPicPr>
-            <a:picLocks noChangeAspect="1"/>
-          </p:cNvPicPr>
-          <p:nvPr/>
-        </p:nvPicPr>
-        <p:blipFill>
-          <a:blip r:embed="rId12"/>
-          <a:stretch>
-            <a:fillRect/>
-          </a:stretch>
-        </p:blipFill>
-        <p:spPr>
-          <a:xfrm>
-            <a:off x="4443984" y="1069848"/>
-            <a:ext cx="155448" cy="155448"/>
-          </a:xfrm>
-          <a:prstGeom prst="rect">
-            <a:avLst/>
-          </a:prstGeom>
-        </p:spPr>
-      </p:pic>
-      <p:sp>
-        <p:nvSpPr>
-          <p:cNvPr id="166" name="TextBox 165"/>
-          <p:cNvSpPr txBox="1"/>
-          <p:nvPr/>
-        </p:nvSpPr>
-        <p:spPr>
-          <a:xfrm>
-            <a:off x="4681728" y="1042415"/>
-            <a:ext cx="3099815" cy="219456"/>
-          </a:xfrm>
-          <a:prstGeom prst="rect">
-            <a:avLst/>
-          </a:prstGeom>
-          <a:noFill/>
-        </p:spPr>
-        <p:txBody>
-          <a:bodyPr wrap="square" anchor="t" lIns="0" rIns="0" tIns="0" bIns="0">
-            <a:spAutoFit/>
-          </a:bodyPr>
-          <a:lstStyle/>
-          <a:p>
-            <a:pPr algn="l"/>
-            <a:r>
-              <a:rPr sz="1060" b="1" i="0">
-                <a:solidFill>
-                  <a:srgbClr val="0F172A"/>
-                </a:solidFill>
-                <a:latin typeface="DM Sans"/>
-              </a:rPr>
-              <a:t>Bottleneck: ESP32 ADC quality</a:t>
-            </a:r>
-          </a:p>
-        </p:txBody>
-      </p:sp>
-      <p:sp>
-        <p:nvSpPr>
-          <p:cNvPr id="167" name="TextBox 166"/>
-          <p:cNvSpPr txBox="1"/>
-          <p:nvPr/>
-        </p:nvSpPr>
-        <p:spPr>
-          <a:xfrm>
-            <a:off x="4443984" y="1389888"/>
-            <a:ext cx="3310128" cy="2788920"/>
-          </a:xfrm>
-          <a:prstGeom prst="rect">
-            <a:avLst/>
-          </a:prstGeom>
-          <a:noFill/>
-        </p:spPr>
-        <p:txBody>
-          <a:bodyPr wrap="square" anchor="t" lIns="0" rIns="0" tIns="0" bIns="0">
-            <a:spAutoFit/>
-          </a:bodyPr>
-          <a:lstStyle/>
-          <a:p>
-            <a:pPr marL="155448" indent="-155448">
-              <a:spcAft>
-                <a:spcPts val="900"/>
-              </a:spcAft>
-              <a:buClr>
-                <a:srgbClr val="059669"/>
-              </a:buClr>
-              <a:buSzPct val="110000"/>
-              <a:buFont typeface="Arial"/>
-              <a:buChar char="▪"/>
-            </a:pPr>
-            <a:r>
-              <a:rPr sz="1040" b="1" i="0">
-                <a:solidFill>
-                  <a:srgbClr val="334155"/>
-                </a:solidFill>
-                <a:latin typeface="DM Sans"/>
-              </a:rPr>
-              <a:t>Risk: </a:t>
-            </a:r>
-            <a:r>
-              <a:rPr sz="1040" b="0" i="0">
-                <a:solidFill>
-                  <a:srgbClr val="334155"/>
-                </a:solidFill>
-                <a:latin typeface="DM Sans"/>
-              </a:rPr>
-              <a:t>the ESP32 ADC is non-linear near its range limits and noisy; ADC2 is unavailable while Wi-Fi/Bluetooth run.</a:t>
-            </a:r>
-          </a:p>
-          <a:p>
-            <a:pPr marL="155448" indent="-155448">
-              <a:spcAft>
-                <a:spcPts val="900"/>
-              </a:spcAft>
-              <a:buClr>
-                <a:srgbClr val="059669"/>
-              </a:buClr>
-              <a:buSzPct val="110000"/>
-              <a:buFont typeface="Arial"/>
-              <a:buChar char="▪"/>
-            </a:pPr>
-            <a:r>
-              <a:rPr sz="1040" b="1" i="0">
-                <a:solidFill>
-                  <a:srgbClr val="334155"/>
-                </a:solidFill>
-                <a:latin typeface="DM Sans"/>
-              </a:rPr>
-              <a:t>Mitigation: </a:t>
-            </a:r>
-            <a:r>
-              <a:rPr sz="1040" b="0" i="0">
-                <a:solidFill>
-                  <a:srgbClr val="334155"/>
-                </a:solidFill>
-                <a:latin typeface="DM Sans"/>
-              </a:rPr>
-              <a:t>ADC1 only, linear band, RC anti-alias, oversampling, Espressif calibration API.</a:t>
-            </a:r>
-          </a:p>
-          <a:p>
-            <a:pPr marL="155448" indent="-155448">
-              <a:spcAft>
-                <a:spcPts val="900"/>
-              </a:spcAft>
-              <a:buClr>
-                <a:srgbClr val="059669"/>
-              </a:buClr>
-              <a:buSzPct val="110000"/>
-              <a:buFont typeface="Arial"/>
-              <a:buChar char="▪"/>
-            </a:pPr>
-            <a:r>
-              <a:rPr sz="1040" b="1" i="0">
-                <a:solidFill>
-                  <a:srgbClr val="334155"/>
-                </a:solidFill>
-                <a:latin typeface="DM Sans"/>
-              </a:rPr>
-              <a:t>Fallback: </a:t>
-            </a:r>
-            <a:r>
-              <a:rPr sz="1040" b="0" i="0">
-                <a:solidFill>
-                  <a:srgbClr val="334155"/>
-                </a:solidFill>
-                <a:latin typeface="DM Sans"/>
-              </a:rPr>
-              <a:t>an external I2C ADC funded from the ₹2.9k headroom, only if the sweep test fails.</a:t>
-            </a:r>
-          </a:p>
-        </p:txBody>
-      </p:sp>
-      <p:sp>
-        <p:nvSpPr>
-          <p:cNvPr id="168" name="Rounded Rectangle 167"/>
-          <p:cNvSpPr/>
-          <p:nvPr/>
-        </p:nvSpPr>
-        <p:spPr>
-          <a:xfrm>
-            <a:off x="8046720" y="932688"/>
-            <a:ext cx="3611880" cy="3310128"/>
-          </a:xfrm>
-          <a:prstGeom prst="roundRect">
-            <a:avLst>
-              <a:gd name="adj" fmla="val 6000"/>
-            </a:avLst>
-          </a:prstGeom>
-          <a:solidFill>
-            <a:srgbClr val="F0FDF4"/>
-          </a:solidFill>
-          <a:ln w="9525">
-            <a:solidFill>
-              <a:srgbClr val="BBF7D0"/>
-            </a:solidFill>
-          </a:ln>
-          <a:effectLst/>
-        </p:spPr>
-        <p:style>
-          <a:lnRef idx="1">
-            <a:schemeClr val="accent1"/>
-          </a:lnRef>
-          <a:fillRef idx="3">
-            <a:schemeClr val="accent1"/>
-          </a:fillRef>
-          <a:effectRef idx="2">
-            <a:schemeClr val="accent1"/>
-          </a:effectRef>
-          <a:fontRef idx="minor">
-            <a:schemeClr val="lt1"/>
-          </a:fontRef>
-        </p:style>
-        <p:txBody>
-          <a:bodyPr rtlCol="0" anchor="ctr"/>
-          <a:lstStyle/>
-          <a:p/>
-        </p:txBody>
-      </p:sp>
-      <p:pic>
-        <p:nvPicPr>
-          <p:cNvPr id="169" name="Picture 168" descr="image.png"/>
-          <p:cNvPicPr>
-            <a:picLocks noChangeAspect="1"/>
-          </p:cNvPicPr>
-          <p:nvPr/>
-        </p:nvPicPr>
-        <p:blipFill>
-          <a:blip r:embed="rId12"/>
-          <a:stretch>
-            <a:fillRect/>
-          </a:stretch>
-        </p:blipFill>
-        <p:spPr>
-          <a:xfrm>
-            <a:off x="8202168" y="1069848"/>
-            <a:ext cx="155448" cy="155448"/>
-          </a:xfrm>
-          <a:prstGeom prst="rect">
-            <a:avLst/>
-          </a:prstGeom>
-        </p:spPr>
-      </p:pic>
-      <p:sp>
-        <p:nvSpPr>
-          <p:cNvPr id="170" name="TextBox 169"/>
-          <p:cNvSpPr txBox="1"/>
-          <p:nvPr/>
-        </p:nvSpPr>
-        <p:spPr>
-          <a:xfrm>
-            <a:off x="8439912" y="1042415"/>
-            <a:ext cx="3099815" cy="219456"/>
-          </a:xfrm>
-          <a:prstGeom prst="rect">
-            <a:avLst/>
-          </a:prstGeom>
-          <a:noFill/>
-        </p:spPr>
-        <p:txBody>
-          <a:bodyPr wrap="square" anchor="t" lIns="0" rIns="0" tIns="0" bIns="0">
-            <a:spAutoFit/>
-          </a:bodyPr>
-          <a:lstStyle/>
-          <a:p>
-            <a:pPr algn="l"/>
-            <a:r>
-              <a:rPr sz="1060" b="1" i="0">
-                <a:solidFill>
-                  <a:srgbClr val="0F172A"/>
-                </a:solidFill>
-                <a:latin typeface="DM Sans"/>
-              </a:rPr>
-              <a:t>Bottleneck: false jaw-clench triggers</a:t>
-            </a:r>
-          </a:p>
-        </p:txBody>
-      </p:sp>
-      <p:sp>
-        <p:nvSpPr>
-          <p:cNvPr id="171" name="TextBox 170"/>
-          <p:cNvSpPr txBox="1"/>
-          <p:nvPr/>
-        </p:nvSpPr>
-        <p:spPr>
-          <a:xfrm>
-            <a:off x="8202168" y="1389888"/>
-            <a:ext cx="3310128" cy="2788920"/>
-          </a:xfrm>
-          <a:prstGeom prst="rect">
-            <a:avLst/>
-          </a:prstGeom>
-          <a:noFill/>
-        </p:spPr>
-        <p:txBody>
-          <a:bodyPr wrap="square" anchor="t" lIns="0" rIns="0" tIns="0" bIns="0">
-            <a:spAutoFit/>
-          </a:bodyPr>
-          <a:lstStyle/>
-          <a:p>
-            <a:pPr marL="155448" indent="-155448">
-              <a:spcAft>
-                <a:spcPts val="900"/>
-              </a:spcAft>
-              <a:buClr>
-                <a:srgbClr val="059669"/>
-              </a:buClr>
-              <a:buSzPct val="110000"/>
-              <a:buFont typeface="Arial"/>
-              <a:buChar char="▪"/>
-            </a:pPr>
-            <a:r>
-              <a:rPr sz="1040" b="1" i="0">
-                <a:solidFill>
-                  <a:srgbClr val="334155"/>
-                </a:solidFill>
-                <a:latin typeface="DM Sans"/>
-              </a:rPr>
-              <a:t>Risk: </a:t>
-            </a:r>
-            <a:r>
-              <a:rPr sz="1040" b="0" i="0">
-                <a:solidFill>
-                  <a:srgbClr val="334155"/>
-                </a:solidFill>
-                <a:latin typeface="DM Sans"/>
-              </a:rPr>
-              <a:t>chewing, talking and swallowing all produce masseter EMG and could look like a confirmation.</a:t>
-            </a:r>
-          </a:p>
-          <a:p>
-            <a:pPr marL="155448" indent="-155448">
-              <a:spcAft>
-                <a:spcPts val="900"/>
-              </a:spcAft>
-              <a:buClr>
-                <a:srgbClr val="059669"/>
-              </a:buClr>
-              <a:buSzPct val="110000"/>
-              <a:buFont typeface="Arial"/>
-              <a:buChar char="▪"/>
-            </a:pPr>
-            <a:r>
-              <a:rPr sz="1040" b="1" i="0">
-                <a:solidFill>
-                  <a:srgbClr val="334155"/>
-                </a:solidFill>
-                <a:latin typeface="DM Sans"/>
-              </a:rPr>
-              <a:t>Mitigation: </a:t>
-            </a:r>
-            <a:r>
-              <a:rPr sz="1040" b="0" i="0">
-                <a:solidFill>
-                  <a:srgbClr val="334155"/>
-                </a:solidFill>
-                <a:latin typeface="DM Sans"/>
-              </a:rPr>
-              <a:t>clench must be held for a set time inside a candidate window; per-user threshold; refractory period.</a:t>
-            </a:r>
-          </a:p>
-          <a:p>
-            <a:pPr marL="155448" indent="-155448">
-              <a:spcAft>
-                <a:spcPts val="900"/>
-              </a:spcAft>
-              <a:buClr>
-                <a:srgbClr val="059669"/>
-              </a:buClr>
-              <a:buSzPct val="110000"/>
-              <a:buFont typeface="Arial"/>
-              <a:buChar char="▪"/>
-            </a:pPr>
-            <a:r>
-              <a:rPr sz="1040" b="1" i="0">
-                <a:solidFill>
-                  <a:srgbClr val="334155"/>
-                </a:solidFill>
-                <a:latin typeface="DM Sans"/>
-              </a:rPr>
-              <a:t>Bench test: </a:t>
-            </a:r>
-            <a:r>
-              <a:rPr sz="1040" b="0" i="0">
-                <a:solidFill>
-                  <a:srgbClr val="334155"/>
-                </a:solidFill>
-                <a:latin typeface="DM Sans"/>
-              </a:rPr>
-              <a:t>scripted chew / talk / rest sessions to count false triggers.</a:t>
-            </a:r>
-          </a:p>
-        </p:txBody>
-      </p:sp>
-      <p:sp>
-        <p:nvSpPr>
-          <p:cNvPr id="172" name="Rounded Rectangle 171"/>
-          <p:cNvSpPr/>
-          <p:nvPr/>
-        </p:nvSpPr>
-        <p:spPr>
-          <a:xfrm>
-            <a:off x="530352" y="4389120"/>
-            <a:ext cx="11128248" cy="1170432"/>
-          </a:xfrm>
-          <a:prstGeom prst="roundRect">
-            <a:avLst>
-              <a:gd name="adj" fmla="val 6000"/>
-            </a:avLst>
-          </a:prstGeom>
-          <a:solidFill>
-            <a:srgbClr val="F8FAFC"/>
-          </a:solidFill>
-          <a:ln w="9525">
-            <a:solidFill>
-              <a:srgbClr val="E2E8F0"/>
-            </a:solidFill>
-          </a:ln>
-          <a:effectLst/>
-        </p:spPr>
-        <p:style>
-          <a:lnRef idx="1">
-            <a:schemeClr val="accent1"/>
-          </a:lnRef>
-          <a:fillRef idx="3">
-            <a:schemeClr val="accent1"/>
-          </a:fillRef>
-          <a:effectRef idx="2">
-            <a:schemeClr val="accent1"/>
-          </a:effectRef>
-          <a:fontRef idx="minor">
-            <a:schemeClr val="lt1"/>
-          </a:fontRef>
-        </p:style>
-        <p:txBody>
-          <a:bodyPr rtlCol="0" anchor="ctr"/>
-          <a:lstStyle/>
-          <a:p/>
-        </p:txBody>
-      </p:sp>
-      <p:pic>
-        <p:nvPicPr>
-          <p:cNvPr id="173" name="Picture 172" descr="image.png"/>
-          <p:cNvPicPr>
-            <a:picLocks noChangeAspect="1"/>
-          </p:cNvPicPr>
-          <p:nvPr/>
-        </p:nvPicPr>
-        <p:blipFill>
-          <a:blip r:embed="rId12"/>
-          <a:stretch>
-            <a:fillRect/>
-          </a:stretch>
-        </p:blipFill>
-        <p:spPr>
-          <a:xfrm>
-            <a:off x="694944" y="4507992"/>
-            <a:ext cx="155448" cy="155448"/>
-          </a:xfrm>
-          <a:prstGeom prst="rect">
-            <a:avLst/>
-          </a:prstGeom>
-        </p:spPr>
-      </p:pic>
-      <p:sp>
-        <p:nvSpPr>
-          <p:cNvPr id="174" name="TextBox 173"/>
-          <p:cNvSpPr txBox="1"/>
-          <p:nvPr/>
-        </p:nvSpPr>
-        <p:spPr>
-          <a:xfrm>
-            <a:off x="932688" y="4480560"/>
+            <a:off x="932688" y="4206240"/>
             <a:ext cx="10552176" cy="219456"/>
           </a:xfrm>
           <a:prstGeom prst="rect">
@@ -23422,21 +27090,21 @@
                 </a:solidFill>
                 <a:latin typeface="DM Sans"/>
               </a:rPr>
-              <a:t>Other risks tracked</a:t>
+              <a:t>Stage 3 Target</a:t>
             </a:r>
           </a:p>
         </p:txBody>
       </p:sp>
       <p:sp>
         <p:nvSpPr>
-          <p:cNvPr id="175" name="TextBox 174"/>
+          <p:cNvPr id="183" name="TextBox 182"/>
           <p:cNvSpPr txBox="1"/>
           <p:nvPr/>
         </p:nvSpPr>
         <p:spPr>
           <a:xfrm>
-            <a:off x="694944" y="4773168"/>
-            <a:ext cx="10789920" cy="777240"/>
+            <a:off x="694944" y="4498848"/>
+            <a:ext cx="10789920" cy="1005840"/>
           </a:xfrm>
           <a:prstGeom prst="rect">
             <a:avLst/>
@@ -23451,7 +27119,7 @@
           <a:p>
             <a:pPr marL="155448" indent="-155448">
               <a:spcAft>
-                <a:spcPts val="400"/>
+                <a:spcPts val="600"/>
               </a:spcAft>
               <a:buClr>
                 <a:srgbClr val="059669"/>
@@ -23461,28 +27129,28 @@
               <a:buChar char="▪"/>
             </a:pPr>
             <a:r>
-              <a:rPr sz="960" b="1" i="0">
+              <a:rPr sz="1000" b="1" i="0">
                 <a:solidFill>
                   <a:srgbClr val="334155"/>
                 </a:solidFill>
                 <a:latin typeface="DM Sans"/>
               </a:rPr>
-              <a:t>ToF on dark / glossy targets: </a:t>
+              <a:t>Commitment: </a:t>
             </a:r>
             <a:r>
-              <a:rPr sz="960" b="0" i="0">
+              <a:rPr sz="1000" b="0" i="0">
                 <a:solidFill>
                   <a:srgbClr val="334155"/>
                 </a:solidFill>
                 <a:latin typeface="DM Sans"/>
               </a:rPr>
-              <a:t>test matte, dark and specular cards at set distances; report surface distance separately from inferred gaze depth.</a:t>
+              <a:t>a working prototype that switches a real fan and light from look + clench, ready for functional testing in Stage 3.</a:t>
             </a:r>
           </a:p>
           <a:p>
             <a:pPr marL="155448" indent="-155448">
               <a:spcAft>
-                <a:spcPts val="400"/>
+                <a:spcPts val="600"/>
               </a:spcAft>
               <a:buClr>
                 <a:srgbClr val="059669"/>
@@ -23492,29 +27160,29 @@
               <a:buChar char="▪"/>
             </a:pPr>
             <a:r>
-              <a:rPr sz="960" b="1" i="0">
+              <a:rPr sz="1000" b="1" i="0">
                 <a:solidFill>
                   <a:srgbClr val="334155"/>
                 </a:solidFill>
                 <a:latin typeface="DM Sans"/>
               </a:rPr>
-              <a:t>No magnetometer: </a:t>
+              <a:t>Evidence we will bring: </a:t>
             </a:r>
             <a:r>
-              <a:rPr sz="960" b="0" i="0">
+              <a:rPr sz="1000" b="0" i="0">
                 <a:solidFill>
                   <a:srgbClr val="334155"/>
                 </a:solidFill>
                 <a:latin typeface="DM Sans"/>
               </a:rPr>
-              <a:t>MPU6500 yaw drifts, so it is used only to reject head motion, never for room heading. DUALR3 control path (eWeLink LAN vs cloud) confirmed before coding.</a:t>
+              <a:t>logged accuracy, false-activation and latency numbers from scripted sessions, plus the commits and photos that show each milestone.</a:t>
             </a:r>
           </a:p>
         </p:txBody>
       </p:sp>
       <p:sp>
         <p:nvSpPr>
-          <p:cNvPr id="176" name="Rounded Rectangle 175"/>
+          <p:cNvPr id="184" name="Rounded Rectangle 183"/>
           <p:cNvSpPr/>
           <p:nvPr/>
         </p:nvSpPr>
@@ -23560,7 +27228,7 @@
       </p:sp>
       <p:sp>
         <p:nvSpPr>
-          <p:cNvPr id="177" name="TextBox 176"/>
+          <p:cNvPr id="185" name="TextBox 184"/>
           <p:cNvSpPr txBox="1"/>
           <p:nvPr/>
         </p:nvSpPr>
@@ -23588,7 +27256,7 @@
                 </a:solidFill>
                 <a:latin typeface="DM Sans"/>
               </a:rPr>
-              <a:t>Verification plan: </a:t>
+              <a:t>Dependencies: </a:t>
             </a:r>
             <a:r>
               <a:rPr sz="936" b="0" i="0">
@@ -23597,7 +27265,7 @@
                 </a:solidFill>
                 <a:latin typeface="DM Sans"/>
               </a:rPr>
-              <a:t>every risk has a bench test — 10-minute fixed-gaze drift recordings, a signal-generator ADC sweep, scripted chew / talk / clench sessions — with results reported at Stage 3.</a:t>
+              <a:t>parts delivery (ordered by 6 Oct 2026), college 3D-printer slot, electrician visit for the DUALR3, and ethics approval before any volunteer testing.</a:t>
             </a:r>
           </a:p>
         </p:txBody>
